--- a/산출물/교재/PPTX/통합반_온라인/통합반_09일차.pptx
+++ b/산출물/교재/PPTX/통합반_온라인/통합반_09일차.pptx
@@ -1275,7 +1275,7 @@
           <a:lstStyle/>
           <a:p>
             <a:r>
-              <a:t>프로세스를 만들고 운영하고 고쳐 가는 일 전체를 관리하는 방법이 BPM, Business Process Management입니다. BPM이 보는 것은 작업 하나가 아니라 처음부터 끝까지의 흐름입니다. 앞에서 구분한 End-to-End가 관리의 단위가 됩니다.</a:t>
+              <a:t>프로세스를 만들고 운영하고 고쳐 가는 일 전체를 관리하는 방법이 BPM, Business Process Management입니다. BPM이 보는 것은 작업 하나가 아니라 처음부터 끝까지의 흐름입니다. 앞에서 구분한 End-to-End가 관리의 단위가 되며, 판단 한 단계가 빨라져도 승인이 늦으면 업무 전체는 빨라지지 않습니다.</a:t>
             </a:r>
           </a:p>
         </p:txBody>
@@ -2535,7 +2535,7 @@
           <a:lstStyle/>
           <a:p>
             <a:r>
-              <a:t>참여자가 둘이면 풀도 둘을 그립니다. 풀 안에서 작업의 순서를 잇는 선은 실선의 시퀀스 흐름입니다. 풀과 풀 사이에서 오가는 것은 점선의 메시지 흐름으로 그리며, 출발 쪽에 작은 원이 있고 화살촉이 비어 있습니다. 그림은 설비를 운영하는 조직이 공급사에 발주서를 보내고 납기 회신을 받는 일반적인 예이며, 긴급 대응 프로세스는 풀 하나로 그려 메시지 흐름이 없습니다.</a:t>
+              <a:t>칸이 맡는 쪽을 정한다면, 쿨러 사건과 같은 승인 경우에 작업을 실제로 맡는 쪽은 이 표와 같습니다. 진단과 제안은 에이전트가, 승인은 운전원 역할이, 명령과 재관측과 작업지시 등록과 결과 보고는 시스템들이 맡습니다. 레인의 배치를 보면 설비를 움직이는 냉각 명령 앞에 사람의 승인이 놓여 있습니다. 누가 판단하고 누가 결정하고 누가 실행하는지를 그림이 정해 둡니다.</a:t>
             </a:r>
           </a:p>
         </p:txBody>
@@ -2605,7 +2605,7 @@
           <a:lstStyle/>
           <a:p>
             <a:r>
-              <a:t>작업이 끝나기를 기다리는 동안 생기는 일은 경계 이벤트, Boundary Event로 그립니다. 작업의 테두리에 겹테두리 원을 붙이고, 시계가 그려진 것은 정한 기간이 지나면 발생하는 타이머입니다. 왼쪽의 실선은 중단형으로, 발생하면 붙어 있던 작업을 끊고 다른 가지로 갑니다. 오른쪽의 점선은 비중단형으로, 작업은 그대로 두고 가지를 하나 더 엽니다.</a:t>
+              <a:t>참여자가 둘이면 풀도 둘을 그립니다. 풀 안에서 작업의 순서를 잇는 선은 실선의 시퀀스 흐름입니다. 풀과 풀 사이에서 오가는 것은 점선의 메시지 흐름으로 그리며, 출발 쪽에 작은 원이 있고 화살촉이 비어 있습니다. 그림은 설비를 운영하는 조직이 공급사에 발주서를 보내고 납기 회신을 받는 일반적인 예이며, 긴급 대응 프로세스는 풀 하나로 그려 메시지 흐름이 없습니다.</a:t>
             </a:r>
           </a:p>
         </p:txBody>
@@ -2675,7 +2675,7 @@
           <a:lstStyle/>
           <a:p>
             <a:r>
-              <a:t>긴급 대응 프로세스에서 사람의 결정을 받는 부분만 떼어 놓았습니다. 운전원 승인 뒤에 승인? 게이트웨이가 있어 승인이면 냉각 명령으로, 거절이면 결과 보고: 거절을 거쳐 거절 종결로 갑니다. 승인 작업의 테두리에는 기한이 10분인 승인 지연 타이머가 붙어 있습니다. 점선의 비중단형이어서 10분이 지나면 알림 가지만 열리고 승인 작업은 계속 기다립니다.</a:t>
+              <a:t>작업이 끝나기를 기다리는 동안 생기는 일은 경계 이벤트, Boundary Event로 그립니다. 작업의 테두리에 겹테두리 원을 붙이고, 시계가 그려진 것은 정한 기간이 지나면 발생하는 타이머입니다. 왼쪽의 실선은 중단형으로, 발생하면 붙어 있던 작업을 끊고 다른 가지로 갑니다. 오른쪽의 점선은 비중단형으로, 작업은 그대로 두고 가지를 하나 더 엽니다.</a:t>
             </a:r>
           </a:p>
         </p:txBody>
@@ -2745,7 +2745,7 @@
           <a:lstStyle/>
           <a:p>
             <a:r>
-              <a:t>그림 하나가 여러 경우를 담고 있습니다. 쿨러 사건처럼 승인하면 냉각 명령, 재관측, 작업지시 등록, 결과 보고를 거쳐 끝에 닿습니다. 거절하면 냉각 명령으로 가는 선을 지나지 않고 거절 종결에 닿습니다. 운전원이 응답하지 않으면 알림 가지만 알림에 닿아 끝나고, 운전원 승인은 열린 채로 남습니다.</a:t>
+              <a:t>긴급 대응 프로세스에서 사람의 결정을 받는 부분만 떼어 놓았습니다. 운전원 승인 뒤에 승인? 게이트웨이가 있어 승인이면 냉각 명령으로, 거절이면 결과 보고: 거절을 거쳐 거절 종결로 갑니다. 승인 작업의 테두리에는 기한이 10분인 승인 지연 타이머가 붙어 있습니다. 점선의 비중단형이어서 10분이 지나면 알림 가지만 열리고 승인 작업은 계속 기다립니다.</a:t>
             </a:r>
           </a:p>
         </p:txBody>
@@ -2815,7 +2815,7 @@
           <a:lstStyle/>
           <a:p>
             <a:r>
-              <a:t>쿨러 사건과 같은 승인 경우에 작업을 실제로 맡는 쪽입니다. 진단과 제안은 에이전트가, 승인은 운전원 역할이, 명령과 재관측과 작업지시 등록과 결과 보고는 시스템들이 맡습니다. 레인의 배치를 보면 설비를 움직이는 냉각 명령 앞에 사람의 승인이 놓여 있습니다. 누가 판단하고 누가 결정하고 누가 실행하는지를 그림이 정해 둡니다.</a:t>
+              <a:t>그림 하나가 여러 경우를 담고 있습니다. 쿨러 사건처럼 승인하면 냉각 명령, 재관측, 작업지시 등록, 결과 보고를 거쳐 끝에 닿습니다. 거절하면 냉각 명령으로 가는 선을 지나지 않고 거절 종결에 닿습니다. 운전원이 응답하지 않으면 알림 가지만 알림에 닿아 끝나고, 운전원 승인은 열린 채로 남습니다.</a:t>
             </a:r>
           </a:p>
         </p:txBody>
@@ -3235,7 +3235,7 @@
           <a:lstStyle/>
           <a:p>
             <a:r>
-              <a:t>엔진이 다루는 것을 둘로 구분합니다. 왼쪽의 프로세스 정의는 요소와 선과 조건을 담은 설계도이며 하나뿐입니다. 오른쪽의 프로세스 인스턴스는 그 설계도에 따라 실제로 실행되는 한 건으로, 앞에서 처리 건이라고 부른 것입니다. 쿨러 사건의 처리 건은 승인되어 끝났고, 같은 정의에서 열린 다른 처리 건은 거절로 끝나거나 승인을 기다렸습니다.</a:t>
+              <a:t>엔진이 다루는 것을 둘로 구분합니다. 왼쪽의 프로세스 정의는 요소와 선과 조건을 담은 설계도이며, 긴급 대응 프로세스의 설계도는 이 한 장입니다. 오른쪽의 프로세스 인스턴스는 그 설계도에 따라 실제로 실행되는 한 건으로, 앞에서 처리 건이라고 부른 것입니다. 쿨러 사건의 처리 건은 승인되어 끝났고, 같은 정의에서 열린 다른 처리 건은 거절로 끝났고, 맨 아래 건은 승인을 기다리던 순간의 모습입니다.</a:t>
             </a:r>
           </a:p>
         </p:txBody>
@@ -3375,7 +3375,7 @@
           <a:lstStyle/>
           <a:p>
             <a:r>
-              <a:t>운전원의 승인을 기다리던 처리 건의 실제 기록입니다. 처리 건의 상태는 실행 중을 뜻하는 RUNNING이고, 열려 있는 단계는 운전원 승인입니다. 아래는 단계마다의 상태로, 에이전트의 단계는 DONE, 운전원 승인은 IN_PROGRESS, 아직 닿지 않은 단계는 TODO입니다. 승인 대기는 고장이 아니라 토큰이 사용자 작업에 머문 정상 상태입니다.</a:t>
+              <a:t>운전원의 승인을 기다리던 처리 건의 실제 기록입니다. 처리 건의 상태는 실행 중을 뜻하는 RUNNING이고, 열려 있는 단계는 운전원 승인입니다. 그림의 작업 하나가 처리 건마다 단계 하나가 되며, 아래는 단계마다의 상태로, 에이전트의 단계는 DONE, 운전원 승인은 IN_PROGRESS, 아직 닿지 않은 단계는 TODO입니다. 승인 대기는 고장이 아니라 토큰이 사용자 작업에 머문 정상 상태입니다.</a:t>
             </a:r>
           </a:p>
         </p:txBody>
@@ -3795,7 +3795,7 @@
           <a:lstStyle/>
           <a:p>
             <a:r>
-              <a:t>에이전트 단계 안을 들여다보겠습니다. 냉각 긴급 대응 에이전트의 스킬이 정한 순서로, 작업의 입력을 읽고 diagnose로 지식 그래프와 센서 값에서 원인을 가립니다. 업무 DB에서 납기 오더와 출하 대기 로트를 읽고, evaluate_cards로 SOP 조치 넷을 판단 규칙과 성과 기준으로 견줍니다. 마지막에 추천안 하나를 제출하면 판단 id가 붙고, 쿨러 사건에서는 이 단계 안에서 도구를 열 번 불렀습니다.</a:t>
+              <a:t>에이전트 단계 안을 들여다보겠습니다. 냉각 긴급 대응 에이전트의 스킬이 정한 순서로, 작업의 입력을 읽고 diagnose로 지식 그래프와 센서 값에서 원인을 가립니다. 필요하면 업무 DB에서 납기 오더와 출하 대기 로트를 확인하고, evaluate_cards로 SOP 조치 넷을 판단 규칙과 성과 기준으로 견줍니다. 마지막에 추천안 하나를 제출하면 판단 id가 붙고, 쿨러 사건에서는 이 단계 안에서 도구를 여러 차례 불렀습니다.</a:t>
             </a:r>
           </a:p>
         </p:txBody>
@@ -4355,7 +4355,7 @@
           <a:lstStyle/>
           <a:p>
             <a:r>
-              <a:t>둘째 실습에서는 이번 회차에 읽은 긴급 대응 프로세스를 직접 그립니다. 세 레인에 작업을 나누어 놓고, 경보에서 결과 보고까지 순서를 잇습니다. 승인과 거절을 가르는 게이트웨이와 각각의 끝을 두고, 승인 작업에는 승인을 끊지 않는 지연 알림 타이머를 붙입니다. 결과물은 이 프로세스의 BPMN 파일이며, 완성 그림과 요소와 갈림을 대조해 확인합니다.</a:t>
+              <a:t>둘째 실습에서는 이번 회차에 읽은 긴급 대응 프로세스를 직접 그립니다. 세 레인에 작업을 나누어 놓고 경보에서 결과 보고까지 순서를 이으며, 승인과 거절을 가르는 게이트웨이와 각각의 끝, 승인을 끊지 않는 지연 알림 타이머를 둡니다. 결과물은 이 프로세스의 BPMN 파일이고 다음 실습에서 그대로 씁니다. 완성 그림과 요소 · 갈림 · 타이머의 종류가 같고 모든 갈래가 끝에 닿으면 성공입니다.</a:t>
             </a:r>
           </a:p>
         </p:txBody>
@@ -4565,7 +4565,7 @@
           <a:lstStyle/>
           <a:p>
             <a:r>
-              <a:t>마지막 실습에서는 배포한 프로세스를 실제로 실행합니다. 쿨러 열화를 일으켜 처리 건이 열리는 것을 보고, 추천안이 나온 뒤 운전원 승인에서 기다리는 상태를 확인합니다. 승인한 뒤에는 명령과 재관측을 거쳐 어느 끝 이벤트에 닿았는지를 읽습니다. 끝으로 처음부터 배포되어 있던 기준 흐름과 내 흐름의 구조를 견줍니다.</a:t>
+              <a:t>마지막 실습에서는 배포한 프로세스를 실제로 실행합니다. 쿨러 열화를 일으켜 처리 건이 열리는 것을 보고, 운전원 승인에서 기다리는 상태와 승인 뒤 닿은 끝 이벤트를 읽으며, HYD에 원래 있는 기준 흐름과 내 흐름의 구조를 견줍니다. 결과물은 내 흐름의 처리 건과 그 처리 기록입니다. 승인 대기와 끝남을 단계의 상태로 구별해 말할 수 있으면 성공입니다.</a:t>
             </a:r>
           </a:p>
         </p:txBody>
@@ -4635,7 +4635,7 @@
           <a:lstStyle/>
           <a:p>
             <a:r>
-              <a:t>쿨러 사건의 장면을 하나씩 보며 프로세스의 어느 개념인지 먼저 말해 봅니다. 그다음 오른쪽 열의 짝이 왜 다른지 판단합니다. 승인 대기는 오류가 아니고, 갈림은 에이전트가 아니라 변수를 읽는 조건이 정하며, COMPLETED는 실행이 끝났다는 뜻일 뿐입니다. 알림 장면은 쿨러 사건이 아니라 응답이 없던 다른 처리 건의 일이라는 점도 구별합니다.</a:t>
+              <a:t>쿨러 사건의 장면을 일어난 순서대로 보며 프로세스의 어느 개념인지 먼저 말해 봅니다. 그다음 오른쪽 열의 짝이 왜 다른지 판단합니다. 승인 대기는 오류가 아니고, 갈림은 에이전트가 아니라 변수를 읽는 조건이 정하며, 알림이 나가는 것과 처리 건이 끝나는 것은 다른 일이고, COMPLETED는 실행이 끝났다는 뜻일 뿐입니다.</a:t>
             </a:r>
           </a:p>
         </p:txBody>
@@ -5125,7 +5125,7 @@
           <a:lstStyle/>
           <a:p>
             <a:r>
-              <a:t>Task는 프로세스 안의 작업 하나로, 위쪽 괄호가 가리키는 에이전트의 추천이 그 예입니다. End-to-End는 아래쪽 괄호처럼 경보라는 시작 사건에서 끝까지의 전체이며 우리말로는 종단 간이라고 합니다. 쿨러 사건에서 에이전트의 Task가 끝난 시점에는 설비 명령이 없었고 유온도 그대로였습니다. 냉각 명령과 유온 51.5도와 작업지시는 End-to-End가 끝난 시점에 남았습니다.</a:t>
+              <a:t>Task는 프로세스 안의 작업 하나로, 위쪽 괄호가 가리키는 에이전트의 추천이 그 예입니다. End-to-End는 아래쪽 괄호처럼 경보라는 시작 사건에서 끝까지의 전체이며 우리말로는 종단 간이라고 합니다. 쿨러 사건에서 에이전트의 Task는 처리 건 시간의 절반 남짓을 썼지만, 끝난 시점에 설비 명령이 없었고 유온도 그대로였습니다. 냉각 명령과 회복 기준 아래로 내려온 유온과 작업지시는 End-to-End가 끝난 시점에 남았습니다.</a:t>
             </a:r>
           </a:p>
         </p:txBody>
@@ -8827,7 +8827,7 @@
       </p:sp>
       <p:pic>
         <p:nvPicPr>
-          <p:cNvPr id="6" name="삽화:남은일_종단.svg" descr="illust_975807490730620848_1792123197.png"/>
+          <p:cNvPr id="6" name="삽화:남은일_종단.svg" descr="illust_6578077721240359335_1792123197.png"/>
           <p:cNvPicPr>
             <a:picLocks noChangeAspect="1"/>
           </p:cNvPicPr>
@@ -9194,7 +9194,7 @@
         <p:spPr>
           <a:xfrm>
             <a:off x="1077479" y="1816729"/>
-            <a:ext cx="3927418" cy="678053"/>
+            <a:ext cx="3927418" cy="848487"/>
           </a:xfrm>
           <a:prstGeom prst="rect">
             <a:avLst/>
@@ -9243,7 +9243,7 @@
                 <a:ea typeface="맑은 고딕"/>
                 <a:cs typeface="맑은 고딕"/>
               </a:rPr>
-              <a:t>작업 하나</a:t>
+              <a:t>원인 진단 · 냉각 조치 제안</a:t>
             </a:r>
           </a:p>
           <a:p>
@@ -9267,27 +9267,6 @@
               <a:t>끝난 시점: 설비 명령 없음, 유온 그대로</a:t>
             </a:r>
           </a:p>
-        </p:txBody>
-      </p:sp>
-      <p:sp>
-        <p:nvSpPr>
-          <p:cNvPr id="16" name="TextBox 15"/>
-          <p:cNvSpPr txBox="1"/>
-          <p:nvPr/>
-        </p:nvSpPr>
-        <p:spPr>
-          <a:xfrm>
-            <a:off x="2822999" y="5409590"/>
-            <a:ext cx="6545697" cy="678053"/>
-          </a:xfrm>
-          <a:prstGeom prst="rect">
-            <a:avLst/>
-          </a:prstGeom>
-          <a:noFill/>
-        </p:spPr>
-        <p:txBody>
-          <a:bodyPr wrap="square" anchor="t"/>
-          <a:lstStyle/>
           <a:p>
             <a:pPr algn="ctr" eaLnBrk="0">
               <a:lnSpc>
@@ -9298,17 +9277,38 @@
               </a:spcAft>
             </a:pPr>
             <a:r>
-              <a:rPr sz="1350" b="1">
-                <a:solidFill>
-                  <a:srgbClr val="1A6FC4"/>
-                </a:solidFill>
-                <a:latin typeface="맑은 고딕"/>
-                <a:ea typeface="맑은 고딕"/>
-                <a:cs typeface="맑은 고딕"/>
-              </a:rPr>
-              <a:t>End-to-End</a:t>
-            </a:r>
-          </a:p>
+              <a:rPr sz="1100" b="0">
+                <a:solidFill>
+                  <a:srgbClr val="556175"/>
+                </a:solidFill>
+                <a:latin typeface="맑은 고딕"/>
+                <a:ea typeface="맑은 고딕"/>
+                <a:cs typeface="맑은 고딕"/>
+              </a:rPr>
+              <a:t>걸린 시간: 처리 건 전체의 절반 남짓</a:t>
+            </a:r>
+          </a:p>
+        </p:txBody>
+      </p:sp>
+      <p:sp>
+        <p:nvSpPr>
+          <p:cNvPr id="16" name="TextBox 15"/>
+          <p:cNvSpPr txBox="1"/>
+          <p:nvPr/>
+        </p:nvSpPr>
+        <p:spPr>
+          <a:xfrm>
+            <a:off x="2822999" y="5409590"/>
+            <a:ext cx="6545697" cy="678053"/>
+          </a:xfrm>
+          <a:prstGeom prst="rect">
+            <a:avLst/>
+          </a:prstGeom>
+          <a:noFill/>
+        </p:spPr>
+        <p:txBody>
+          <a:bodyPr wrap="square" anchor="t"/>
+          <a:lstStyle/>
           <a:p>
             <a:pPr algn="ctr" eaLnBrk="0">
               <a:lnSpc>
@@ -9319,6 +9319,27 @@
               </a:spcAft>
             </a:pPr>
             <a:r>
+              <a:rPr sz="1350" b="1">
+                <a:solidFill>
+                  <a:srgbClr val="1A6FC4"/>
+                </a:solidFill>
+                <a:latin typeface="맑은 고딕"/>
+                <a:ea typeface="맑은 고딕"/>
+                <a:cs typeface="맑은 고딕"/>
+              </a:rPr>
+              <a:t>End-to-End</a:t>
+            </a:r>
+          </a:p>
+          <a:p>
+            <a:pPr algn="ctr" eaLnBrk="0">
+              <a:lnSpc>
+                <a:spcPct val="110000"/>
+              </a:lnSpc>
+              <a:spcAft>
+                <a:spcPts val="100"/>
+              </a:spcAft>
+            </a:pPr>
+            <a:r>
               <a:rPr sz="1100" b="0">
                 <a:solidFill>
                   <a:srgbClr val="556175"/>
@@ -9327,7 +9348,7 @@
                 <a:ea typeface="맑은 고딕"/>
                 <a:cs typeface="맑은 고딕"/>
               </a:rPr>
-              <a:t>시작 사건에서 최종 결과까지</a:t>
+              <a:t>쿨러 사건의 처리 건</a:t>
             </a:r>
           </a:p>
           <a:p>
@@ -11485,7 +11506,7 @@
                 <a:ea typeface="맑은 고딕"/>
                 <a:cs typeface="맑은 고딕"/>
               </a:rPr>
-              <a:t>끝 이벤트에 닿는다</a:t>
+              <a:t>정해 둔 끝 자리에 닿는다</a:t>
             </a:r>
           </a:p>
         </p:txBody>
@@ -13184,8 +13205,8 @@
         </p:nvSpPr>
         <p:spPr>
           <a:xfrm>
-            <a:off x="548640" y="2154427"/>
-            <a:ext cx="3515258" cy="3673856"/>
+            <a:off x="548640" y="2150554"/>
+            <a:ext cx="3515258" cy="3681603"/>
           </a:xfrm>
           <a:prstGeom prst="roundRect">
             <a:avLst>
@@ -13217,7 +13238,7 @@
         </p:nvSpPr>
         <p:spPr>
           <a:xfrm>
-            <a:off x="777240" y="2355596"/>
+            <a:off x="777240" y="2351722"/>
             <a:ext cx="731520" cy="731520"/>
           </a:xfrm>
           <a:prstGeom prst="ellipse">
@@ -13254,7 +13275,7 @@
         </p:blipFill>
         <p:spPr>
           <a:xfrm>
-            <a:off x="930859" y="2509215"/>
+            <a:off x="930859" y="2505341"/>
             <a:ext cx="424281" cy="424281"/>
           </a:xfrm>
           <a:prstGeom prst="rect">
@@ -13270,8 +13291,8 @@
         </p:nvSpPr>
         <p:spPr>
           <a:xfrm>
-            <a:off x="713232" y="3178556"/>
-            <a:ext cx="3186074" cy="2146808"/>
+            <a:off x="713232" y="3174682"/>
+            <a:ext cx="3186074" cy="2154555"/>
           </a:xfrm>
           <a:prstGeom prst="rect">
             <a:avLst/>
@@ -13291,7 +13312,7 @@
               </a:spcAft>
             </a:pPr>
             <a:r>
-              <a:rPr sz="2200" b="1">
+              <a:rPr sz="1950" b="1">
                 <a:solidFill>
                   <a:srgbClr val="13294B"/>
                 </a:solidFill>
@@ -13303,7 +13324,7 @@
             </a:r>
           </a:p>
           <a:p>
-            <a:pPr algn="l" eaLnBrk="0" marL="205740" indent="-205740">
+            <a:pPr algn="l" eaLnBrk="0" marL="177165" indent="-177165">
               <a:lnSpc>
                 <a:spcPct val="110000"/>
               </a:lnSpc>
@@ -13312,7 +13333,7 @@
               </a:spcAft>
             </a:pPr>
             <a:r>
-              <a:rPr sz="1800" b="0">
+              <a:rPr sz="1550" b="0">
                 <a:solidFill>
                   <a:srgbClr val="1F2A3A"/>
                 </a:solidFill>
@@ -13324,7 +13345,7 @@
             </a:r>
           </a:p>
           <a:p>
-            <a:pPr algn="l" eaLnBrk="0" marL="205740" indent="-205740">
+            <a:pPr algn="l" eaLnBrk="0" marL="177165" indent="-177165">
               <a:lnSpc>
                 <a:spcPct val="110000"/>
               </a:lnSpc>
@@ -13333,7 +13354,7 @@
               </a:spcAft>
             </a:pPr>
             <a:r>
-              <a:rPr sz="1800" b="0">
+              <a:rPr sz="1550" b="0">
                 <a:solidFill>
                   <a:srgbClr val="1F2A3A"/>
                 </a:solidFill>
@@ -13342,6 +13363,27 @@
                 <a:cs typeface="맑은 고딕"/>
               </a:rPr>
               <a:t>• 근무자가 바뀌어도 프로세스는 그대로 둔다</a:t>
+            </a:r>
+          </a:p>
+          <a:p>
+            <a:pPr algn="l" eaLnBrk="0" marL="177165" indent="-177165">
+              <a:lnSpc>
+                <a:spcPct val="110000"/>
+              </a:lnSpc>
+              <a:spcAft>
+                <a:spcPts val="400"/>
+              </a:spcAft>
+            </a:pPr>
+            <a:r>
+              <a:rPr sz="1550" b="0">
+                <a:solidFill>
+                  <a:srgbClr val="1F2A3A"/>
+                </a:solidFill>
+                <a:latin typeface="맑은 고딕"/>
+                <a:ea typeface="맑은 고딕"/>
+                <a:cs typeface="맑은 고딕"/>
+              </a:rPr>
+              <a:t>• 쿨러 핀 세척의 승인만 설비보전팀장 역할이 한다</a:t>
             </a:r>
           </a:p>
         </p:txBody>
@@ -13354,7 +13396,7 @@
         </p:nvSpPr>
         <p:spPr>
           <a:xfrm>
-            <a:off x="777240" y="5398516"/>
+            <a:off x="777240" y="5402389"/>
             <a:ext cx="822960" cy="292608"/>
           </a:xfrm>
           <a:prstGeom prst="roundRect">
@@ -13385,7 +13427,7 @@
         </p:nvSpPr>
         <p:spPr>
           <a:xfrm>
-            <a:off x="777240" y="5398516"/>
+            <a:off x="777240" y="5402389"/>
             <a:ext cx="822960" cy="292608"/>
           </a:xfrm>
           <a:prstGeom prst="rect">
@@ -13424,8 +13466,8 @@
         </p:nvSpPr>
         <p:spPr>
           <a:xfrm>
-            <a:off x="4338218" y="2154427"/>
-            <a:ext cx="3515258" cy="3673856"/>
+            <a:off x="4338218" y="2150554"/>
+            <a:ext cx="3515258" cy="3681603"/>
           </a:xfrm>
           <a:prstGeom prst="roundRect">
             <a:avLst>
@@ -13457,7 +13499,7 @@
         </p:nvSpPr>
         <p:spPr>
           <a:xfrm>
-            <a:off x="4566818" y="2355596"/>
+            <a:off x="4566818" y="2351722"/>
             <a:ext cx="731520" cy="731520"/>
           </a:xfrm>
           <a:prstGeom prst="ellipse">
@@ -13494,7 +13536,7 @@
         </p:blipFill>
         <p:spPr>
           <a:xfrm>
-            <a:off x="4720437" y="2509215"/>
+            <a:off x="4720437" y="2505341"/>
             <a:ext cx="424281" cy="424281"/>
           </a:xfrm>
           <a:prstGeom prst="rect">
@@ -13510,8 +13552,8 @@
         </p:nvSpPr>
         <p:spPr>
           <a:xfrm>
-            <a:off x="4502810" y="3178556"/>
-            <a:ext cx="3186074" cy="2146808"/>
+            <a:off x="4502810" y="3174682"/>
+            <a:ext cx="3186074" cy="2154555"/>
           </a:xfrm>
           <a:prstGeom prst="rect">
             <a:avLst/>
@@ -13531,7 +13573,7 @@
               </a:spcAft>
             </a:pPr>
             <a:r>
-              <a:rPr sz="2200" b="1">
+              <a:rPr sz="1950" b="1">
                 <a:solidFill>
                   <a:srgbClr val="13294B"/>
                 </a:solidFill>
@@ -13543,7 +13585,7 @@
             </a:r>
           </a:p>
           <a:p>
-            <a:pPr algn="l" eaLnBrk="0" marL="205740" indent="-205740">
+            <a:pPr algn="l" eaLnBrk="0" marL="177165" indent="-177165">
               <a:lnSpc>
                 <a:spcPct val="110000"/>
               </a:lnSpc>
@@ -13552,7 +13594,7 @@
               </a:spcAft>
             </a:pPr>
             <a:r>
-              <a:rPr sz="1800" b="0">
+              <a:rPr sz="1550" b="0">
                 <a:solidFill>
                   <a:srgbClr val="1F2A3A"/>
                 </a:solidFill>
@@ -13564,7 +13606,7 @@
             </a:r>
           </a:p>
           <a:p>
-            <a:pPr algn="l" eaLnBrk="0" marL="205740" indent="-205740">
+            <a:pPr algn="l" eaLnBrk="0" marL="177165" indent="-177165">
               <a:lnSpc>
                 <a:spcPct val="110000"/>
               </a:lnSpc>
@@ -13573,7 +13615,7 @@
               </a:spcAft>
             </a:pPr>
             <a:r>
-              <a:rPr sz="1800" b="0">
+              <a:rPr sz="1550" b="0">
                 <a:solidFill>
                   <a:srgbClr val="1F2A3A"/>
                 </a:solidFill>
@@ -13594,7 +13636,7 @@
         </p:nvSpPr>
         <p:spPr>
           <a:xfrm>
-            <a:off x="4566818" y="5398516"/>
+            <a:off x="4566818" y="5402389"/>
             <a:ext cx="868680" cy="292608"/>
           </a:xfrm>
           <a:prstGeom prst="roundRect">
@@ -13625,7 +13667,7 @@
         </p:nvSpPr>
         <p:spPr>
           <a:xfrm>
-            <a:off x="4566818" y="5398516"/>
+            <a:off x="4566818" y="5402389"/>
             <a:ext cx="868680" cy="292608"/>
           </a:xfrm>
           <a:prstGeom prst="rect">
@@ -13664,8 +13706,8 @@
         </p:nvSpPr>
         <p:spPr>
           <a:xfrm>
-            <a:off x="8127796" y="2154427"/>
-            <a:ext cx="3515258" cy="3673856"/>
+            <a:off x="8127796" y="2150554"/>
+            <a:ext cx="3515258" cy="3681603"/>
           </a:xfrm>
           <a:prstGeom prst="roundRect">
             <a:avLst>
@@ -13697,7 +13739,7 @@
         </p:nvSpPr>
         <p:spPr>
           <a:xfrm>
-            <a:off x="8356396" y="2355596"/>
+            <a:off x="8356396" y="2351722"/>
             <a:ext cx="731520" cy="731520"/>
           </a:xfrm>
           <a:prstGeom prst="ellipse">
@@ -13734,7 +13776,7 @@
         </p:blipFill>
         <p:spPr>
           <a:xfrm>
-            <a:off x="8510016" y="2509215"/>
+            <a:off x="8510016" y="2505341"/>
             <a:ext cx="424281" cy="424281"/>
           </a:xfrm>
           <a:prstGeom prst="rect">
@@ -13750,8 +13792,8 @@
         </p:nvSpPr>
         <p:spPr>
           <a:xfrm>
-            <a:off x="8292388" y="3178556"/>
-            <a:ext cx="3186074" cy="2146808"/>
+            <a:off x="8292388" y="3174682"/>
+            <a:ext cx="3186074" cy="2154555"/>
           </a:xfrm>
           <a:prstGeom prst="rect">
             <a:avLst/>
@@ -13771,7 +13813,7 @@
               </a:spcAft>
             </a:pPr>
             <a:r>
-              <a:rPr sz="2200" b="1">
+              <a:rPr sz="1950" b="1">
                 <a:solidFill>
                   <a:srgbClr val="13294B"/>
                 </a:solidFill>
@@ -13792,7 +13834,7 @@
               </a:spcAft>
             </a:pPr>
             <a:r>
-              <a:rPr sz="1800" b="0">
+              <a:rPr sz="1550" b="0">
                 <a:solidFill>
                   <a:srgbClr val="1F2A3A"/>
                 </a:solidFill>
@@ -13813,7 +13855,7 @@
         </p:nvSpPr>
         <p:spPr>
           <a:xfrm>
-            <a:off x="8356396" y="5398516"/>
+            <a:off x="8356396" y="5402389"/>
             <a:ext cx="822960" cy="292608"/>
           </a:xfrm>
           <a:prstGeom prst="roundRect">
@@ -13844,7 +13886,7 @@
         </p:nvSpPr>
         <p:spPr>
           <a:xfrm>
-            <a:off x="8356396" y="5398516"/>
+            <a:off x="8356396" y="5402389"/>
             <a:ext cx="822960" cy="292608"/>
           </a:xfrm>
           <a:prstGeom prst="rect">
@@ -14967,8 +15009,8 @@
         </p:nvSpPr>
         <p:spPr>
           <a:xfrm>
-            <a:off x="548640" y="2154427"/>
-            <a:ext cx="3515258" cy="3673856"/>
+            <a:off x="548640" y="2247391"/>
+            <a:ext cx="3515258" cy="3487928"/>
           </a:xfrm>
           <a:prstGeom prst="roundRect">
             <a:avLst>
@@ -15000,7 +15042,7 @@
         </p:nvSpPr>
         <p:spPr>
           <a:xfrm>
-            <a:off x="777240" y="2355596"/>
+            <a:off x="777240" y="2448560"/>
             <a:ext cx="731520" cy="731520"/>
           </a:xfrm>
           <a:prstGeom prst="ellipse">
@@ -15037,7 +15079,7 @@
         </p:blipFill>
         <p:spPr>
           <a:xfrm>
-            <a:off x="930859" y="2509215"/>
+            <a:off x="930859" y="2602179"/>
             <a:ext cx="424281" cy="424281"/>
           </a:xfrm>
           <a:prstGeom prst="rect">
@@ -15053,8 +15095,8 @@
         </p:nvSpPr>
         <p:spPr>
           <a:xfrm>
-            <a:off x="713232" y="3178556"/>
-            <a:ext cx="3186074" cy="2146808"/>
+            <a:off x="713232" y="3271519"/>
+            <a:ext cx="3186074" cy="1960880"/>
           </a:xfrm>
           <a:prstGeom prst="rect">
             <a:avLst/>
@@ -15074,7 +15116,7 @@
               </a:spcAft>
             </a:pPr>
             <a:r>
-              <a:rPr sz="2200" b="1">
+              <a:rPr sz="2000" b="1">
                 <a:solidFill>
                   <a:srgbClr val="13294B"/>
                 </a:solidFill>
@@ -15086,7 +15128,7 @@
             </a:r>
           </a:p>
           <a:p>
-            <a:pPr algn="l" eaLnBrk="0" marL="205740" indent="-205740">
+            <a:pPr algn="l" eaLnBrk="0" marL="182880" indent="-182880">
               <a:lnSpc>
                 <a:spcPct val="110000"/>
               </a:lnSpc>
@@ -15095,7 +15137,7 @@
               </a:spcAft>
             </a:pPr>
             <a:r>
-              <a:rPr sz="1800" b="0">
+              <a:rPr sz="1600" b="0">
                 <a:solidFill>
                   <a:srgbClr val="1F2A3A"/>
                 </a:solidFill>
@@ -15107,7 +15149,7 @@
             </a:r>
           </a:p>
           <a:p>
-            <a:pPr algn="l" eaLnBrk="0" marL="205740" indent="-205740">
+            <a:pPr algn="l" eaLnBrk="0" marL="182880" indent="-182880">
               <a:lnSpc>
                 <a:spcPct val="110000"/>
               </a:lnSpc>
@@ -15116,7 +15158,7 @@
               </a:spcAft>
             </a:pPr>
             <a:r>
-              <a:rPr sz="1800" b="0">
+              <a:rPr sz="1600" b="0">
                 <a:solidFill>
                   <a:srgbClr val="1F2A3A"/>
                 </a:solidFill>
@@ -15124,7 +15166,7 @@
                 <a:ea typeface="맑은 고딕"/>
                 <a:cs typeface="맑은 고딕"/>
               </a:rPr>
-              <a:t>• 승인이 빠진 흐름은 등록 전 검사에서 거절된다</a:t>
+              <a:t>• 승인이 빠지거나 거절 갈래에서 효과가 나가는 흐름은 받아들이지 않는다</a:t>
             </a:r>
           </a:p>
         </p:txBody>
@@ -15137,7 +15179,7 @@
         </p:nvSpPr>
         <p:spPr>
           <a:xfrm>
-            <a:off x="777240" y="5398516"/>
+            <a:off x="777240" y="5305552"/>
             <a:ext cx="1219199" cy="292608"/>
           </a:xfrm>
           <a:prstGeom prst="roundRect">
@@ -15168,7 +15210,7 @@
         </p:nvSpPr>
         <p:spPr>
           <a:xfrm>
-            <a:off x="777240" y="5398516"/>
+            <a:off x="777240" y="5305552"/>
             <a:ext cx="1219199" cy="292608"/>
           </a:xfrm>
           <a:prstGeom prst="rect">
@@ -15207,8 +15249,8 @@
         </p:nvSpPr>
         <p:spPr>
           <a:xfrm>
-            <a:off x="4338218" y="2154427"/>
-            <a:ext cx="3515258" cy="3673856"/>
+            <a:off x="4338218" y="2247391"/>
+            <a:ext cx="3515258" cy="3487928"/>
           </a:xfrm>
           <a:prstGeom prst="roundRect">
             <a:avLst>
@@ -15240,7 +15282,7 @@
         </p:nvSpPr>
         <p:spPr>
           <a:xfrm>
-            <a:off x="4566818" y="2355596"/>
+            <a:off x="4566818" y="2448560"/>
             <a:ext cx="731520" cy="731520"/>
           </a:xfrm>
           <a:prstGeom prst="ellipse">
@@ -15277,7 +15319,7 @@
         </p:blipFill>
         <p:spPr>
           <a:xfrm>
-            <a:off x="4720437" y="2509215"/>
+            <a:off x="4720437" y="2602179"/>
             <a:ext cx="424281" cy="424281"/>
           </a:xfrm>
           <a:prstGeom prst="rect">
@@ -15293,8 +15335,8 @@
         </p:nvSpPr>
         <p:spPr>
           <a:xfrm>
-            <a:off x="4502810" y="3178556"/>
-            <a:ext cx="3186074" cy="2146808"/>
+            <a:off x="4502810" y="3271519"/>
+            <a:ext cx="3186074" cy="1960880"/>
           </a:xfrm>
           <a:prstGeom prst="rect">
             <a:avLst/>
@@ -15314,7 +15356,7 @@
               </a:spcAft>
             </a:pPr>
             <a:r>
-              <a:rPr sz="2200" b="1">
+              <a:rPr sz="2000" b="1">
                 <a:solidFill>
                   <a:srgbClr val="13294B"/>
                 </a:solidFill>
@@ -15326,7 +15368,7 @@
             </a:r>
           </a:p>
           <a:p>
-            <a:pPr algn="l" eaLnBrk="0" marL="205740" indent="-205740">
+            <a:pPr algn="l" eaLnBrk="0" marL="182880" indent="-182880">
               <a:lnSpc>
                 <a:spcPct val="110000"/>
               </a:lnSpc>
@@ -15335,7 +15377,7 @@
               </a:spcAft>
             </a:pPr>
             <a:r>
-              <a:rPr sz="1800" b="0">
+              <a:rPr sz="1600" b="0">
                 <a:solidFill>
                   <a:srgbClr val="1F2A3A"/>
                 </a:solidFill>
@@ -15347,7 +15389,7 @@
             </a:r>
           </a:p>
           <a:p>
-            <a:pPr algn="l" eaLnBrk="0" marL="205740" indent="-205740">
+            <a:pPr algn="l" eaLnBrk="0" marL="182880" indent="-182880">
               <a:lnSpc>
                 <a:spcPct val="110000"/>
               </a:lnSpc>
@@ -15356,7 +15398,7 @@
               </a:spcAft>
             </a:pPr>
             <a:r>
-              <a:rPr sz="1800" b="0">
+              <a:rPr sz="1600" b="0">
                 <a:solidFill>
                   <a:srgbClr val="1F2A3A"/>
                 </a:solidFill>
@@ -15377,7 +15419,7 @@
         </p:nvSpPr>
         <p:spPr>
           <a:xfrm>
-            <a:off x="4566818" y="5398516"/>
+            <a:off x="4566818" y="5305552"/>
             <a:ext cx="822960" cy="292608"/>
           </a:xfrm>
           <a:prstGeom prst="roundRect">
@@ -15408,7 +15450,7 @@
         </p:nvSpPr>
         <p:spPr>
           <a:xfrm>
-            <a:off x="4566818" y="5398516"/>
+            <a:off x="4566818" y="5305552"/>
             <a:ext cx="822960" cy="292608"/>
           </a:xfrm>
           <a:prstGeom prst="rect">
@@ -15447,8 +15489,8 @@
         </p:nvSpPr>
         <p:spPr>
           <a:xfrm>
-            <a:off x="8127796" y="2154427"/>
-            <a:ext cx="3515258" cy="3673856"/>
+            <a:off x="8127796" y="2247391"/>
+            <a:ext cx="3515258" cy="3487928"/>
           </a:xfrm>
           <a:prstGeom prst="roundRect">
             <a:avLst>
@@ -15480,7 +15522,7 @@
         </p:nvSpPr>
         <p:spPr>
           <a:xfrm>
-            <a:off x="8356396" y="2355596"/>
+            <a:off x="8356396" y="2448560"/>
             <a:ext cx="731520" cy="731520"/>
           </a:xfrm>
           <a:prstGeom prst="ellipse">
@@ -15517,7 +15559,7 @@
         </p:blipFill>
         <p:spPr>
           <a:xfrm>
-            <a:off x="8510016" y="2509215"/>
+            <a:off x="8510016" y="2602179"/>
             <a:ext cx="424281" cy="424281"/>
           </a:xfrm>
           <a:prstGeom prst="rect">
@@ -15533,8 +15575,8 @@
         </p:nvSpPr>
         <p:spPr>
           <a:xfrm>
-            <a:off x="8292388" y="3178556"/>
-            <a:ext cx="3186074" cy="2146808"/>
+            <a:off x="8292388" y="3271519"/>
+            <a:ext cx="3186074" cy="1960880"/>
           </a:xfrm>
           <a:prstGeom prst="rect">
             <a:avLst/>
@@ -15554,7 +15596,7 @@
               </a:spcAft>
             </a:pPr>
             <a:r>
-              <a:rPr sz="2200" b="1">
+              <a:rPr sz="2000" b="1">
                 <a:solidFill>
                   <a:srgbClr val="13294B"/>
                 </a:solidFill>
@@ -15575,7 +15617,7 @@
               </a:spcAft>
             </a:pPr>
             <a:r>
-              <a:rPr sz="1800" b="0">
+              <a:rPr sz="1600" b="0">
                 <a:solidFill>
                   <a:srgbClr val="1F2A3A"/>
                 </a:solidFill>
@@ -15596,7 +15638,7 @@
         </p:nvSpPr>
         <p:spPr>
           <a:xfrm>
-            <a:off x="8356396" y="5398516"/>
+            <a:off x="8356396" y="5305552"/>
             <a:ext cx="822960" cy="292608"/>
           </a:xfrm>
           <a:prstGeom prst="roundRect">
@@ -15627,7 +15669,7 @@
         </p:nvSpPr>
         <p:spPr>
           <a:xfrm>
-            <a:off x="8356396" y="5398516"/>
+            <a:off x="8356396" y="5305552"/>
             <a:ext cx="822960" cy="292608"/>
           </a:xfrm>
           <a:prstGeom prst="rect">
@@ -18293,7 +18335,7 @@
         </p:nvSpPr>
         <p:spPr>
           <a:xfrm>
-            <a:off x="548640" y="2647188"/>
+            <a:off x="548640" y="1961388"/>
             <a:ext cx="11094415" cy="1316736"/>
           </a:xfrm>
           <a:prstGeom prst="roundRect">
@@ -18324,7 +18366,7 @@
         </p:nvSpPr>
         <p:spPr>
           <a:xfrm>
-            <a:off x="640080" y="2619756"/>
+            <a:off x="640080" y="1933956"/>
             <a:ext cx="3291839" cy="1371600"/>
           </a:xfrm>
           <a:prstGeom prst="rect">
@@ -18387,7 +18429,7 @@
         </p:nvSpPr>
         <p:spPr>
           <a:xfrm>
-            <a:off x="4023359" y="2619756"/>
+            <a:off x="4023359" y="1933956"/>
             <a:ext cx="7528255" cy="1371600"/>
           </a:xfrm>
           <a:prstGeom prst="rect">
@@ -18450,7 +18492,7 @@
         </p:nvSpPr>
         <p:spPr>
           <a:xfrm>
-            <a:off x="548640" y="3982212"/>
+            <a:off x="548640" y="3296412"/>
             <a:ext cx="11094415" cy="13716"/>
           </a:xfrm>
           <a:prstGeom prst="rect">
@@ -18479,7 +18521,7 @@
         </p:nvSpPr>
         <p:spPr>
           <a:xfrm>
-            <a:off x="640080" y="3991356"/>
+            <a:off x="640080" y="3305556"/>
             <a:ext cx="3291839" cy="1371600"/>
           </a:xfrm>
           <a:prstGeom prst="rect">
@@ -18542,7 +18584,7 @@
         </p:nvSpPr>
         <p:spPr>
           <a:xfrm>
-            <a:off x="4023359" y="3991356"/>
+            <a:off x="4023359" y="3305556"/>
             <a:ext cx="7528255" cy="1371600"/>
           </a:xfrm>
           <a:prstGeom prst="rect">
@@ -18572,6 +18614,140 @@
                 <a:cs typeface="맑은 고딕"/>
               </a:rPr>
               <a:t>작업 하나의 효율이 아니라 시작 사건에서 최종 결과까지의 흐름 전체이다.</a:t>
+            </a:r>
+          </a:p>
+        </p:txBody>
+      </p:sp>
+      <p:sp>
+        <p:nvSpPr>
+          <p:cNvPr id="12" name="Rectangle 11"/>
+          <p:cNvSpPr/>
+          <p:nvPr/>
+        </p:nvSpPr>
+        <p:spPr>
+          <a:xfrm>
+            <a:off x="548640" y="4668012"/>
+            <a:ext cx="11094415" cy="13716"/>
+          </a:xfrm>
+          <a:prstGeom prst="rect">
+            <a:avLst/>
+          </a:prstGeom>
+          <a:solidFill>
+            <a:srgbClr val="D3D9E1"/>
+          </a:solidFill>
+          <a:ln>
+            <a:noFill/>
+          </a:ln>
+        </p:spPr>
+        <p:txBody>
+          <a:bodyPr rtlCol="0" anchor="ctr"/>
+          <a:lstStyle/>
+          <a:p>
+            <a:pPr algn="ctr"/>
+          </a:p>
+        </p:txBody>
+      </p:sp>
+      <p:sp>
+        <p:nvSpPr>
+          <p:cNvPr id="13" name="TextBox 12"/>
+          <p:cNvSpPr txBox="1"/>
+          <p:nvPr/>
+        </p:nvSpPr>
+        <p:spPr>
+          <a:xfrm>
+            <a:off x="640080" y="4677156"/>
+            <a:ext cx="3291839" cy="1371600"/>
+          </a:xfrm>
+          <a:prstGeom prst="rect">
+            <a:avLst/>
+          </a:prstGeom>
+          <a:noFill/>
+        </p:spPr>
+        <p:txBody>
+          <a:bodyPr wrap="square" anchor="ctr"/>
+          <a:lstStyle/>
+          <a:p>
+            <a:pPr algn="l" eaLnBrk="0">
+              <a:lnSpc>
+                <a:spcPct val="110000"/>
+              </a:lnSpc>
+              <a:spcAft>
+                <a:spcPts val="200"/>
+              </a:spcAft>
+            </a:pPr>
+            <a:r>
+              <a:rPr sz="1800" b="1">
+                <a:solidFill>
+                  <a:srgbClr val="13294B"/>
+                </a:solidFill>
+                <a:latin typeface="맑은 고딕"/>
+                <a:ea typeface="맑은 고딕"/>
+                <a:cs typeface="맑은 고딕"/>
+              </a:rPr>
+              <a:t>흐름 전체를 보는 까닭</a:t>
+            </a:r>
+          </a:p>
+          <a:p>
+            <a:pPr algn="l" eaLnBrk="0">
+              <a:lnSpc>
+                <a:spcPct val="110000"/>
+              </a:lnSpc>
+              <a:spcAft>
+                <a:spcPts val="200"/>
+              </a:spcAft>
+            </a:pPr>
+            <a:r>
+              <a:rPr sz="1150" b="0">
+                <a:solidFill>
+                  <a:srgbClr val="556175"/>
+                </a:solidFill>
+                <a:latin typeface="맑은 고딕"/>
+                <a:ea typeface="맑은 고딕"/>
+                <a:cs typeface="맑은 고딕"/>
+              </a:rPr>
+              <a:t>예</a:t>
+            </a:r>
+          </a:p>
+        </p:txBody>
+      </p:sp>
+      <p:sp>
+        <p:nvSpPr>
+          <p:cNvPr id="14" name="TextBox 13"/>
+          <p:cNvSpPr txBox="1"/>
+          <p:nvPr/>
+        </p:nvSpPr>
+        <p:spPr>
+          <a:xfrm>
+            <a:off x="4023359" y="4677156"/>
+            <a:ext cx="7528255" cy="1371600"/>
+          </a:xfrm>
+          <a:prstGeom prst="rect">
+            <a:avLst/>
+          </a:prstGeom>
+          <a:noFill/>
+        </p:spPr>
+        <p:txBody>
+          <a:bodyPr wrap="square" anchor="ctr"/>
+          <a:lstStyle/>
+          <a:p>
+            <a:pPr algn="l" eaLnBrk="0">
+              <a:lnSpc>
+                <a:spcPct val="110000"/>
+              </a:lnSpc>
+              <a:spcAft>
+                <a:spcPts val="300"/>
+              </a:spcAft>
+            </a:pPr>
+            <a:r>
+              <a:rPr sz="1400" b="0">
+                <a:solidFill>
+                  <a:srgbClr val="1F2A3A"/>
+                </a:solidFill>
+                <a:latin typeface="맑은 고딕"/>
+                <a:ea typeface="맑은 고딕"/>
+                <a:cs typeface="맑은 고딕"/>
+              </a:rPr>
+              <a:t>에이전트의 판단이 빨라져도 승인이 늘 늦으면 업무 전체는 빨라지지 않는다.</a:t>
             </a:r>
           </a:p>
         </p:txBody>
@@ -18750,7 +18926,7 @@
       </p:sp>
       <p:pic>
         <p:nvPicPr>
-          <p:cNvPr id="6" name="삽화:BPM주기.svg" descr="illust_5761831314884434848_1792123197.png"/>
+          <p:cNvPr id="6" name="삽화:BPM주기.svg" descr="illust_4337737095453451508_1792123197.png"/>
           <p:cNvPicPr>
             <a:picLocks noChangeAspect="1"/>
           </p:cNvPicPr>
@@ -19503,7 +19679,7 @@
               </a:lnSpc>
             </a:pPr>
             <a:r>
-              <a:rPr sz="1400" b="0">
+              <a:rPr sz="1350" b="0">
                 <a:solidFill>
                   <a:srgbClr val="1F2A3A"/>
                 </a:solidFill>
@@ -19511,7 +19687,7 @@
                 <a:ea typeface="맑은 고딕"/>
                 <a:cs typeface="맑은 고딕"/>
               </a:rPr>
-              <a:t>지금의 업무를 읽어 시작 조건, 책임자, 완료 조건을 가려낸다</a:t>
+              <a:t>지금의 업무를 읽어 시작 조건, 책임자, 완료 조건과 끊기는 자리를 가려낸다</a:t>
             </a:r>
           </a:p>
         </p:txBody>
@@ -20009,7 +20185,7 @@
                 <a:ea typeface="맑은 고딕"/>
                 <a:cs typeface="맑은 고딕"/>
               </a:rPr>
-              <a:t>처리 건마다 단계의 담당, 대기, 결과를 지켜본다</a:t>
+              <a:t>처리 건마다 단계의 담당, 대기, 걸린 시간, 결과를 지켜본다</a:t>
             </a:r>
           </a:p>
         </p:txBody>
@@ -20411,7 +20587,7 @@
       </p:sp>
       <p:pic>
         <p:nvPicPr>
-          <p:cNvPr id="6" name="삽화:현재와목표.svg" descr="illust_9001976938934354603_1792123197.png"/>
+          <p:cNvPr id="6" name="삽화:현재와목표.svg" descr="illust_281771396789474874_1792123197.png"/>
           <p:cNvPicPr>
             <a:picLocks noChangeAspect="1"/>
           </p:cNvPicPr>
@@ -23971,7 +24147,7 @@
                 <a:ea typeface="맑은 고딕"/>
                 <a:cs typeface="맑은 고딕"/>
               </a:rPr>
-              <a:t>BPMN의 도형은 일어나는 일을 나타내는 흐름 객체, 그것을 잇는 연결 객체, 맡는 쪽을 나누는 스윔레인으로 묶인다.</a:t>
+              <a:t>BPMN의 기본 도형은 일어나는 일인 흐름 객체, 그것을 잇는 연결 객체, 맡는 쪽을 나누는 스윔레인으로 묶인다.</a:t>
             </a:r>
           </a:p>
         </p:txBody>
@@ -24046,7 +24222,7 @@
       </p:sp>
       <p:pic>
         <p:nvPicPr>
-          <p:cNvPr id="6" name="삽화:요소묶음.svg" descr="illust_7718394744347083748_1792123197.png"/>
+          <p:cNvPr id="6" name="삽화:요소묶음.svg" descr="illust_2599076942515702344_1792123197.png"/>
           <p:cNvPicPr>
             <a:picLocks noChangeAspect="1"/>
           </p:cNvPicPr>
@@ -24126,7 +24302,7 @@
                 <a:ea typeface="맑은 고딕"/>
                 <a:cs typeface="맑은 고딕"/>
               </a:rPr>
-              <a:t>일어나는 일</a:t>
+              <a:t>Flow Objects</a:t>
             </a:r>
           </a:p>
         </p:txBody>
@@ -24139,8 +24315,8 @@
         </p:nvSpPr>
         <p:spPr>
           <a:xfrm>
-            <a:off x="5354001" y="2384023"/>
-            <a:ext cx="2400088" cy="577342"/>
+            <a:off x="5135812" y="2384023"/>
+            <a:ext cx="2836468" cy="577342"/>
           </a:xfrm>
           <a:prstGeom prst="rect">
             <a:avLst/>
@@ -24189,7 +24365,7 @@
                 <a:ea typeface="맑은 고딕"/>
                 <a:cs typeface="맑은 고딕"/>
               </a:rPr>
-              <a:t>잇는 선</a:t>
+              <a:t>Connecting Objects</a:t>
             </a:r>
           </a:p>
         </p:txBody>
@@ -24252,7 +24428,7 @@
                 <a:ea typeface="맑은 고딕"/>
                 <a:cs typeface="맑은 고딕"/>
               </a:rPr>
-              <a:t>맡는 쪽</a:t>
+              <a:t>Swimlanes</a:t>
             </a:r>
           </a:p>
         </p:txBody>
@@ -26305,7 +26481,7 @@
                 <a:ea typeface="맑은 고딕"/>
                 <a:cs typeface="맑은 고딕"/>
               </a:rPr>
-              <a:t>긴급 대응 프로세스는 레인 셋 위에 시작 이벤트 하나, 작업 아홉, 게이트웨이 둘, 끝 이벤트 셋으로 그려진다.</a:t>
+              <a:t>긴급 대응 프로세스를 BPMN으로 그리면 문장에 묻혀 있던 맡는 쪽과 갈림 둘, 끝 셋이 레인 셋 위의 도형으로 드러난다.</a:t>
             </a:r>
           </a:p>
         </p:txBody>
@@ -26380,7 +26556,7 @@
       </p:sp>
       <p:pic>
         <p:nvPicPr>
-          <p:cNvPr id="6" name="삽화:흐름_전체.svg" descr="illust_5714078060249196068_1792123197.png"/>
+          <p:cNvPr id="6" name="삽화:흐름_전체.svg" descr="illust_7128931871681295139_1792123197.png"/>
           <p:cNvPicPr>
             <a:picLocks noChangeAspect="1"/>
           </p:cNvPicPr>
@@ -27248,7 +27424,7 @@
       </p:sp>
       <p:pic>
         <p:nvPicPr>
-          <p:cNvPr id="6" name="삽화:이벤트.svg" descr="illust_1806845665074101992_1792123197.png"/>
+          <p:cNvPr id="6" name="삽화:이벤트.svg" descr="illust_8978091235736171445_1792123197.png"/>
           <p:cNvPicPr>
             <a:picLocks noChangeAspect="1"/>
           </p:cNvPicPr>
@@ -27738,7 +27914,7 @@
       </p:sp>
       <p:pic>
         <p:nvPicPr>
-          <p:cNvPr id="6" name="삽화:작업종류.svg" descr="illust_8439425025737291900_1792123197.png"/>
+          <p:cNvPr id="6" name="삽화:작업종류.svg" descr="illust_3617490975509966961_1792123197.png"/>
           <p:cNvPicPr>
             <a:picLocks noChangeAspect="1"/>
           </p:cNvPicPr>
@@ -27895,7 +28071,7 @@
         <p:spPr>
           <a:xfrm>
             <a:off x="1022932" y="4369551"/>
-            <a:ext cx="3054658" cy="778764"/>
+            <a:ext cx="3054658" cy="577342"/>
           </a:xfrm>
           <a:prstGeom prst="rect">
             <a:avLst/>
@@ -27945,27 +28121,6 @@
                 <a:cs typeface="맑은 고딕"/>
               </a:rPr>
               <a:t>Task · 표식 없음</a:t>
-            </a:r>
-          </a:p>
-          <a:p>
-            <a:pPr algn="ctr" eaLnBrk="0">
-              <a:lnSpc>
-                <a:spcPct val="110000"/>
-              </a:lnSpc>
-              <a:spcAft>
-                <a:spcPts val="100"/>
-              </a:spcAft>
-            </a:pPr>
-            <a:r>
-              <a:rPr sz="1300" b="0">
-                <a:solidFill>
-                  <a:srgbClr val="556175"/>
-                </a:solidFill>
-                <a:latin typeface="맑은 고딕"/>
-                <a:ea typeface="맑은 고딕"/>
-                <a:cs typeface="맑은 고딕"/>
-              </a:rPr>
-              <a:t>에이전트 단계도 이 모양</a:t>
             </a:r>
           </a:p>
         </p:txBody>
@@ -28270,7 +28425,7 @@
       </p:sp>
       <p:pic>
         <p:nvPicPr>
-          <p:cNvPr id="6" name="삽화:게이트웨이.svg" descr="illust_1038036997524847644_1792123197.png"/>
+          <p:cNvPr id="6" name="삽화:게이트웨이.svg" descr="illust_3064076270891480232_1792123197.png"/>
           <p:cNvPicPr>
             <a:picLocks noChangeAspect="1"/>
           </p:cNvPicPr>
@@ -30055,7 +30210,7 @@
       </p:sp>
       <p:pic>
         <p:nvPicPr>
-          <p:cNvPr id="6" name="삽화:풀과레인.svg" descr="illust_9089966795907260167_1792123197.png"/>
+          <p:cNvPr id="6" name="삽화:풀과레인.svg" descr="illust_2465278338567359120_1792123197.png"/>
           <p:cNvPicPr>
             <a:picLocks noChangeAspect="1"/>
           </p:cNvPicPr>
@@ -30557,7 +30712,7 @@
                 <a:ea typeface="맑은 고딕"/>
                 <a:cs typeface="맑은 고딕"/>
               </a:rPr>
-              <a:t>메시지 흐름: 풀과 풀 사이의 주고받음</a:t>
+              <a:t>사람, 에이전트, 시스템의 책임 배치</a:t>
             </a:r>
           </a:p>
         </p:txBody>
@@ -30596,7 +30751,7 @@
                 <a:ea typeface="맑은 고딕"/>
                 <a:cs typeface="맑은 고딕"/>
               </a:rPr>
-              <a:t>참여자가 둘이면 풀을 따로 그리고, 풀 사이의 주고받음은 점선의 메시지 흐름으로 그려 풀 안의 순서와 구분한다.</a:t>
+              <a:t>판단은 에이전트 레인에, 결정은 담당자 레인에, 실행과 기록은 시스템 레인에 놓여 설비 명령 앞에 사람의 승인이 온다.</a:t>
             </a:r>
           </a:p>
         </p:txBody>
@@ -30669,30 +30824,37 @@
           </a:p>
         </p:txBody>
       </p:sp>
-      <p:pic>
-        <p:nvPicPr>
-          <p:cNvPr id="6" name="삽화:메시지흐름.svg" descr="illust_8964950249229357790_1792123197.png"/>
-          <p:cNvPicPr>
-            <a:picLocks noChangeAspect="1"/>
-          </p:cNvPicPr>
-          <p:nvPr/>
-        </p:nvPicPr>
-        <p:blipFill>
-          <a:blip r:embed="rId3"/>
-          <a:stretch>
-            <a:fillRect/>
-          </a:stretch>
-        </p:blipFill>
-        <p:spPr>
-          <a:xfrm>
-            <a:off x="641100" y="1627632"/>
-            <a:ext cx="10909495" cy="4727448"/>
-          </a:xfrm>
-          <a:prstGeom prst="rect">
-            <a:avLst/>
-          </a:prstGeom>
-        </p:spPr>
-      </p:pic>
+      <p:sp>
+        <p:nvSpPr>
+          <p:cNvPr id="6" name="Rounded Rectangle 5"/>
+          <p:cNvSpPr/>
+          <p:nvPr/>
+        </p:nvSpPr>
+        <p:spPr>
+          <a:xfrm>
+            <a:off x="548640" y="1627632"/>
+            <a:ext cx="11094415" cy="347472"/>
+          </a:xfrm>
+          <a:prstGeom prst="roundRect">
+            <a:avLst>
+              <a:gd name="adj" fmla="val 12000"/>
+            </a:avLst>
+          </a:prstGeom>
+          <a:solidFill>
+            <a:srgbClr val="13294B"/>
+          </a:solidFill>
+          <a:ln>
+            <a:noFill/>
+          </a:ln>
+        </p:spPr>
+        <p:txBody>
+          <a:bodyPr rtlCol="0" anchor="ctr"/>
+          <a:lstStyle/>
+          <a:p>
+            <a:pPr algn="ctr"/>
+          </a:p>
+        </p:txBody>
+      </p:sp>
       <p:sp>
         <p:nvSpPr>
           <p:cNvPr id="7" name="TextBox 6"/>
@@ -30701,25 +30863,170 @@
         </p:nvSpPr>
         <p:spPr>
           <a:xfrm>
-            <a:off x="3335745" y="2478572"/>
-            <a:ext cx="1527329" cy="375920"/>
-          </a:xfrm>
-          <a:prstGeom prst="rect">
-            <a:avLst/>
-          </a:prstGeom>
-          <a:noFill/>
-        </p:spPr>
-        <p:txBody>
-          <a:bodyPr wrap="square" anchor="t"/>
-          <a:lstStyle/>
-          <a:p>
-            <a:pPr algn="ctr" eaLnBrk="0">
-              <a:lnSpc>
-                <a:spcPct val="110000"/>
-              </a:lnSpc>
-              <a:spcAft>
-                <a:spcPts val="100"/>
-              </a:spcAft>
+            <a:off x="685800" y="1627632"/>
+            <a:ext cx="2514600" cy="347472"/>
+          </a:xfrm>
+          <a:prstGeom prst="rect">
+            <a:avLst/>
+          </a:prstGeom>
+          <a:noFill/>
+        </p:spPr>
+        <p:txBody>
+          <a:bodyPr wrap="square" anchor="ctr"/>
+          <a:lstStyle/>
+          <a:p>
+            <a:pPr algn="l" eaLnBrk="0">
+              <a:lnSpc>
+                <a:spcPct val="110000"/>
+              </a:lnSpc>
+            </a:pPr>
+            <a:r>
+              <a:rPr sz="1300" b="1">
+                <a:solidFill>
+                  <a:srgbClr val="FFFFFF"/>
+                </a:solidFill>
+                <a:latin typeface="맑은 고딕"/>
+                <a:ea typeface="맑은 고딕"/>
+                <a:cs typeface="맑은 고딕"/>
+              </a:rPr>
+              <a:t>작업</a:t>
+            </a:r>
+          </a:p>
+        </p:txBody>
+      </p:sp>
+      <p:sp>
+        <p:nvSpPr>
+          <p:cNvPr id="8" name="TextBox 7"/>
+          <p:cNvSpPr txBox="1"/>
+          <p:nvPr/>
+        </p:nvSpPr>
+        <p:spPr>
+          <a:xfrm>
+            <a:off x="3200400" y="1627632"/>
+            <a:ext cx="6248095" cy="347472"/>
+          </a:xfrm>
+          <a:prstGeom prst="rect">
+            <a:avLst/>
+          </a:prstGeom>
+          <a:noFill/>
+        </p:spPr>
+        <p:txBody>
+          <a:bodyPr wrap="square" anchor="ctr"/>
+          <a:lstStyle/>
+          <a:p>
+            <a:pPr algn="l" eaLnBrk="0">
+              <a:lnSpc>
+                <a:spcPct val="110000"/>
+              </a:lnSpc>
+            </a:pPr>
+            <a:r>
+              <a:rPr sz="1300" b="1">
+                <a:solidFill>
+                  <a:srgbClr val="FFFFFF"/>
+                </a:solidFill>
+                <a:latin typeface="맑은 고딕"/>
+                <a:ea typeface="맑은 고딕"/>
+                <a:cs typeface="맑은 고딕"/>
+              </a:rPr>
+              <a:t>맡는 쪽</a:t>
+            </a:r>
+          </a:p>
+        </p:txBody>
+      </p:sp>
+      <p:sp>
+        <p:nvSpPr>
+          <p:cNvPr id="9" name="TextBox 8"/>
+          <p:cNvSpPr txBox="1"/>
+          <p:nvPr/>
+        </p:nvSpPr>
+        <p:spPr>
+          <a:xfrm>
+            <a:off x="9448495" y="1627632"/>
+            <a:ext cx="2194560" cy="347472"/>
+          </a:xfrm>
+          <a:prstGeom prst="rect">
+            <a:avLst/>
+          </a:prstGeom>
+          <a:noFill/>
+        </p:spPr>
+        <p:txBody>
+          <a:bodyPr wrap="square" anchor="ctr"/>
+          <a:lstStyle/>
+          <a:p>
+            <a:pPr algn="l" eaLnBrk="0">
+              <a:lnSpc>
+                <a:spcPct val="110000"/>
+              </a:lnSpc>
+            </a:pPr>
+            <a:r>
+              <a:rPr sz="1300" b="1">
+                <a:solidFill>
+                  <a:srgbClr val="FFFFFF"/>
+                </a:solidFill>
+                <a:latin typeface="맑은 고딕"/>
+                <a:ea typeface="맑은 고딕"/>
+                <a:cs typeface="맑은 고딕"/>
+              </a:rPr>
+              <a:t>레인</a:t>
+            </a:r>
+          </a:p>
+        </p:txBody>
+      </p:sp>
+      <p:sp>
+        <p:nvSpPr>
+          <p:cNvPr id="10" name="Rounded Rectangle 9"/>
+          <p:cNvSpPr/>
+          <p:nvPr/>
+        </p:nvSpPr>
+        <p:spPr>
+          <a:xfrm>
+            <a:off x="548640" y="2061972"/>
+            <a:ext cx="11094415" cy="656843"/>
+          </a:xfrm>
+          <a:prstGeom prst="roundRect">
+            <a:avLst>
+              <a:gd name="adj" fmla="val 8000"/>
+            </a:avLst>
+          </a:prstGeom>
+          <a:solidFill>
+            <a:srgbClr val="F3F6F9"/>
+          </a:solidFill>
+          <a:ln>
+            <a:noFill/>
+          </a:ln>
+        </p:spPr>
+        <p:txBody>
+          <a:bodyPr rtlCol="0" anchor="ctr"/>
+          <a:lstStyle/>
+          <a:p>
+            <a:pPr algn="ctr"/>
+          </a:p>
+        </p:txBody>
+      </p:sp>
+      <p:sp>
+        <p:nvSpPr>
+          <p:cNvPr id="11" name="TextBox 10"/>
+          <p:cNvSpPr txBox="1"/>
+          <p:nvPr/>
+        </p:nvSpPr>
+        <p:spPr>
+          <a:xfrm>
+            <a:off x="685800" y="2029968"/>
+            <a:ext cx="2514600" cy="720851"/>
+          </a:xfrm>
+          <a:prstGeom prst="rect">
+            <a:avLst/>
+          </a:prstGeom>
+          <a:noFill/>
+        </p:spPr>
+        <p:txBody>
+          <a:bodyPr wrap="square" anchor="ctr"/>
+          <a:lstStyle/>
+          <a:p>
+            <a:pPr algn="l" eaLnBrk="0">
+              <a:lnSpc>
+                <a:spcPct val="110000"/>
+              </a:lnSpc>
             </a:pPr>
             <a:r>
               <a:rPr sz="1600" b="1">
@@ -30730,38 +31037,144 @@
                 <a:ea typeface="맑은 고딕"/>
                 <a:cs typeface="맑은 고딕"/>
               </a:rPr>
-              <a:t>발주 요청</a:t>
-            </a:r>
-          </a:p>
-        </p:txBody>
-      </p:sp>
-      <p:sp>
-        <p:nvSpPr>
-          <p:cNvPr id="8" name="TextBox 7"/>
-          <p:cNvSpPr txBox="1"/>
-          <p:nvPr/>
-        </p:nvSpPr>
-        <p:spPr>
-          <a:xfrm>
-            <a:off x="6968607" y="2478572"/>
-            <a:ext cx="1527329" cy="375920"/>
-          </a:xfrm>
-          <a:prstGeom prst="rect">
-            <a:avLst/>
-          </a:prstGeom>
-          <a:noFill/>
-        </p:spPr>
-        <p:txBody>
-          <a:bodyPr wrap="square" anchor="t"/>
-          <a:lstStyle/>
-          <a:p>
-            <a:pPr algn="ctr" eaLnBrk="0">
-              <a:lnSpc>
-                <a:spcPct val="110000"/>
-              </a:lnSpc>
-              <a:spcAft>
-                <a:spcPts val="100"/>
-              </a:spcAft>
+              <a:t>원인 진단 · 냉각 조치 제안</a:t>
+            </a:r>
+          </a:p>
+        </p:txBody>
+      </p:sp>
+      <p:sp>
+        <p:nvSpPr>
+          <p:cNvPr id="12" name="TextBox 11"/>
+          <p:cNvSpPr txBox="1"/>
+          <p:nvPr/>
+        </p:nvSpPr>
+        <p:spPr>
+          <a:xfrm>
+            <a:off x="3200400" y="2029968"/>
+            <a:ext cx="6156655" cy="720851"/>
+          </a:xfrm>
+          <a:prstGeom prst="rect">
+            <a:avLst/>
+          </a:prstGeom>
+          <a:noFill/>
+        </p:spPr>
+        <p:txBody>
+          <a:bodyPr wrap="square" anchor="ctr"/>
+          <a:lstStyle/>
+          <a:p>
+            <a:pPr algn="l" eaLnBrk="0">
+              <a:lnSpc>
+                <a:spcPct val="110000"/>
+              </a:lnSpc>
+            </a:pPr>
+            <a:r>
+              <a:rPr sz="1400" b="0">
+                <a:solidFill>
+                  <a:srgbClr val="1F2A3A"/>
+                </a:solidFill>
+                <a:latin typeface="맑은 고딕"/>
+                <a:ea typeface="맑은 고딕"/>
+                <a:cs typeface="맑은 고딕"/>
+              </a:rPr>
+              <a:t>냉각 긴급 대응 에이전트 · agent:cooling</a:t>
+            </a:r>
+          </a:p>
+        </p:txBody>
+      </p:sp>
+      <p:sp>
+        <p:nvSpPr>
+          <p:cNvPr id="13" name="TextBox 12"/>
+          <p:cNvSpPr txBox="1"/>
+          <p:nvPr/>
+        </p:nvSpPr>
+        <p:spPr>
+          <a:xfrm>
+            <a:off x="9448495" y="2029968"/>
+            <a:ext cx="2103120" cy="720851"/>
+          </a:xfrm>
+          <a:prstGeom prst="rect">
+            <a:avLst/>
+          </a:prstGeom>
+          <a:noFill/>
+        </p:spPr>
+        <p:txBody>
+          <a:bodyPr wrap="square" anchor="ctr"/>
+          <a:lstStyle/>
+          <a:p>
+            <a:pPr algn="l" eaLnBrk="0">
+              <a:lnSpc>
+                <a:spcPct val="110000"/>
+              </a:lnSpc>
+            </a:pPr>
+            <a:r>
+              <a:rPr sz="1250" b="1">
+                <a:solidFill>
+                  <a:srgbClr val="556175"/>
+                </a:solidFill>
+                <a:latin typeface="맑은 고딕"/>
+                <a:ea typeface="맑은 고딕"/>
+                <a:cs typeface="맑은 고딕"/>
+              </a:rPr>
+              <a:t>에이전트</a:t>
+            </a:r>
+          </a:p>
+        </p:txBody>
+      </p:sp>
+      <p:sp>
+        <p:nvSpPr>
+          <p:cNvPr id="14" name="Rounded Rectangle 13"/>
+          <p:cNvSpPr/>
+          <p:nvPr/>
+        </p:nvSpPr>
+        <p:spPr>
+          <a:xfrm>
+            <a:off x="548640" y="2782824"/>
+            <a:ext cx="11094415" cy="656843"/>
+          </a:xfrm>
+          <a:prstGeom prst="roundRect">
+            <a:avLst>
+              <a:gd name="adj" fmla="val 8000"/>
+            </a:avLst>
+          </a:prstGeom>
+          <a:solidFill>
+            <a:srgbClr val="E7F3FD"/>
+          </a:solidFill>
+          <a:ln>
+            <a:noFill/>
+          </a:ln>
+        </p:spPr>
+        <p:txBody>
+          <a:bodyPr rtlCol="0" anchor="ctr"/>
+          <a:lstStyle/>
+          <a:p>
+            <a:pPr algn="ctr"/>
+          </a:p>
+        </p:txBody>
+      </p:sp>
+      <p:sp>
+        <p:nvSpPr>
+          <p:cNvPr id="15" name="TextBox 14"/>
+          <p:cNvSpPr txBox="1"/>
+          <p:nvPr/>
+        </p:nvSpPr>
+        <p:spPr>
+          <a:xfrm>
+            <a:off x="685800" y="2750820"/>
+            <a:ext cx="2514600" cy="720851"/>
+          </a:xfrm>
+          <a:prstGeom prst="rect">
+            <a:avLst/>
+          </a:prstGeom>
+          <a:noFill/>
+        </p:spPr>
+        <p:txBody>
+          <a:bodyPr wrap="square" anchor="ctr"/>
+          <a:lstStyle/>
+          <a:p>
+            <a:pPr algn="l" eaLnBrk="0">
+              <a:lnSpc>
+                <a:spcPct val="110000"/>
+              </a:lnSpc>
             </a:pPr>
             <a:r>
               <a:rPr sz="1600" b="1">
@@ -30772,38 +31185,144 @@
                 <a:ea typeface="맑은 고딕"/>
                 <a:cs typeface="맑은 고딕"/>
               </a:rPr>
-              <a:t>납기 확인</a:t>
-            </a:r>
-          </a:p>
-        </p:txBody>
-      </p:sp>
-      <p:sp>
-        <p:nvSpPr>
-          <p:cNvPr id="9" name="TextBox 8"/>
-          <p:cNvSpPr txBox="1"/>
-          <p:nvPr/>
-        </p:nvSpPr>
-        <p:spPr>
-          <a:xfrm>
-            <a:off x="5146721" y="5220492"/>
-            <a:ext cx="1527329" cy="375920"/>
-          </a:xfrm>
-          <a:prstGeom prst="rect">
-            <a:avLst/>
-          </a:prstGeom>
-          <a:noFill/>
-        </p:spPr>
-        <p:txBody>
-          <a:bodyPr wrap="square" anchor="t"/>
-          <a:lstStyle/>
-          <a:p>
-            <a:pPr algn="ctr" eaLnBrk="0">
-              <a:lnSpc>
-                <a:spcPct val="110000"/>
-              </a:lnSpc>
-              <a:spcAft>
-                <a:spcPts val="100"/>
-              </a:spcAft>
+              <a:t>운전원 승인</a:t>
+            </a:r>
+          </a:p>
+        </p:txBody>
+      </p:sp>
+      <p:sp>
+        <p:nvSpPr>
+          <p:cNvPr id="16" name="TextBox 15"/>
+          <p:cNvSpPr txBox="1"/>
+          <p:nvPr/>
+        </p:nvSpPr>
+        <p:spPr>
+          <a:xfrm>
+            <a:off x="3200400" y="2750820"/>
+            <a:ext cx="6156655" cy="720851"/>
+          </a:xfrm>
+          <a:prstGeom prst="rect">
+            <a:avLst/>
+          </a:prstGeom>
+          <a:noFill/>
+        </p:spPr>
+        <p:txBody>
+          <a:bodyPr wrap="square" anchor="ctr"/>
+          <a:lstStyle/>
+          <a:p>
+            <a:pPr algn="l" eaLnBrk="0">
+              <a:lnSpc>
+                <a:spcPct val="110000"/>
+              </a:lnSpc>
+            </a:pPr>
+            <a:r>
+              <a:rPr sz="1400" b="0">
+                <a:solidFill>
+                  <a:srgbClr val="1F2A3A"/>
+                </a:solidFill>
+                <a:latin typeface="맑은 고딕"/>
+                <a:ea typeface="맑은 고딕"/>
+                <a:cs typeface="맑은 고딕"/>
+              </a:rPr>
+              <a:t>운전원 역할 · role:operator</a:t>
+            </a:r>
+          </a:p>
+        </p:txBody>
+      </p:sp>
+      <p:sp>
+        <p:nvSpPr>
+          <p:cNvPr id="17" name="TextBox 16"/>
+          <p:cNvSpPr txBox="1"/>
+          <p:nvPr/>
+        </p:nvSpPr>
+        <p:spPr>
+          <a:xfrm>
+            <a:off x="9448495" y="2750820"/>
+            <a:ext cx="2103120" cy="720851"/>
+          </a:xfrm>
+          <a:prstGeom prst="rect">
+            <a:avLst/>
+          </a:prstGeom>
+          <a:noFill/>
+        </p:spPr>
+        <p:txBody>
+          <a:bodyPr wrap="square" anchor="ctr"/>
+          <a:lstStyle/>
+          <a:p>
+            <a:pPr algn="l" eaLnBrk="0">
+              <a:lnSpc>
+                <a:spcPct val="110000"/>
+              </a:lnSpc>
+            </a:pPr>
+            <a:r>
+              <a:rPr sz="1250" b="1">
+                <a:solidFill>
+                  <a:srgbClr val="1A6FC4"/>
+                </a:solidFill>
+                <a:latin typeface="맑은 고딕"/>
+                <a:ea typeface="맑은 고딕"/>
+                <a:cs typeface="맑은 고딕"/>
+              </a:rPr>
+              <a:t>담당자</a:t>
+            </a:r>
+          </a:p>
+        </p:txBody>
+      </p:sp>
+      <p:sp>
+        <p:nvSpPr>
+          <p:cNvPr id="18" name="Rounded Rectangle 17"/>
+          <p:cNvSpPr/>
+          <p:nvPr/>
+        </p:nvSpPr>
+        <p:spPr>
+          <a:xfrm>
+            <a:off x="548640" y="3503676"/>
+            <a:ext cx="11094415" cy="656843"/>
+          </a:xfrm>
+          <a:prstGeom prst="roundRect">
+            <a:avLst>
+              <a:gd name="adj" fmla="val 8000"/>
+            </a:avLst>
+          </a:prstGeom>
+          <a:solidFill>
+            <a:srgbClr val="F3F6F9"/>
+          </a:solidFill>
+          <a:ln>
+            <a:noFill/>
+          </a:ln>
+        </p:spPr>
+        <p:txBody>
+          <a:bodyPr rtlCol="0" anchor="ctr"/>
+          <a:lstStyle/>
+          <a:p>
+            <a:pPr algn="ctr"/>
+          </a:p>
+        </p:txBody>
+      </p:sp>
+      <p:sp>
+        <p:nvSpPr>
+          <p:cNvPr id="19" name="TextBox 18"/>
+          <p:cNvSpPr txBox="1"/>
+          <p:nvPr/>
+        </p:nvSpPr>
+        <p:spPr>
+          <a:xfrm>
+            <a:off x="685800" y="3471672"/>
+            <a:ext cx="2514600" cy="720851"/>
+          </a:xfrm>
+          <a:prstGeom prst="rect">
+            <a:avLst/>
+          </a:prstGeom>
+          <a:noFill/>
+        </p:spPr>
+        <p:txBody>
+          <a:bodyPr wrap="square" anchor="ctr"/>
+          <a:lstStyle/>
+          <a:p>
+            <a:pPr algn="l" eaLnBrk="0">
+              <a:lnSpc>
+                <a:spcPct val="110000"/>
+              </a:lnSpc>
             </a:pPr>
             <a:r>
               <a:rPr sz="1600" b="1">
@@ -30814,38 +31333,144 @@
                 <a:ea typeface="맑은 고딕"/>
                 <a:cs typeface="맑은 고딕"/>
               </a:rPr>
-              <a:t>주문 접수</a:t>
-            </a:r>
-          </a:p>
-        </p:txBody>
-      </p:sp>
-      <p:sp>
-        <p:nvSpPr>
-          <p:cNvPr id="10" name="TextBox 9"/>
-          <p:cNvSpPr txBox="1"/>
-          <p:nvPr/>
-        </p:nvSpPr>
-        <p:spPr>
-          <a:xfrm>
-            <a:off x="8168651" y="1852185"/>
-            <a:ext cx="2836468" cy="375920"/>
-          </a:xfrm>
-          <a:prstGeom prst="rect">
-            <a:avLst/>
-          </a:prstGeom>
-          <a:noFill/>
-        </p:spPr>
-        <p:txBody>
-          <a:bodyPr wrap="square" anchor="t"/>
-          <a:lstStyle/>
-          <a:p>
-            <a:pPr algn="ctr" eaLnBrk="0">
-              <a:lnSpc>
-                <a:spcPct val="110000"/>
-              </a:lnSpc>
-              <a:spcAft>
-                <a:spcPts val="100"/>
-              </a:spcAft>
+              <a:t>냉각 명령</a:t>
+            </a:r>
+          </a:p>
+        </p:txBody>
+      </p:sp>
+      <p:sp>
+        <p:nvSpPr>
+          <p:cNvPr id="20" name="TextBox 19"/>
+          <p:cNvSpPr txBox="1"/>
+          <p:nvPr/>
+        </p:nvSpPr>
+        <p:spPr>
+          <a:xfrm>
+            <a:off x="3200400" y="3471672"/>
+            <a:ext cx="6156655" cy="720851"/>
+          </a:xfrm>
+          <a:prstGeom prst="rect">
+            <a:avLst/>
+          </a:prstGeom>
+          <a:noFill/>
+        </p:spPr>
+        <p:txBody>
+          <a:bodyPr wrap="square" anchor="ctr"/>
+          <a:lstStyle/>
+          <a:p>
+            <a:pPr algn="l" eaLnBrk="0">
+              <a:lnSpc>
+                <a:spcPct val="110000"/>
+              </a:lnSpc>
+            </a:pPr>
+            <a:r>
+              <a:rPr sz="1400" b="0">
+                <a:solidFill>
+                  <a:srgbClr val="1F2A3A"/>
+                </a:solidFill>
+                <a:latin typeface="맑은 고딕"/>
+                <a:ea typeface="맑은 고딕"/>
+                <a:cs typeface="맑은 고딕"/>
+              </a:rPr>
+              <a:t>SCADA · sys:scada</a:t>
+            </a:r>
+          </a:p>
+        </p:txBody>
+      </p:sp>
+      <p:sp>
+        <p:nvSpPr>
+          <p:cNvPr id="21" name="TextBox 20"/>
+          <p:cNvSpPr txBox="1"/>
+          <p:nvPr/>
+        </p:nvSpPr>
+        <p:spPr>
+          <a:xfrm>
+            <a:off x="9448495" y="3471672"/>
+            <a:ext cx="2103120" cy="720851"/>
+          </a:xfrm>
+          <a:prstGeom prst="rect">
+            <a:avLst/>
+          </a:prstGeom>
+          <a:noFill/>
+        </p:spPr>
+        <p:txBody>
+          <a:bodyPr wrap="square" anchor="ctr"/>
+          <a:lstStyle/>
+          <a:p>
+            <a:pPr algn="l" eaLnBrk="0">
+              <a:lnSpc>
+                <a:spcPct val="110000"/>
+              </a:lnSpc>
+            </a:pPr>
+            <a:r>
+              <a:rPr sz="1250" b="1">
+                <a:solidFill>
+                  <a:srgbClr val="556175"/>
+                </a:solidFill>
+                <a:latin typeface="맑은 고딕"/>
+                <a:ea typeface="맑은 고딕"/>
+                <a:cs typeface="맑은 고딕"/>
+              </a:rPr>
+              <a:t>시스템</a:t>
+            </a:r>
+          </a:p>
+        </p:txBody>
+      </p:sp>
+      <p:sp>
+        <p:nvSpPr>
+          <p:cNvPr id="22" name="Rounded Rectangle 21"/>
+          <p:cNvSpPr/>
+          <p:nvPr/>
+        </p:nvSpPr>
+        <p:spPr>
+          <a:xfrm>
+            <a:off x="548640" y="4224528"/>
+            <a:ext cx="11094415" cy="656843"/>
+          </a:xfrm>
+          <a:prstGeom prst="roundRect">
+            <a:avLst>
+              <a:gd name="adj" fmla="val 8000"/>
+            </a:avLst>
+          </a:prstGeom>
+          <a:solidFill>
+            <a:srgbClr val="F3F6F9"/>
+          </a:solidFill>
+          <a:ln>
+            <a:noFill/>
+          </a:ln>
+        </p:spPr>
+        <p:txBody>
+          <a:bodyPr rtlCol="0" anchor="ctr"/>
+          <a:lstStyle/>
+          <a:p>
+            <a:pPr algn="ctr"/>
+          </a:p>
+        </p:txBody>
+      </p:sp>
+      <p:sp>
+        <p:nvSpPr>
+          <p:cNvPr id="23" name="TextBox 22"/>
+          <p:cNvSpPr txBox="1"/>
+          <p:nvPr/>
+        </p:nvSpPr>
+        <p:spPr>
+          <a:xfrm>
+            <a:off x="685800" y="4192524"/>
+            <a:ext cx="2514600" cy="720851"/>
+          </a:xfrm>
+          <a:prstGeom prst="rect">
+            <a:avLst/>
+          </a:prstGeom>
+          <a:noFill/>
+        </p:spPr>
+        <p:txBody>
+          <a:bodyPr wrap="square" anchor="ctr"/>
+          <a:lstStyle/>
+          <a:p>
+            <a:pPr algn="l" eaLnBrk="0">
+              <a:lnSpc>
+                <a:spcPct val="110000"/>
+              </a:lnSpc>
             </a:pPr>
             <a:r>
               <a:rPr sz="1600" b="1">
@@ -30856,38 +31481,144 @@
                 <a:ea typeface="맑은 고딕"/>
                 <a:cs typeface="맑은 고딕"/>
               </a:rPr>
-              <a:t>풀: 설비 운영 조직</a:t>
-            </a:r>
-          </a:p>
-        </p:txBody>
-      </p:sp>
-      <p:sp>
-        <p:nvSpPr>
-          <p:cNvPr id="11" name="TextBox 10"/>
-          <p:cNvSpPr txBox="1"/>
-          <p:nvPr/>
-        </p:nvSpPr>
-        <p:spPr>
-          <a:xfrm>
-            <a:off x="8495936" y="4605924"/>
-            <a:ext cx="2618278" cy="375920"/>
-          </a:xfrm>
-          <a:prstGeom prst="rect">
-            <a:avLst/>
-          </a:prstGeom>
-          <a:noFill/>
-        </p:spPr>
-        <p:txBody>
-          <a:bodyPr wrap="square" anchor="t"/>
-          <a:lstStyle/>
-          <a:p>
-            <a:pPr algn="ctr" eaLnBrk="0">
-              <a:lnSpc>
-                <a:spcPct val="110000"/>
-              </a:lnSpc>
-              <a:spcAft>
-                <a:spcPts val="100"/>
-              </a:spcAft>
+              <a:t>재관측</a:t>
+            </a:r>
+          </a:p>
+        </p:txBody>
+      </p:sp>
+      <p:sp>
+        <p:nvSpPr>
+          <p:cNvPr id="24" name="TextBox 23"/>
+          <p:cNvSpPr txBox="1"/>
+          <p:nvPr/>
+        </p:nvSpPr>
+        <p:spPr>
+          <a:xfrm>
+            <a:off x="3200400" y="4192524"/>
+            <a:ext cx="6156655" cy="720851"/>
+          </a:xfrm>
+          <a:prstGeom prst="rect">
+            <a:avLst/>
+          </a:prstGeom>
+          <a:noFill/>
+        </p:spPr>
+        <p:txBody>
+          <a:bodyPr wrap="square" anchor="ctr"/>
+          <a:lstStyle/>
+          <a:p>
+            <a:pPr algn="l" eaLnBrk="0">
+              <a:lnSpc>
+                <a:spcPct val="110000"/>
+              </a:lnSpc>
+            </a:pPr>
+            <a:r>
+              <a:rPr sz="1400" b="0">
+                <a:solidFill>
+                  <a:srgbClr val="1F2A3A"/>
+                </a:solidFill>
+                <a:latin typeface="맑은 고딕"/>
+                <a:ea typeface="맑은 고딕"/>
+                <a:cs typeface="맑은 고딕"/>
+              </a:rPr>
+              <a:t>프로세스 · sys:process</a:t>
+            </a:r>
+          </a:p>
+        </p:txBody>
+      </p:sp>
+      <p:sp>
+        <p:nvSpPr>
+          <p:cNvPr id="25" name="TextBox 24"/>
+          <p:cNvSpPr txBox="1"/>
+          <p:nvPr/>
+        </p:nvSpPr>
+        <p:spPr>
+          <a:xfrm>
+            <a:off x="9448495" y="4192524"/>
+            <a:ext cx="2103120" cy="720851"/>
+          </a:xfrm>
+          <a:prstGeom prst="rect">
+            <a:avLst/>
+          </a:prstGeom>
+          <a:noFill/>
+        </p:spPr>
+        <p:txBody>
+          <a:bodyPr wrap="square" anchor="ctr"/>
+          <a:lstStyle/>
+          <a:p>
+            <a:pPr algn="l" eaLnBrk="0">
+              <a:lnSpc>
+                <a:spcPct val="110000"/>
+              </a:lnSpc>
+            </a:pPr>
+            <a:r>
+              <a:rPr sz="1250" b="1">
+                <a:solidFill>
+                  <a:srgbClr val="556175"/>
+                </a:solidFill>
+                <a:latin typeface="맑은 고딕"/>
+                <a:ea typeface="맑은 고딕"/>
+                <a:cs typeface="맑은 고딕"/>
+              </a:rPr>
+              <a:t>시스템</a:t>
+            </a:r>
+          </a:p>
+        </p:txBody>
+      </p:sp>
+      <p:sp>
+        <p:nvSpPr>
+          <p:cNvPr id="26" name="Rounded Rectangle 25"/>
+          <p:cNvSpPr/>
+          <p:nvPr/>
+        </p:nvSpPr>
+        <p:spPr>
+          <a:xfrm>
+            <a:off x="548640" y="4945380"/>
+            <a:ext cx="11094415" cy="656843"/>
+          </a:xfrm>
+          <a:prstGeom prst="roundRect">
+            <a:avLst>
+              <a:gd name="adj" fmla="val 8000"/>
+            </a:avLst>
+          </a:prstGeom>
+          <a:solidFill>
+            <a:srgbClr val="F3F6F9"/>
+          </a:solidFill>
+          <a:ln>
+            <a:noFill/>
+          </a:ln>
+        </p:spPr>
+        <p:txBody>
+          <a:bodyPr rtlCol="0" anchor="ctr"/>
+          <a:lstStyle/>
+          <a:p>
+            <a:pPr algn="ctr"/>
+          </a:p>
+        </p:txBody>
+      </p:sp>
+      <p:sp>
+        <p:nvSpPr>
+          <p:cNvPr id="27" name="TextBox 26"/>
+          <p:cNvSpPr txBox="1"/>
+          <p:nvPr/>
+        </p:nvSpPr>
+        <p:spPr>
+          <a:xfrm>
+            <a:off x="685800" y="4913376"/>
+            <a:ext cx="2514600" cy="720851"/>
+          </a:xfrm>
+          <a:prstGeom prst="rect">
+            <a:avLst/>
+          </a:prstGeom>
+          <a:noFill/>
+        </p:spPr>
+        <p:txBody>
+          <a:bodyPr wrap="square" anchor="ctr"/>
+          <a:lstStyle/>
+          <a:p>
+            <a:pPr algn="l" eaLnBrk="0">
+              <a:lnSpc>
+                <a:spcPct val="110000"/>
+              </a:lnSpc>
             </a:pPr>
             <a:r>
               <a:rPr sz="1600" b="1">
@@ -30898,62 +31629,225 @@
                 <a:ea typeface="맑은 고딕"/>
                 <a:cs typeface="맑은 고딕"/>
               </a:rPr>
-              <a:t>풀: 부품 공급사</a:t>
-            </a:r>
-          </a:p>
-        </p:txBody>
-      </p:sp>
-      <p:sp>
-        <p:nvSpPr>
-          <p:cNvPr id="12" name="TextBox 11"/>
-          <p:cNvSpPr txBox="1"/>
-          <p:nvPr/>
-        </p:nvSpPr>
-        <p:spPr>
-          <a:xfrm>
-            <a:off x="4492151" y="3707709"/>
-            <a:ext cx="2836468" cy="577342"/>
-          </a:xfrm>
-          <a:prstGeom prst="rect">
-            <a:avLst/>
-          </a:prstGeom>
-          <a:noFill/>
-        </p:spPr>
-        <p:txBody>
-          <a:bodyPr wrap="square" anchor="t"/>
-          <a:lstStyle/>
-          <a:p>
-            <a:pPr algn="ctr" eaLnBrk="0">
-              <a:lnSpc>
-                <a:spcPct val="110000"/>
-              </a:lnSpc>
-              <a:spcAft>
-                <a:spcPts val="100"/>
-              </a:spcAft>
+              <a:t>작업지시 등록</a:t>
+            </a:r>
+          </a:p>
+        </p:txBody>
+      </p:sp>
+      <p:sp>
+        <p:nvSpPr>
+          <p:cNvPr id="28" name="TextBox 27"/>
+          <p:cNvSpPr txBox="1"/>
+          <p:nvPr/>
+        </p:nvSpPr>
+        <p:spPr>
+          <a:xfrm>
+            <a:off x="3200400" y="4913376"/>
+            <a:ext cx="6156655" cy="720851"/>
+          </a:xfrm>
+          <a:prstGeom prst="rect">
+            <a:avLst/>
+          </a:prstGeom>
+          <a:noFill/>
+        </p:spPr>
+        <p:txBody>
+          <a:bodyPr wrap="square" anchor="ctr"/>
+          <a:lstStyle/>
+          <a:p>
+            <a:pPr algn="l" eaLnBrk="0">
+              <a:lnSpc>
+                <a:spcPct val="110000"/>
+              </a:lnSpc>
+            </a:pPr>
+            <a:r>
+              <a:rPr sz="1400" b="0">
+                <a:solidFill>
+                  <a:srgbClr val="1F2A3A"/>
+                </a:solidFill>
+                <a:latin typeface="맑은 고딕"/>
+                <a:ea typeface="맑은 고딕"/>
+                <a:cs typeface="맑은 고딕"/>
+              </a:rPr>
+              <a:t>CMMS · sys:cmms</a:t>
+            </a:r>
+          </a:p>
+        </p:txBody>
+      </p:sp>
+      <p:sp>
+        <p:nvSpPr>
+          <p:cNvPr id="29" name="TextBox 28"/>
+          <p:cNvSpPr txBox="1"/>
+          <p:nvPr/>
+        </p:nvSpPr>
+        <p:spPr>
+          <a:xfrm>
+            <a:off x="9448495" y="4913376"/>
+            <a:ext cx="2103120" cy="720851"/>
+          </a:xfrm>
+          <a:prstGeom prst="rect">
+            <a:avLst/>
+          </a:prstGeom>
+          <a:noFill/>
+        </p:spPr>
+        <p:txBody>
+          <a:bodyPr wrap="square" anchor="ctr"/>
+          <a:lstStyle/>
+          <a:p>
+            <a:pPr algn="l" eaLnBrk="0">
+              <a:lnSpc>
+                <a:spcPct val="110000"/>
+              </a:lnSpc>
+            </a:pPr>
+            <a:r>
+              <a:rPr sz="1250" b="1">
+                <a:solidFill>
+                  <a:srgbClr val="556175"/>
+                </a:solidFill>
+                <a:latin typeface="맑은 고딕"/>
+                <a:ea typeface="맑은 고딕"/>
+                <a:cs typeface="맑은 고딕"/>
+              </a:rPr>
+              <a:t>시스템</a:t>
+            </a:r>
+          </a:p>
+        </p:txBody>
+      </p:sp>
+      <p:sp>
+        <p:nvSpPr>
+          <p:cNvPr id="30" name="Rounded Rectangle 29"/>
+          <p:cNvSpPr/>
+          <p:nvPr/>
+        </p:nvSpPr>
+        <p:spPr>
+          <a:xfrm>
+            <a:off x="548640" y="5666232"/>
+            <a:ext cx="11094415" cy="656843"/>
+          </a:xfrm>
+          <a:prstGeom prst="roundRect">
+            <a:avLst>
+              <a:gd name="adj" fmla="val 8000"/>
+            </a:avLst>
+          </a:prstGeom>
+          <a:solidFill>
+            <a:srgbClr val="F3F6F9"/>
+          </a:solidFill>
+          <a:ln>
+            <a:noFill/>
+          </a:ln>
+        </p:spPr>
+        <p:txBody>
+          <a:bodyPr rtlCol="0" anchor="ctr"/>
+          <a:lstStyle/>
+          <a:p>
+            <a:pPr algn="ctr"/>
+          </a:p>
+        </p:txBody>
+      </p:sp>
+      <p:sp>
+        <p:nvSpPr>
+          <p:cNvPr id="31" name="TextBox 30"/>
+          <p:cNvSpPr txBox="1"/>
+          <p:nvPr/>
+        </p:nvSpPr>
+        <p:spPr>
+          <a:xfrm>
+            <a:off x="685800" y="5634228"/>
+            <a:ext cx="2514600" cy="720851"/>
+          </a:xfrm>
+          <a:prstGeom prst="rect">
+            <a:avLst/>
+          </a:prstGeom>
+          <a:noFill/>
+        </p:spPr>
+        <p:txBody>
+          <a:bodyPr wrap="square" anchor="ctr"/>
+          <a:lstStyle/>
+          <a:p>
+            <a:pPr algn="l" eaLnBrk="0">
+              <a:lnSpc>
+                <a:spcPct val="110000"/>
+              </a:lnSpc>
             </a:pPr>
             <a:r>
               <a:rPr sz="1600" b="1">
                 <a:solidFill>
-                  <a:srgbClr val="1A6FC4"/>
-                </a:solidFill>
-                <a:latin typeface="맑은 고딕"/>
-                <a:ea typeface="맑은 고딕"/>
-                <a:cs typeface="맑은 고딕"/>
-              </a:rPr>
-              <a:t>메시지 흐름</a:t>
-            </a:r>
-          </a:p>
-          <a:p>
-            <a:pPr algn="ctr" eaLnBrk="0">
-              <a:lnSpc>
-                <a:spcPct val="110000"/>
-              </a:lnSpc>
-              <a:spcAft>
-                <a:spcPts val="100"/>
-              </a:spcAft>
-            </a:pPr>
-            <a:r>
-              <a:rPr sz="1300" b="0">
+                  <a:srgbClr val="13294B"/>
+                </a:solidFill>
+                <a:latin typeface="맑은 고딕"/>
+                <a:ea typeface="맑은 고딕"/>
+                <a:cs typeface="맑은 고딕"/>
+              </a:rPr>
+              <a:t>결과 보고</a:t>
+            </a:r>
+          </a:p>
+        </p:txBody>
+      </p:sp>
+      <p:sp>
+        <p:nvSpPr>
+          <p:cNvPr id="32" name="TextBox 31"/>
+          <p:cNvSpPr txBox="1"/>
+          <p:nvPr/>
+        </p:nvSpPr>
+        <p:spPr>
+          <a:xfrm>
+            <a:off x="3200400" y="5634228"/>
+            <a:ext cx="6156655" cy="720851"/>
+          </a:xfrm>
+          <a:prstGeom prst="rect">
+            <a:avLst/>
+          </a:prstGeom>
+          <a:noFill/>
+        </p:spPr>
+        <p:txBody>
+          <a:bodyPr wrap="square" anchor="ctr"/>
+          <a:lstStyle/>
+          <a:p>
+            <a:pPr algn="l" eaLnBrk="0">
+              <a:lnSpc>
+                <a:spcPct val="110000"/>
+              </a:lnSpc>
+            </a:pPr>
+            <a:r>
+              <a:rPr sz="1400" b="0">
+                <a:solidFill>
+                  <a:srgbClr val="1F2A3A"/>
+                </a:solidFill>
+                <a:latin typeface="맑은 고딕"/>
+                <a:ea typeface="맑은 고딕"/>
+                <a:cs typeface="맑은 고딕"/>
+              </a:rPr>
+              <a:t>프로세스 · sys:process</a:t>
+            </a:r>
+          </a:p>
+        </p:txBody>
+      </p:sp>
+      <p:sp>
+        <p:nvSpPr>
+          <p:cNvPr id="33" name="TextBox 32"/>
+          <p:cNvSpPr txBox="1"/>
+          <p:nvPr/>
+        </p:nvSpPr>
+        <p:spPr>
+          <a:xfrm>
+            <a:off x="9448495" y="5634228"/>
+            <a:ext cx="2103120" cy="720851"/>
+          </a:xfrm>
+          <a:prstGeom prst="rect">
+            <a:avLst/>
+          </a:prstGeom>
+          <a:noFill/>
+        </p:spPr>
+        <p:txBody>
+          <a:bodyPr wrap="square" anchor="ctr"/>
+          <a:lstStyle/>
+          <a:p>
+            <a:pPr algn="l" eaLnBrk="0">
+              <a:lnSpc>
+                <a:spcPct val="110000"/>
+              </a:lnSpc>
+            </a:pPr>
+            <a:r>
+              <a:rPr sz="1250" b="1">
                 <a:solidFill>
                   <a:srgbClr val="556175"/>
                 </a:solidFill>
@@ -30961,133 +31855,7 @@
                 <a:ea typeface="맑은 고딕"/>
                 <a:cs typeface="맑은 고딕"/>
               </a:rPr>
-              <a:t>Message Flow</a:t>
-            </a:r>
-          </a:p>
-        </p:txBody>
-      </p:sp>
-      <p:sp>
-        <p:nvSpPr>
-          <p:cNvPr id="13" name="TextBox 12"/>
-          <p:cNvSpPr txBox="1"/>
-          <p:nvPr/>
-        </p:nvSpPr>
-        <p:spPr>
-          <a:xfrm>
-            <a:off x="2713904" y="3896807"/>
-            <a:ext cx="1090949" cy="375920"/>
-          </a:xfrm>
-          <a:prstGeom prst="rect">
-            <a:avLst/>
-          </a:prstGeom>
-          <a:noFill/>
-        </p:spPr>
-        <p:txBody>
-          <a:bodyPr wrap="square" anchor="t"/>
-          <a:lstStyle/>
-          <a:p>
-            <a:pPr algn="ctr" eaLnBrk="0">
-              <a:lnSpc>
-                <a:spcPct val="110000"/>
-              </a:lnSpc>
-              <a:spcAft>
-                <a:spcPts val="100"/>
-              </a:spcAft>
-            </a:pPr>
-            <a:r>
-              <a:rPr sz="1600" b="1">
-                <a:solidFill>
-                  <a:srgbClr val="13294B"/>
-                </a:solidFill>
-                <a:latin typeface="맑은 고딕"/>
-                <a:ea typeface="맑은 고딕"/>
-                <a:cs typeface="맑은 고딕"/>
-              </a:rPr>
-              <a:t>발주서</a:t>
-            </a:r>
-          </a:p>
-        </p:txBody>
-      </p:sp>
-      <p:sp>
-        <p:nvSpPr>
-          <p:cNvPr id="14" name="TextBox 13"/>
-          <p:cNvSpPr txBox="1"/>
-          <p:nvPr/>
-        </p:nvSpPr>
-        <p:spPr>
-          <a:xfrm>
-            <a:off x="7950461" y="3896807"/>
-            <a:ext cx="1309139" cy="375920"/>
-          </a:xfrm>
-          <a:prstGeom prst="rect">
-            <a:avLst/>
-          </a:prstGeom>
-          <a:noFill/>
-        </p:spPr>
-        <p:txBody>
-          <a:bodyPr wrap="square" anchor="t"/>
-          <a:lstStyle/>
-          <a:p>
-            <a:pPr algn="ctr" eaLnBrk="0">
-              <a:lnSpc>
-                <a:spcPct val="110000"/>
-              </a:lnSpc>
-              <a:spcAft>
-                <a:spcPts val="100"/>
-              </a:spcAft>
-            </a:pPr>
-            <a:r>
-              <a:rPr sz="1600" b="1">
-                <a:solidFill>
-                  <a:srgbClr val="13294B"/>
-                </a:solidFill>
-                <a:latin typeface="맑은 고딕"/>
-                <a:ea typeface="맑은 고딕"/>
-                <a:cs typeface="맑은 고딕"/>
-              </a:rPr>
-              <a:t>납기 회신</a:t>
-            </a:r>
-          </a:p>
-        </p:txBody>
-      </p:sp>
-      <p:sp>
-        <p:nvSpPr>
-          <p:cNvPr id="15" name="TextBox 14"/>
-          <p:cNvSpPr txBox="1"/>
-          <p:nvPr/>
-        </p:nvSpPr>
-        <p:spPr>
-          <a:xfrm>
-            <a:off x="5146721" y="2809494"/>
-            <a:ext cx="1527329" cy="375920"/>
-          </a:xfrm>
-          <a:prstGeom prst="rect">
-            <a:avLst/>
-          </a:prstGeom>
-          <a:noFill/>
-        </p:spPr>
-        <p:txBody>
-          <a:bodyPr wrap="square" anchor="t"/>
-          <a:lstStyle/>
-          <a:p>
-            <a:pPr algn="ctr" eaLnBrk="0">
-              <a:lnSpc>
-                <a:spcPct val="110000"/>
-              </a:lnSpc>
-              <a:spcAft>
-                <a:spcPts val="100"/>
-              </a:spcAft>
-            </a:pPr>
-            <a:r>
-              <a:rPr sz="1600" b="1">
-                <a:solidFill>
-                  <a:srgbClr val="13294B"/>
-                </a:solidFill>
-                <a:latin typeface="맑은 고딕"/>
-                <a:ea typeface="맑은 고딕"/>
-                <a:cs typeface="맑은 고딕"/>
-              </a:rPr>
-              <a:t>시퀀스 흐름</a:t>
+              <a:t>시스템</a:t>
             </a:r>
           </a:p>
         </p:txBody>
@@ -31152,7 +31920,7 @@
                 <a:ea typeface="맑은 고딕"/>
                 <a:cs typeface="맑은 고딕"/>
               </a:rPr>
-              <a:t>경계 이벤트와 타이머</a:t>
+              <a:t>메시지 흐름: 풀과 풀 사이의 주고받음</a:t>
             </a:r>
           </a:p>
         </p:txBody>
@@ -31191,7 +31959,7 @@
                 <a:ea typeface="맑은 고딕"/>
                 <a:cs typeface="맑은 고딕"/>
               </a:rPr>
-              <a:t>작업이 끝나기를 기다리는 동안 생기는 일은 테두리에 붙인 경계 이벤트로 그리고, 기간의 경과는 타이머로 나타낸다.</a:t>
+              <a:t>참여자가 둘이면 풀을 따로 그리고, 풀 사이의 주고받음은 점선의 메시지 흐름으로 그려 풀 안의 순서와 구분한다.</a:t>
             </a:r>
           </a:p>
         </p:txBody>
@@ -31266,7 +32034,7 @@
       </p:sp>
       <p:pic>
         <p:nvPicPr>
-          <p:cNvPr id="6" name="삽화:경계타이머.svg" descr="illust_9058012065163189570_1792123197.png"/>
+          <p:cNvPr id="6" name="삽화:메시지흐름.svg" descr="illust_2508351124452405496_1792123197.png"/>
           <p:cNvPicPr>
             <a:picLocks noChangeAspect="1"/>
           </p:cNvPicPr>
@@ -31296,8 +32064,8 @@
         </p:nvSpPr>
         <p:spPr>
           <a:xfrm>
-            <a:off x="1186574" y="2313111"/>
-            <a:ext cx="4363798" cy="577342"/>
+            <a:off x="3335745" y="2478572"/>
+            <a:ext cx="1527329" cy="375920"/>
           </a:xfrm>
           <a:prstGeom prst="rect">
             <a:avLst/>
@@ -31319,15 +32087,36 @@
             <a:r>
               <a:rPr sz="1600" b="1">
                 <a:solidFill>
-                  <a:srgbClr val="1A6FC4"/>
-                </a:solidFill>
-                <a:latin typeface="맑은 고딕"/>
-                <a:ea typeface="맑은 고딕"/>
-                <a:cs typeface="맑은 고딕"/>
-              </a:rPr>
-              <a:t>중단형</a:t>
-            </a:r>
-          </a:p>
+                  <a:srgbClr val="13294B"/>
+                </a:solidFill>
+                <a:latin typeface="맑은 고딕"/>
+                <a:ea typeface="맑은 고딕"/>
+                <a:cs typeface="맑은 고딕"/>
+              </a:rPr>
+              <a:t>발주 요청</a:t>
+            </a:r>
+          </a:p>
+        </p:txBody>
+      </p:sp>
+      <p:sp>
+        <p:nvSpPr>
+          <p:cNvPr id="8" name="TextBox 7"/>
+          <p:cNvSpPr txBox="1"/>
+          <p:nvPr/>
+        </p:nvSpPr>
+        <p:spPr>
+          <a:xfrm>
+            <a:off x="6968607" y="2478572"/>
+            <a:ext cx="1527329" cy="375920"/>
+          </a:xfrm>
+          <a:prstGeom prst="rect">
+            <a:avLst/>
+          </a:prstGeom>
+          <a:noFill/>
+        </p:spPr>
+        <p:txBody>
+          <a:bodyPr wrap="square" anchor="t"/>
+          <a:lstStyle/>
           <a:p>
             <a:pPr algn="ctr" eaLnBrk="0">
               <a:lnSpc>
@@ -31338,29 +32127,29 @@
               </a:spcAft>
             </a:pPr>
             <a:r>
-              <a:rPr sz="1300" b="0">
-                <a:solidFill>
-                  <a:srgbClr val="556175"/>
-                </a:solidFill>
-                <a:latin typeface="맑은 고딕"/>
-                <a:ea typeface="맑은 고딕"/>
-                <a:cs typeface="맑은 고딕"/>
-              </a:rPr>
-              <a:t>Interrupting · 실선 겹테두리</a:t>
-            </a:r>
-          </a:p>
-        </p:txBody>
-      </p:sp>
-      <p:sp>
-        <p:nvSpPr>
-          <p:cNvPr id="8" name="TextBox 7"/>
-          <p:cNvSpPr txBox="1"/>
-          <p:nvPr/>
-        </p:nvSpPr>
-        <p:spPr>
-          <a:xfrm>
-            <a:off x="6641322" y="2313111"/>
-            <a:ext cx="4363798" cy="577342"/>
+              <a:rPr sz="1600" b="1">
+                <a:solidFill>
+                  <a:srgbClr val="13294B"/>
+                </a:solidFill>
+                <a:latin typeface="맑은 고딕"/>
+                <a:ea typeface="맑은 고딕"/>
+                <a:cs typeface="맑은 고딕"/>
+              </a:rPr>
+              <a:t>납기 확인</a:t>
+            </a:r>
+          </a:p>
+        </p:txBody>
+      </p:sp>
+      <p:sp>
+        <p:nvSpPr>
+          <p:cNvPr id="9" name="TextBox 8"/>
+          <p:cNvSpPr txBox="1"/>
+          <p:nvPr/>
+        </p:nvSpPr>
+        <p:spPr>
+          <a:xfrm>
+            <a:off x="5146721" y="5220492"/>
+            <a:ext cx="1527329" cy="375920"/>
           </a:xfrm>
           <a:prstGeom prst="rect">
             <a:avLst/>
@@ -31382,15 +32171,36 @@
             <a:r>
               <a:rPr sz="1600" b="1">
                 <a:solidFill>
-                  <a:srgbClr val="1A6FC4"/>
-                </a:solidFill>
-                <a:latin typeface="맑은 고딕"/>
-                <a:ea typeface="맑은 고딕"/>
-                <a:cs typeface="맑은 고딕"/>
-              </a:rPr>
-              <a:t>비중단형</a:t>
-            </a:r>
-          </a:p>
+                  <a:srgbClr val="13294B"/>
+                </a:solidFill>
+                <a:latin typeface="맑은 고딕"/>
+                <a:ea typeface="맑은 고딕"/>
+                <a:cs typeface="맑은 고딕"/>
+              </a:rPr>
+              <a:t>주문 접수</a:t>
+            </a:r>
+          </a:p>
+        </p:txBody>
+      </p:sp>
+      <p:sp>
+        <p:nvSpPr>
+          <p:cNvPr id="10" name="TextBox 9"/>
+          <p:cNvSpPr txBox="1"/>
+          <p:nvPr/>
+        </p:nvSpPr>
+        <p:spPr>
+          <a:xfrm>
+            <a:off x="8168651" y="1852185"/>
+            <a:ext cx="2836468" cy="375920"/>
+          </a:xfrm>
+          <a:prstGeom prst="rect">
+            <a:avLst/>
+          </a:prstGeom>
+          <a:noFill/>
+        </p:spPr>
+        <p:txBody>
+          <a:bodyPr wrap="square" anchor="t"/>
+          <a:lstStyle/>
           <a:p>
             <a:pPr algn="ctr" eaLnBrk="0">
               <a:lnSpc>
@@ -31401,29 +32211,29 @@
               </a:spcAft>
             </a:pPr>
             <a:r>
-              <a:rPr sz="1300" b="0">
-                <a:solidFill>
-                  <a:srgbClr val="556175"/>
-                </a:solidFill>
-                <a:latin typeface="맑은 고딕"/>
-                <a:ea typeface="맑은 고딕"/>
-                <a:cs typeface="맑은 고딕"/>
-              </a:rPr>
-              <a:t>Non-interrupting · 점선 겹테두리</a:t>
-            </a:r>
-          </a:p>
-        </p:txBody>
-      </p:sp>
-      <p:sp>
-        <p:nvSpPr>
-          <p:cNvPr id="9" name="TextBox 8"/>
-          <p:cNvSpPr txBox="1"/>
-          <p:nvPr/>
-        </p:nvSpPr>
-        <p:spPr>
-          <a:xfrm>
-            <a:off x="968384" y="4747747"/>
-            <a:ext cx="1636424" cy="375920"/>
+              <a:rPr sz="1600" b="1">
+                <a:solidFill>
+                  <a:srgbClr val="13294B"/>
+                </a:solidFill>
+                <a:latin typeface="맑은 고딕"/>
+                <a:ea typeface="맑은 고딕"/>
+                <a:cs typeface="맑은 고딕"/>
+              </a:rPr>
+              <a:t>풀: 설비 운영 조직</a:t>
+            </a:r>
+          </a:p>
+        </p:txBody>
+      </p:sp>
+      <p:sp>
+        <p:nvSpPr>
+          <p:cNvPr id="11" name="TextBox 10"/>
+          <p:cNvSpPr txBox="1"/>
+          <p:nvPr/>
+        </p:nvSpPr>
+        <p:spPr>
+          <a:xfrm>
+            <a:off x="8495936" y="4605924"/>
+            <a:ext cx="2618278" cy="375920"/>
           </a:xfrm>
           <a:prstGeom prst="rect">
             <a:avLst/>
@@ -31451,21 +32261,21 @@
                 <a:ea typeface="맑은 고딕"/>
                 <a:cs typeface="맑은 고딕"/>
               </a:rPr>
-              <a:t>끊긴 작업</a:t>
-            </a:r>
-          </a:p>
-        </p:txBody>
-      </p:sp>
-      <p:sp>
-        <p:nvSpPr>
-          <p:cNvPr id="10" name="TextBox 9"/>
-          <p:cNvSpPr txBox="1"/>
-          <p:nvPr/>
-        </p:nvSpPr>
-        <p:spPr>
-          <a:xfrm>
-            <a:off x="6423132" y="4747747"/>
-            <a:ext cx="1636424" cy="375920"/>
+              <a:t>풀: 부품 공급사</a:t>
+            </a:r>
+          </a:p>
+        </p:txBody>
+      </p:sp>
+      <p:sp>
+        <p:nvSpPr>
+          <p:cNvPr id="12" name="TextBox 11"/>
+          <p:cNvSpPr txBox="1"/>
+          <p:nvPr/>
+        </p:nvSpPr>
+        <p:spPr>
+          <a:xfrm>
+            <a:off x="4492151" y="3707709"/>
+            <a:ext cx="2836468" cy="577342"/>
           </a:xfrm>
           <a:prstGeom prst="rect">
             <a:avLst/>
@@ -31487,36 +32297,15 @@
             <a:r>
               <a:rPr sz="1600" b="1">
                 <a:solidFill>
-                  <a:srgbClr val="13294B"/>
-                </a:solidFill>
-                <a:latin typeface="맑은 고딕"/>
-                <a:ea typeface="맑은 고딕"/>
-                <a:cs typeface="맑은 고딕"/>
-              </a:rPr>
-              <a:t>계속되는 작업</a:t>
-            </a:r>
-          </a:p>
-        </p:txBody>
-      </p:sp>
-      <p:sp>
-        <p:nvSpPr>
-          <p:cNvPr id="11" name="TextBox 10"/>
-          <p:cNvSpPr txBox="1"/>
-          <p:nvPr/>
-        </p:nvSpPr>
-        <p:spPr>
-          <a:xfrm>
-            <a:off x="4077591" y="5244129"/>
-            <a:ext cx="1309139" cy="375920"/>
-          </a:xfrm>
-          <a:prstGeom prst="rect">
-            <a:avLst/>
-          </a:prstGeom>
-          <a:noFill/>
-        </p:spPr>
-        <p:txBody>
-          <a:bodyPr wrap="square" anchor="t"/>
-          <a:lstStyle/>
+                  <a:srgbClr val="1A6FC4"/>
+                </a:solidFill>
+                <a:latin typeface="맑은 고딕"/>
+                <a:ea typeface="맑은 고딕"/>
+                <a:cs typeface="맑은 고딕"/>
+              </a:rPr>
+              <a:t>메시지 흐름</a:t>
+            </a:r>
+          </a:p>
           <a:p>
             <a:pPr algn="ctr" eaLnBrk="0">
               <a:lnSpc>
@@ -31527,29 +32316,29 @@
               </a:spcAft>
             </a:pPr>
             <a:r>
-              <a:rPr sz="1600" b="1">
-                <a:solidFill>
-                  <a:srgbClr val="13294B"/>
-                </a:solidFill>
-                <a:latin typeface="맑은 고딕"/>
-                <a:ea typeface="맑은 고딕"/>
-                <a:cs typeface="맑은 고딕"/>
-              </a:rPr>
-              <a:t>다른 작업</a:t>
-            </a:r>
-          </a:p>
-        </p:txBody>
-      </p:sp>
-      <p:sp>
-        <p:nvSpPr>
-          <p:cNvPr id="12" name="TextBox 11"/>
-          <p:cNvSpPr txBox="1"/>
-          <p:nvPr/>
-        </p:nvSpPr>
-        <p:spPr>
-          <a:xfrm>
-            <a:off x="9532338" y="5244129"/>
-            <a:ext cx="1309139" cy="375920"/>
+              <a:rPr sz="1300" b="0">
+                <a:solidFill>
+                  <a:srgbClr val="556175"/>
+                </a:solidFill>
+                <a:latin typeface="맑은 고딕"/>
+                <a:ea typeface="맑은 고딕"/>
+                <a:cs typeface="맑은 고딕"/>
+              </a:rPr>
+              <a:t>Message Flow</a:t>
+            </a:r>
+          </a:p>
+        </p:txBody>
+      </p:sp>
+      <p:sp>
+        <p:nvSpPr>
+          <p:cNvPr id="13" name="TextBox 12"/>
+          <p:cNvSpPr txBox="1"/>
+          <p:nvPr/>
+        </p:nvSpPr>
+        <p:spPr>
+          <a:xfrm>
+            <a:off x="2713904" y="3896807"/>
+            <a:ext cx="1090949" cy="375920"/>
           </a:xfrm>
           <a:prstGeom prst="rect">
             <a:avLst/>
@@ -31577,7 +32366,91 @@
                 <a:ea typeface="맑은 고딕"/>
                 <a:cs typeface="맑은 고딕"/>
               </a:rPr>
-              <a:t>추가 작업</a:t>
+              <a:t>발주서</a:t>
+            </a:r>
+          </a:p>
+        </p:txBody>
+      </p:sp>
+      <p:sp>
+        <p:nvSpPr>
+          <p:cNvPr id="14" name="TextBox 13"/>
+          <p:cNvSpPr txBox="1"/>
+          <p:nvPr/>
+        </p:nvSpPr>
+        <p:spPr>
+          <a:xfrm>
+            <a:off x="7950461" y="3896807"/>
+            <a:ext cx="1309139" cy="375920"/>
+          </a:xfrm>
+          <a:prstGeom prst="rect">
+            <a:avLst/>
+          </a:prstGeom>
+          <a:noFill/>
+        </p:spPr>
+        <p:txBody>
+          <a:bodyPr wrap="square" anchor="t"/>
+          <a:lstStyle/>
+          <a:p>
+            <a:pPr algn="ctr" eaLnBrk="0">
+              <a:lnSpc>
+                <a:spcPct val="110000"/>
+              </a:lnSpc>
+              <a:spcAft>
+                <a:spcPts val="100"/>
+              </a:spcAft>
+            </a:pPr>
+            <a:r>
+              <a:rPr sz="1600" b="1">
+                <a:solidFill>
+                  <a:srgbClr val="13294B"/>
+                </a:solidFill>
+                <a:latin typeface="맑은 고딕"/>
+                <a:ea typeface="맑은 고딕"/>
+                <a:cs typeface="맑은 고딕"/>
+              </a:rPr>
+              <a:t>납기 회신</a:t>
+            </a:r>
+          </a:p>
+        </p:txBody>
+      </p:sp>
+      <p:sp>
+        <p:nvSpPr>
+          <p:cNvPr id="15" name="TextBox 14"/>
+          <p:cNvSpPr txBox="1"/>
+          <p:nvPr/>
+        </p:nvSpPr>
+        <p:spPr>
+          <a:xfrm>
+            <a:off x="5146721" y="2809494"/>
+            <a:ext cx="1527329" cy="375920"/>
+          </a:xfrm>
+          <a:prstGeom prst="rect">
+            <a:avLst/>
+          </a:prstGeom>
+          <a:noFill/>
+        </p:spPr>
+        <p:txBody>
+          <a:bodyPr wrap="square" anchor="t"/>
+          <a:lstStyle/>
+          <a:p>
+            <a:pPr algn="ctr" eaLnBrk="0">
+              <a:lnSpc>
+                <a:spcPct val="110000"/>
+              </a:lnSpc>
+              <a:spcAft>
+                <a:spcPts val="100"/>
+              </a:spcAft>
+            </a:pPr>
+            <a:r>
+              <a:rPr sz="1600" b="1">
+                <a:solidFill>
+                  <a:srgbClr val="13294B"/>
+                </a:solidFill>
+                <a:latin typeface="맑은 고딕"/>
+                <a:ea typeface="맑은 고딕"/>
+                <a:cs typeface="맑은 고딕"/>
+              </a:rPr>
+              <a:t>시퀀스 흐름</a:t>
             </a:r>
           </a:p>
         </p:txBody>
@@ -31642,7 +32515,7 @@
                 <a:ea typeface="맑은 고딕"/>
                 <a:cs typeface="맑은 고딕"/>
               </a:rPr>
-              <a:t>승인을 받는 자리의 그림</a:t>
+              <a:t>경계 이벤트와 타이머</a:t>
             </a:r>
           </a:p>
         </p:txBody>
@@ -31681,7 +32554,7 @@
                 <a:ea typeface="맑은 고딕"/>
                 <a:cs typeface="맑은 고딕"/>
               </a:rPr>
-              <a:t>승인 작업에는 승인과 거절을 가르는 게이트웨이와, 응답이 늦을 때 알림 가지를 여는 비중단형 타이머가 함께 붙는다.</a:t>
+              <a:t>작업이 끝나기를 기다리는 동안 생기는 일은 테두리에 붙인 경계 이벤트로 그리고, 기간의 경과는 타이머로 나타낸다.</a:t>
             </a:r>
           </a:p>
         </p:txBody>
@@ -31756,7 +32629,7 @@
       </p:sp>
       <p:pic>
         <p:nvPicPr>
-          <p:cNvPr id="6" name="삽화:승인자리.svg" descr="illust_4933521765361621818_1792123197.png"/>
+          <p:cNvPr id="6" name="삽화:경계타이머.svg" descr="illust_7277020354076804417_1792123197.png"/>
           <p:cNvPicPr>
             <a:picLocks noChangeAspect="1"/>
           </p:cNvPicPr>
@@ -31786,8 +32659,8 @@
         </p:nvSpPr>
         <p:spPr>
           <a:xfrm>
-            <a:off x="1153846" y="2714945"/>
-            <a:ext cx="1527329" cy="546353"/>
+            <a:off x="1186574" y="2313111"/>
+            <a:ext cx="4363798" cy="577342"/>
           </a:xfrm>
           <a:prstGeom prst="rect">
             <a:avLst/>
@@ -31807,38 +32680,17 @@
               </a:spcAft>
             </a:pPr>
             <a:r>
-              <a:rPr sz="1350" b="1">
-                <a:solidFill>
-                  <a:srgbClr val="13294B"/>
-                </a:solidFill>
-                <a:latin typeface="맑은 고딕"/>
-                <a:ea typeface="맑은 고딕"/>
-                <a:cs typeface="맑은 고딕"/>
-              </a:rPr>
-              <a:t>원인 진단 · 냉각 조치 제안</a:t>
-            </a:r>
-          </a:p>
-        </p:txBody>
-      </p:sp>
-      <p:sp>
-        <p:nvSpPr>
-          <p:cNvPr id="8" name="TextBox 7"/>
-          <p:cNvSpPr txBox="1"/>
-          <p:nvPr/>
-        </p:nvSpPr>
-        <p:spPr>
-          <a:xfrm>
-            <a:off x="3968496" y="2809494"/>
-            <a:ext cx="1418234" cy="337185"/>
-          </a:xfrm>
-          <a:prstGeom prst="rect">
-            <a:avLst/>
-          </a:prstGeom>
-          <a:noFill/>
-        </p:spPr>
-        <p:txBody>
-          <a:bodyPr wrap="square" anchor="t"/>
-          <a:lstStyle/>
+              <a:rPr sz="1600" b="1">
+                <a:solidFill>
+                  <a:srgbClr val="1A6FC4"/>
+                </a:solidFill>
+                <a:latin typeface="맑은 고딕"/>
+                <a:ea typeface="맑은 고딕"/>
+                <a:cs typeface="맑은 고딕"/>
+              </a:rPr>
+              <a:t>중단형</a:t>
+            </a:r>
+          </a:p>
           <a:p>
             <a:pPr algn="ctr" eaLnBrk="0">
               <a:lnSpc>
@@ -31849,29 +32701,29 @@
               </a:spcAft>
             </a:pPr>
             <a:r>
-              <a:rPr sz="1350" b="1">
-                <a:solidFill>
-                  <a:srgbClr val="1A6FC4"/>
-                </a:solidFill>
-                <a:latin typeface="맑은 고딕"/>
-                <a:ea typeface="맑은 고딕"/>
-                <a:cs typeface="맑은 고딕"/>
-              </a:rPr>
-              <a:t>운전원 승인</a:t>
-            </a:r>
-          </a:p>
-        </p:txBody>
-      </p:sp>
-      <p:sp>
-        <p:nvSpPr>
-          <p:cNvPr id="9" name="TextBox 8"/>
-          <p:cNvSpPr txBox="1"/>
-          <p:nvPr/>
-        </p:nvSpPr>
-        <p:spPr>
-          <a:xfrm>
-            <a:off x="6455860" y="2135832"/>
-            <a:ext cx="1090949" cy="337185"/>
+              <a:rPr sz="1300" b="0">
+                <a:solidFill>
+                  <a:srgbClr val="556175"/>
+                </a:solidFill>
+                <a:latin typeface="맑은 고딕"/>
+                <a:ea typeface="맑은 고딕"/>
+                <a:cs typeface="맑은 고딕"/>
+              </a:rPr>
+              <a:t>Interrupting · 실선 겹테두리</a:t>
+            </a:r>
+          </a:p>
+        </p:txBody>
+      </p:sp>
+      <p:sp>
+        <p:nvSpPr>
+          <p:cNvPr id="8" name="TextBox 7"/>
+          <p:cNvSpPr txBox="1"/>
+          <p:nvPr/>
+        </p:nvSpPr>
+        <p:spPr>
+          <a:xfrm>
+            <a:off x="6641322" y="2313111"/>
+            <a:ext cx="4363798" cy="577342"/>
           </a:xfrm>
           <a:prstGeom prst="rect">
             <a:avLst/>
@@ -31891,38 +32743,17 @@
               </a:spcAft>
             </a:pPr>
             <a:r>
-              <a:rPr sz="1350" b="1">
-                <a:solidFill>
-                  <a:srgbClr val="13294B"/>
-                </a:solidFill>
-                <a:latin typeface="맑은 고딕"/>
-                <a:ea typeface="맑은 고딕"/>
-                <a:cs typeface="맑은 고딕"/>
-              </a:rPr>
-              <a:t>승인?</a:t>
-            </a:r>
-          </a:p>
-        </p:txBody>
-      </p:sp>
-      <p:sp>
-        <p:nvSpPr>
-          <p:cNvPr id="10" name="TextBox 9"/>
-          <p:cNvSpPr txBox="1"/>
-          <p:nvPr/>
-        </p:nvSpPr>
-        <p:spPr>
-          <a:xfrm>
-            <a:off x="9150506" y="2809494"/>
-            <a:ext cx="1418234" cy="337185"/>
-          </a:xfrm>
-          <a:prstGeom prst="rect">
-            <a:avLst/>
-          </a:prstGeom>
-          <a:noFill/>
-        </p:spPr>
-        <p:txBody>
-          <a:bodyPr wrap="square" anchor="t"/>
-          <a:lstStyle/>
+              <a:rPr sz="1600" b="1">
+                <a:solidFill>
+                  <a:srgbClr val="1A6FC4"/>
+                </a:solidFill>
+                <a:latin typeface="맑은 고딕"/>
+                <a:ea typeface="맑은 고딕"/>
+                <a:cs typeface="맑은 고딕"/>
+              </a:rPr>
+              <a:t>비중단형</a:t>
+            </a:r>
+          </a:p>
           <a:p>
             <a:pPr algn="ctr" eaLnBrk="0">
               <a:lnSpc>
@@ -31933,29 +32764,29 @@
               </a:spcAft>
             </a:pPr>
             <a:r>
-              <a:rPr sz="1350" b="1">
-                <a:solidFill>
-                  <a:srgbClr val="13294B"/>
-                </a:solidFill>
-                <a:latin typeface="맑은 고딕"/>
-                <a:ea typeface="맑은 고딕"/>
-                <a:cs typeface="맑은 고딕"/>
-              </a:rPr>
-              <a:t>냉각 명령</a:t>
-            </a:r>
-          </a:p>
-        </p:txBody>
-      </p:sp>
-      <p:sp>
-        <p:nvSpPr>
-          <p:cNvPr id="11" name="TextBox 10"/>
-          <p:cNvSpPr txBox="1"/>
-          <p:nvPr/>
-        </p:nvSpPr>
-        <p:spPr>
-          <a:xfrm>
-            <a:off x="8114104" y="5102306"/>
-            <a:ext cx="1527329" cy="337185"/>
+              <a:rPr sz="1300" b="0">
+                <a:solidFill>
+                  <a:srgbClr val="556175"/>
+                </a:solidFill>
+                <a:latin typeface="맑은 고딕"/>
+                <a:ea typeface="맑은 고딕"/>
+                <a:cs typeface="맑은 고딕"/>
+              </a:rPr>
+              <a:t>Non-interrupting · 점선 겹테두리</a:t>
+            </a:r>
+          </a:p>
+        </p:txBody>
+      </p:sp>
+      <p:sp>
+        <p:nvSpPr>
+          <p:cNvPr id="9" name="TextBox 8"/>
+          <p:cNvSpPr txBox="1"/>
+          <p:nvPr/>
+        </p:nvSpPr>
+        <p:spPr>
+          <a:xfrm>
+            <a:off x="968384" y="4747747"/>
+            <a:ext cx="1636424" cy="375920"/>
           </a:xfrm>
           <a:prstGeom prst="rect">
             <a:avLst/>
@@ -31975,7 +32806,7 @@
               </a:spcAft>
             </a:pPr>
             <a:r>
-              <a:rPr sz="1350" b="1">
+              <a:rPr sz="1600" b="1">
                 <a:solidFill>
                   <a:srgbClr val="13294B"/>
                 </a:solidFill>
@@ -31983,21 +32814,21 @@
                 <a:ea typeface="맑은 고딕"/>
                 <a:cs typeface="맑은 고딕"/>
               </a:rPr>
-              <a:t>결과 보고: 거절</a:t>
-            </a:r>
-          </a:p>
-        </p:txBody>
-      </p:sp>
-      <p:sp>
-        <p:nvSpPr>
-          <p:cNvPr id="12" name="TextBox 11"/>
-          <p:cNvSpPr txBox="1"/>
-          <p:nvPr/>
-        </p:nvSpPr>
-        <p:spPr>
-          <a:xfrm>
-            <a:off x="2659356" y="5102306"/>
-            <a:ext cx="1527329" cy="337185"/>
+              <a:t>끊긴 작업</a:t>
+            </a:r>
+          </a:p>
+        </p:txBody>
+      </p:sp>
+      <p:sp>
+        <p:nvSpPr>
+          <p:cNvPr id="10" name="TextBox 9"/>
+          <p:cNvSpPr txBox="1"/>
+          <p:nvPr/>
+        </p:nvSpPr>
+        <p:spPr>
+          <a:xfrm>
+            <a:off x="6423132" y="4747747"/>
+            <a:ext cx="1636424" cy="375920"/>
           </a:xfrm>
           <a:prstGeom prst="rect">
             <a:avLst/>
@@ -32017,7 +32848,7 @@
               </a:spcAft>
             </a:pPr>
             <a:r>
-              <a:rPr sz="1350" b="1">
+              <a:rPr sz="1600" b="1">
                 <a:solidFill>
                   <a:srgbClr val="13294B"/>
                 </a:solidFill>
@@ -32025,21 +32856,21 @@
                 <a:ea typeface="맑은 고딕"/>
                 <a:cs typeface="맑은 고딕"/>
               </a:rPr>
-              <a:t>승인 지연 알림</a:t>
-            </a:r>
-          </a:p>
-        </p:txBody>
-      </p:sp>
-      <p:sp>
-        <p:nvSpPr>
-          <p:cNvPr id="13" name="TextBox 12"/>
-          <p:cNvSpPr txBox="1"/>
-          <p:nvPr/>
-        </p:nvSpPr>
-        <p:spPr>
-          <a:xfrm>
-            <a:off x="5441277" y="3754983"/>
-            <a:ext cx="1418234" cy="678053"/>
+              <a:t>계속되는 작업</a:t>
+            </a:r>
+          </a:p>
+        </p:txBody>
+      </p:sp>
+      <p:sp>
+        <p:nvSpPr>
+          <p:cNvPr id="11" name="TextBox 10"/>
+          <p:cNvSpPr txBox="1"/>
+          <p:nvPr/>
+        </p:nvSpPr>
+        <p:spPr>
+          <a:xfrm>
+            <a:off x="4077591" y="5244129"/>
+            <a:ext cx="1309139" cy="375920"/>
           </a:xfrm>
           <a:prstGeom prst="rect">
             <a:avLst/>
@@ -32059,17 +32890,38 @@
               </a:spcAft>
             </a:pPr>
             <a:r>
-              <a:rPr sz="1350" b="1">
-                <a:solidFill>
-                  <a:srgbClr val="1A6FC4"/>
-                </a:solidFill>
-                <a:latin typeface="맑은 고딕"/>
-                <a:ea typeface="맑은 고딕"/>
-                <a:cs typeface="맑은 고딕"/>
-              </a:rPr>
-              <a:t>승인 지연</a:t>
-            </a:r>
-          </a:p>
+              <a:rPr sz="1600" b="1">
+                <a:solidFill>
+                  <a:srgbClr val="13294B"/>
+                </a:solidFill>
+                <a:latin typeface="맑은 고딕"/>
+                <a:ea typeface="맑은 고딕"/>
+                <a:cs typeface="맑은 고딕"/>
+              </a:rPr>
+              <a:t>다른 작업</a:t>
+            </a:r>
+          </a:p>
+        </p:txBody>
+      </p:sp>
+      <p:sp>
+        <p:nvSpPr>
+          <p:cNvPr id="12" name="TextBox 11"/>
+          <p:cNvSpPr txBox="1"/>
+          <p:nvPr/>
+        </p:nvSpPr>
+        <p:spPr>
+          <a:xfrm>
+            <a:off x="9532338" y="5244129"/>
+            <a:ext cx="1309139" cy="375920"/>
+          </a:xfrm>
+          <a:prstGeom prst="rect">
+            <a:avLst/>
+          </a:prstGeom>
+          <a:noFill/>
+        </p:spPr>
+        <p:txBody>
+          <a:bodyPr wrap="square" anchor="t"/>
+          <a:lstStyle/>
           <a:p>
             <a:pPr algn="ctr" eaLnBrk="0">
               <a:lnSpc>
@@ -32080,49 +32932,7 @@
               </a:spcAft>
             </a:pPr>
             <a:r>
-              <a:rPr sz="1100" b="0">
-                <a:solidFill>
-                  <a:srgbClr val="556175"/>
-                </a:solidFill>
-                <a:latin typeface="맑은 고딕"/>
-                <a:ea typeface="맑은 고딕"/>
-                <a:cs typeface="맑은 고딕"/>
-              </a:rPr>
-              <a:t>기한 10분 · 비중단형</a:t>
-            </a:r>
-          </a:p>
-        </p:txBody>
-      </p:sp>
-      <p:sp>
-        <p:nvSpPr>
-          <p:cNvPr id="14" name="TextBox 13"/>
-          <p:cNvSpPr txBox="1"/>
-          <p:nvPr/>
-        </p:nvSpPr>
-        <p:spPr>
-          <a:xfrm>
-            <a:off x="7732271" y="2632214"/>
-            <a:ext cx="872759" cy="337185"/>
-          </a:xfrm>
-          <a:prstGeom prst="rect">
-            <a:avLst/>
-          </a:prstGeom>
-          <a:noFill/>
-        </p:spPr>
-        <p:txBody>
-          <a:bodyPr wrap="square" anchor="t"/>
-          <a:lstStyle/>
-          <a:p>
-            <a:pPr algn="ctr" eaLnBrk="0">
-              <a:lnSpc>
-                <a:spcPct val="110000"/>
-              </a:lnSpc>
-              <a:spcAft>
-                <a:spcPts val="100"/>
-              </a:spcAft>
-            </a:pPr>
-            <a:r>
-              <a:rPr sz="1350" b="1">
+              <a:rPr sz="1600" b="1">
                 <a:solidFill>
                   <a:srgbClr val="13294B"/>
                 </a:solidFill>
@@ -32130,133 +32940,7 @@
                 <a:ea typeface="맑은 고딕"/>
                 <a:cs typeface="맑은 고딕"/>
               </a:rPr>
-              <a:t>승인</a:t>
-            </a:r>
-          </a:p>
-        </p:txBody>
-      </p:sp>
-      <p:sp>
-        <p:nvSpPr>
-          <p:cNvPr id="15" name="TextBox 14"/>
-          <p:cNvSpPr txBox="1"/>
-          <p:nvPr/>
-        </p:nvSpPr>
-        <p:spPr>
-          <a:xfrm>
-            <a:off x="7077702" y="4227728"/>
-            <a:ext cx="654569" cy="337185"/>
-          </a:xfrm>
-          <a:prstGeom prst="rect">
-            <a:avLst/>
-          </a:prstGeom>
-          <a:noFill/>
-        </p:spPr>
-        <p:txBody>
-          <a:bodyPr wrap="square" anchor="t"/>
-          <a:lstStyle/>
-          <a:p>
-            <a:pPr algn="ctr" eaLnBrk="0">
-              <a:lnSpc>
-                <a:spcPct val="110000"/>
-              </a:lnSpc>
-              <a:spcAft>
-                <a:spcPts val="100"/>
-              </a:spcAft>
-            </a:pPr>
-            <a:r>
-              <a:rPr sz="1350" b="1">
-                <a:solidFill>
-                  <a:srgbClr val="13294B"/>
-                </a:solidFill>
-                <a:latin typeface="맑은 고딕"/>
-                <a:ea typeface="맑은 고딕"/>
-                <a:cs typeface="맑은 고딕"/>
-              </a:rPr>
-              <a:t>거절</a:t>
-            </a:r>
-          </a:p>
-        </p:txBody>
-      </p:sp>
-      <p:sp>
-        <p:nvSpPr>
-          <p:cNvPr id="16" name="TextBox 15"/>
-          <p:cNvSpPr txBox="1"/>
-          <p:nvPr/>
-        </p:nvSpPr>
-        <p:spPr>
-          <a:xfrm>
-            <a:off x="10405098" y="5598688"/>
-            <a:ext cx="1090949" cy="337185"/>
-          </a:xfrm>
-          <a:prstGeom prst="rect">
-            <a:avLst/>
-          </a:prstGeom>
-          <a:noFill/>
-        </p:spPr>
-        <p:txBody>
-          <a:bodyPr wrap="square" anchor="t"/>
-          <a:lstStyle/>
-          <a:p>
-            <a:pPr algn="ctr" eaLnBrk="0">
-              <a:lnSpc>
-                <a:spcPct val="110000"/>
-              </a:lnSpc>
-              <a:spcAft>
-                <a:spcPts val="100"/>
-              </a:spcAft>
-            </a:pPr>
-            <a:r>
-              <a:rPr sz="1350" b="1">
-                <a:solidFill>
-                  <a:srgbClr val="13294B"/>
-                </a:solidFill>
-                <a:latin typeface="맑은 고딕"/>
-                <a:ea typeface="맑은 고딕"/>
-                <a:cs typeface="맑은 고딕"/>
-              </a:rPr>
-              <a:t>거절 종결</a:t>
-            </a:r>
-          </a:p>
-        </p:txBody>
-      </p:sp>
-      <p:sp>
-        <p:nvSpPr>
-          <p:cNvPr id="17" name="TextBox 16"/>
-          <p:cNvSpPr txBox="1"/>
-          <p:nvPr/>
-        </p:nvSpPr>
-        <p:spPr>
-          <a:xfrm>
-            <a:off x="935656" y="5598688"/>
-            <a:ext cx="872759" cy="337185"/>
-          </a:xfrm>
-          <a:prstGeom prst="rect">
-            <a:avLst/>
-          </a:prstGeom>
-          <a:noFill/>
-        </p:spPr>
-        <p:txBody>
-          <a:bodyPr wrap="square" anchor="t"/>
-          <a:lstStyle/>
-          <a:p>
-            <a:pPr algn="ctr" eaLnBrk="0">
-              <a:lnSpc>
-                <a:spcPct val="110000"/>
-              </a:lnSpc>
-              <a:spcAft>
-                <a:spcPts val="100"/>
-              </a:spcAft>
-            </a:pPr>
-            <a:r>
-              <a:rPr sz="1350" b="1">
-                <a:solidFill>
-                  <a:srgbClr val="13294B"/>
-                </a:solidFill>
-                <a:latin typeface="맑은 고딕"/>
-                <a:ea typeface="맑은 고딕"/>
-                <a:cs typeface="맑은 고딕"/>
-              </a:rPr>
-              <a:t>알림</a:t>
+              <a:t>추가 작업</a:t>
             </a:r>
           </a:p>
         </p:txBody>
@@ -32620,7 +33304,7 @@
                 <a:ea typeface="맑은 고딕"/>
                 <a:cs typeface="맑은 고딕"/>
               </a:rPr>
-              <a:t>같은 그림 위의 세 가지 경로</a:t>
+              <a:t>승인을 받는 자리의 그림</a:t>
             </a:r>
           </a:p>
         </p:txBody>
@@ -32659,7 +33343,7 @@
                 <a:ea typeface="맑은 고딕"/>
                 <a:cs typeface="맑은 고딕"/>
               </a:rPr>
-              <a:t>같은 그림에서 승인하면 끝에, 거절하면 거절 종결에 닿고, 응답이 없으면 알림 가지만 먼저 끝난다.</a:t>
+              <a:t>승인 작업에는 승인과 거절을 가르는 게이트웨이와, 응답이 늦을 때 알림 가지를 여는 비중단형 타이머가 함께 붙는다.</a:t>
             </a:r>
           </a:p>
         </p:txBody>
@@ -32732,71 +33416,9 @@
           </a:p>
         </p:txBody>
       </p:sp>
-      <p:sp>
-        <p:nvSpPr>
-          <p:cNvPr id="6" name="Rounded Rectangle 5"/>
-          <p:cNvSpPr/>
-          <p:nvPr/>
-        </p:nvSpPr>
-        <p:spPr>
-          <a:xfrm>
-            <a:off x="548640" y="2123439"/>
-            <a:ext cx="3515258" cy="3735832"/>
-          </a:xfrm>
-          <a:prstGeom prst="roundRect">
-            <a:avLst>
-              <a:gd name="adj" fmla="val 4000"/>
-            </a:avLst>
-          </a:prstGeom>
-          <a:solidFill>
-            <a:srgbClr val="FFFFFF"/>
-          </a:solidFill>
-          <a:ln w="15875">
-            <a:solidFill>
-              <a:srgbClr val="D3D9E1"/>
-            </a:solidFill>
-          </a:ln>
-        </p:spPr>
-        <p:txBody>
-          <a:bodyPr rtlCol="0" anchor="ctr"/>
-          <a:lstStyle/>
-          <a:p>
-            <a:pPr algn="ctr"/>
-          </a:p>
-        </p:txBody>
-      </p:sp>
-      <p:sp>
-        <p:nvSpPr>
-          <p:cNvPr id="7" name="Oval 6"/>
-          <p:cNvSpPr/>
-          <p:nvPr/>
-        </p:nvSpPr>
-        <p:spPr>
-          <a:xfrm>
-            <a:off x="777240" y="2324608"/>
-            <a:ext cx="731520" cy="731520"/>
-          </a:xfrm>
-          <a:prstGeom prst="ellipse">
-            <a:avLst/>
-          </a:prstGeom>
-          <a:solidFill>
-            <a:srgbClr val="E7F3FD"/>
-          </a:solidFill>
-          <a:ln>
-            <a:noFill/>
-          </a:ln>
-        </p:spPr>
-        <p:txBody>
-          <a:bodyPr rtlCol="0" anchor="ctr"/>
-          <a:lstStyle/>
-          <a:p>
-            <a:pPr algn="ctr"/>
-          </a:p>
-        </p:txBody>
-      </p:sp>
       <p:pic>
         <p:nvPicPr>
-          <p:cNvPr id="8" name="아이콘:circle-check" descr="circle-check_13294B_1.6.png"/>
+          <p:cNvPr id="6" name="삽화:승인자리.svg" descr="illust_4760373882725781346_1792123197.png"/>
           <p:cNvPicPr>
             <a:picLocks noChangeAspect="1"/>
           </p:cNvPicPr>
@@ -32810,8 +33432,8 @@
         </p:blipFill>
         <p:spPr>
           <a:xfrm>
-            <a:off x="930859" y="2478227"/>
-            <a:ext cx="424281" cy="424281"/>
+            <a:off x="641100" y="1627632"/>
+            <a:ext cx="10909495" cy="4727448"/>
           </a:xfrm>
           <a:prstGeom prst="rect">
             <a:avLst/>
@@ -32820,14 +33442,98 @@
       </p:pic>
       <p:sp>
         <p:nvSpPr>
+          <p:cNvPr id="7" name="TextBox 6"/>
+          <p:cNvSpPr txBox="1"/>
+          <p:nvPr/>
+        </p:nvSpPr>
+        <p:spPr>
+          <a:xfrm>
+            <a:off x="1153846" y="2714945"/>
+            <a:ext cx="1527329" cy="546353"/>
+          </a:xfrm>
+          <a:prstGeom prst="rect">
+            <a:avLst/>
+          </a:prstGeom>
+          <a:noFill/>
+        </p:spPr>
+        <p:txBody>
+          <a:bodyPr wrap="square" anchor="t"/>
+          <a:lstStyle/>
+          <a:p>
+            <a:pPr algn="ctr" eaLnBrk="0">
+              <a:lnSpc>
+                <a:spcPct val="110000"/>
+              </a:lnSpc>
+              <a:spcAft>
+                <a:spcPts val="100"/>
+              </a:spcAft>
+            </a:pPr>
+            <a:r>
+              <a:rPr sz="1350" b="1">
+                <a:solidFill>
+                  <a:srgbClr val="13294B"/>
+                </a:solidFill>
+                <a:latin typeface="맑은 고딕"/>
+                <a:ea typeface="맑은 고딕"/>
+                <a:cs typeface="맑은 고딕"/>
+              </a:rPr>
+              <a:t>원인 진단 · 냉각 조치 제안</a:t>
+            </a:r>
+          </a:p>
+        </p:txBody>
+      </p:sp>
+      <p:sp>
+        <p:nvSpPr>
+          <p:cNvPr id="8" name="TextBox 7"/>
+          <p:cNvSpPr txBox="1"/>
+          <p:nvPr/>
+        </p:nvSpPr>
+        <p:spPr>
+          <a:xfrm>
+            <a:off x="3968496" y="2809494"/>
+            <a:ext cx="1418234" cy="337185"/>
+          </a:xfrm>
+          <a:prstGeom prst="rect">
+            <a:avLst/>
+          </a:prstGeom>
+          <a:noFill/>
+        </p:spPr>
+        <p:txBody>
+          <a:bodyPr wrap="square" anchor="t"/>
+          <a:lstStyle/>
+          <a:p>
+            <a:pPr algn="ctr" eaLnBrk="0">
+              <a:lnSpc>
+                <a:spcPct val="110000"/>
+              </a:lnSpc>
+              <a:spcAft>
+                <a:spcPts val="100"/>
+              </a:spcAft>
+            </a:pPr>
+            <a:r>
+              <a:rPr sz="1350" b="1">
+                <a:solidFill>
+                  <a:srgbClr val="1A6FC4"/>
+                </a:solidFill>
+                <a:latin typeface="맑은 고딕"/>
+                <a:ea typeface="맑은 고딕"/>
+                <a:cs typeface="맑은 고딕"/>
+              </a:rPr>
+              <a:t>운전원 승인</a:t>
+            </a:r>
+          </a:p>
+        </p:txBody>
+      </p:sp>
+      <p:sp>
+        <p:nvSpPr>
           <p:cNvPr id="9" name="TextBox 8"/>
           <p:cNvSpPr txBox="1"/>
           <p:nvPr/>
         </p:nvSpPr>
         <p:spPr>
           <a:xfrm>
-            <a:off x="713232" y="3147568"/>
-            <a:ext cx="3186074" cy="2208784"/>
+            <a:off x="6455860" y="2135832"/>
+            <a:ext cx="1090949" cy="337185"/>
           </a:xfrm>
           <a:prstGeom prst="rect">
             <a:avLst/>
@@ -32838,16 +33544,16 @@
           <a:bodyPr wrap="square" anchor="t"/>
           <a:lstStyle/>
           <a:p>
-            <a:pPr algn="l" eaLnBrk="0">
+            <a:pPr algn="ctr" eaLnBrk="0">
               <a:lnSpc>
                 <a:spcPct val="110000"/>
               </a:lnSpc>
               <a:spcAft>
-                <a:spcPts val="400"/>
+                <a:spcPts val="100"/>
               </a:spcAft>
             </a:pPr>
             <a:r>
-              <a:rPr sz="2000" b="1">
+              <a:rPr sz="1350" b="1">
                 <a:solidFill>
                   <a:srgbClr val="13294B"/>
                 </a:solidFill>
@@ -32855,612 +33561,356 @@
                 <a:ea typeface="맑은 고딕"/>
                 <a:cs typeface="맑은 고딕"/>
               </a:rPr>
+              <a:t>승인?</a:t>
+            </a:r>
+          </a:p>
+        </p:txBody>
+      </p:sp>
+      <p:sp>
+        <p:nvSpPr>
+          <p:cNvPr id="10" name="TextBox 9"/>
+          <p:cNvSpPr txBox="1"/>
+          <p:nvPr/>
+        </p:nvSpPr>
+        <p:spPr>
+          <a:xfrm>
+            <a:off x="9150506" y="2809494"/>
+            <a:ext cx="1418234" cy="337185"/>
+          </a:xfrm>
+          <a:prstGeom prst="rect">
+            <a:avLst/>
+          </a:prstGeom>
+          <a:noFill/>
+        </p:spPr>
+        <p:txBody>
+          <a:bodyPr wrap="square" anchor="t"/>
+          <a:lstStyle/>
+          <a:p>
+            <a:pPr algn="ctr" eaLnBrk="0">
+              <a:lnSpc>
+                <a:spcPct val="110000"/>
+              </a:lnSpc>
+              <a:spcAft>
+                <a:spcPts val="100"/>
+              </a:spcAft>
+            </a:pPr>
+            <a:r>
+              <a:rPr sz="1350" b="1">
+                <a:solidFill>
+                  <a:srgbClr val="13294B"/>
+                </a:solidFill>
+                <a:latin typeface="맑은 고딕"/>
+                <a:ea typeface="맑은 고딕"/>
+                <a:cs typeface="맑은 고딕"/>
+              </a:rPr>
+              <a:t>냉각 명령</a:t>
+            </a:r>
+          </a:p>
+        </p:txBody>
+      </p:sp>
+      <p:sp>
+        <p:nvSpPr>
+          <p:cNvPr id="11" name="TextBox 10"/>
+          <p:cNvSpPr txBox="1"/>
+          <p:nvPr/>
+        </p:nvSpPr>
+        <p:spPr>
+          <a:xfrm>
+            <a:off x="8114104" y="5102306"/>
+            <a:ext cx="1527329" cy="337185"/>
+          </a:xfrm>
+          <a:prstGeom prst="rect">
+            <a:avLst/>
+          </a:prstGeom>
+          <a:noFill/>
+        </p:spPr>
+        <p:txBody>
+          <a:bodyPr wrap="square" anchor="t"/>
+          <a:lstStyle/>
+          <a:p>
+            <a:pPr algn="ctr" eaLnBrk="0">
+              <a:lnSpc>
+                <a:spcPct val="110000"/>
+              </a:lnSpc>
+              <a:spcAft>
+                <a:spcPts val="100"/>
+              </a:spcAft>
+            </a:pPr>
+            <a:r>
+              <a:rPr sz="1350" b="1">
+                <a:solidFill>
+                  <a:srgbClr val="13294B"/>
+                </a:solidFill>
+                <a:latin typeface="맑은 고딕"/>
+                <a:ea typeface="맑은 고딕"/>
+                <a:cs typeface="맑은 고딕"/>
+              </a:rPr>
+              <a:t>결과 보고: 거절</a:t>
+            </a:r>
+          </a:p>
+        </p:txBody>
+      </p:sp>
+      <p:sp>
+        <p:nvSpPr>
+          <p:cNvPr id="12" name="TextBox 11"/>
+          <p:cNvSpPr txBox="1"/>
+          <p:nvPr/>
+        </p:nvSpPr>
+        <p:spPr>
+          <a:xfrm>
+            <a:off x="2659356" y="5102306"/>
+            <a:ext cx="1527329" cy="337185"/>
+          </a:xfrm>
+          <a:prstGeom prst="rect">
+            <a:avLst/>
+          </a:prstGeom>
+          <a:noFill/>
+        </p:spPr>
+        <p:txBody>
+          <a:bodyPr wrap="square" anchor="t"/>
+          <a:lstStyle/>
+          <a:p>
+            <a:pPr algn="ctr" eaLnBrk="0">
+              <a:lnSpc>
+                <a:spcPct val="110000"/>
+              </a:lnSpc>
+              <a:spcAft>
+                <a:spcPts val="100"/>
+              </a:spcAft>
+            </a:pPr>
+            <a:r>
+              <a:rPr sz="1350" b="1">
+                <a:solidFill>
+                  <a:srgbClr val="13294B"/>
+                </a:solidFill>
+                <a:latin typeface="맑은 고딕"/>
+                <a:ea typeface="맑은 고딕"/>
+                <a:cs typeface="맑은 고딕"/>
+              </a:rPr>
+              <a:t>승인 지연 알림</a:t>
+            </a:r>
+          </a:p>
+        </p:txBody>
+      </p:sp>
+      <p:sp>
+        <p:nvSpPr>
+          <p:cNvPr id="13" name="TextBox 12"/>
+          <p:cNvSpPr txBox="1"/>
+          <p:nvPr/>
+        </p:nvSpPr>
+        <p:spPr>
+          <a:xfrm>
+            <a:off x="5441277" y="3754983"/>
+            <a:ext cx="1418234" cy="507618"/>
+          </a:xfrm>
+          <a:prstGeom prst="rect">
+            <a:avLst/>
+          </a:prstGeom>
+          <a:noFill/>
+        </p:spPr>
+        <p:txBody>
+          <a:bodyPr wrap="square" anchor="t"/>
+          <a:lstStyle/>
+          <a:p>
+            <a:pPr algn="ctr" eaLnBrk="0">
+              <a:lnSpc>
+                <a:spcPct val="110000"/>
+              </a:lnSpc>
+              <a:spcAft>
+                <a:spcPts val="100"/>
+              </a:spcAft>
+            </a:pPr>
+            <a:r>
+              <a:rPr sz="1350" b="1">
+                <a:solidFill>
+                  <a:srgbClr val="1A6FC4"/>
+                </a:solidFill>
+                <a:latin typeface="맑은 고딕"/>
+                <a:ea typeface="맑은 고딕"/>
+                <a:cs typeface="맑은 고딕"/>
+              </a:rPr>
+              <a:t>승인 지연</a:t>
+            </a:r>
+          </a:p>
+          <a:p>
+            <a:pPr algn="ctr" eaLnBrk="0">
+              <a:lnSpc>
+                <a:spcPct val="110000"/>
+              </a:lnSpc>
+              <a:spcAft>
+                <a:spcPts val="100"/>
+              </a:spcAft>
+            </a:pPr>
+            <a:r>
+              <a:rPr sz="1100" b="0">
+                <a:solidFill>
+                  <a:srgbClr val="556175"/>
+                </a:solidFill>
+                <a:latin typeface="맑은 고딕"/>
+                <a:ea typeface="맑은 고딕"/>
+                <a:cs typeface="맑은 고딕"/>
+              </a:rPr>
+              <a:t>비중단형 · PT10M</a:t>
+            </a:r>
+          </a:p>
+        </p:txBody>
+      </p:sp>
+      <p:sp>
+        <p:nvSpPr>
+          <p:cNvPr id="14" name="TextBox 13"/>
+          <p:cNvSpPr txBox="1"/>
+          <p:nvPr/>
+        </p:nvSpPr>
+        <p:spPr>
+          <a:xfrm>
+            <a:off x="7732271" y="2632214"/>
+            <a:ext cx="872759" cy="337185"/>
+          </a:xfrm>
+          <a:prstGeom prst="rect">
+            <a:avLst/>
+          </a:prstGeom>
+          <a:noFill/>
+        </p:spPr>
+        <p:txBody>
+          <a:bodyPr wrap="square" anchor="t"/>
+          <a:lstStyle/>
+          <a:p>
+            <a:pPr algn="ctr" eaLnBrk="0">
+              <a:lnSpc>
+                <a:spcPct val="110000"/>
+              </a:lnSpc>
+              <a:spcAft>
+                <a:spcPts val="100"/>
+              </a:spcAft>
+            </a:pPr>
+            <a:r>
+              <a:rPr sz="1350" b="1">
+                <a:solidFill>
+                  <a:srgbClr val="13294B"/>
+                </a:solidFill>
+                <a:latin typeface="맑은 고딕"/>
+                <a:ea typeface="맑은 고딕"/>
+                <a:cs typeface="맑은 고딕"/>
+              </a:rPr>
               <a:t>승인</a:t>
             </a:r>
           </a:p>
-          <a:p>
-            <a:pPr algn="l" eaLnBrk="0" marL="182880" indent="-182880">
+        </p:txBody>
+      </p:sp>
+      <p:sp>
+        <p:nvSpPr>
+          <p:cNvPr id="15" name="TextBox 14"/>
+          <p:cNvSpPr txBox="1"/>
+          <p:nvPr/>
+        </p:nvSpPr>
+        <p:spPr>
+          <a:xfrm>
+            <a:off x="7077702" y="4227728"/>
+            <a:ext cx="654569" cy="337185"/>
+          </a:xfrm>
+          <a:prstGeom prst="rect">
+            <a:avLst/>
+          </a:prstGeom>
+          <a:noFill/>
+        </p:spPr>
+        <p:txBody>
+          <a:bodyPr wrap="square" anchor="t"/>
+          <a:lstStyle/>
+          <a:p>
+            <a:pPr algn="ctr" eaLnBrk="0">
               <a:lnSpc>
                 <a:spcPct val="110000"/>
               </a:lnSpc>
               <a:spcAft>
-                <a:spcPts val="400"/>
+                <a:spcPts val="100"/>
               </a:spcAft>
             </a:pPr>
             <a:r>
-              <a:rPr sz="1600" b="0">
-                <a:solidFill>
-                  <a:srgbClr val="1F2A3A"/>
-                </a:solidFill>
-                <a:latin typeface="맑은 고딕"/>
-                <a:ea typeface="맑은 고딕"/>
-                <a:cs typeface="맑은 고딕"/>
-              </a:rPr>
-              <a:t>• 승인? 게이트웨이에서 냉각 명령으로 간다</a:t>
-            </a:r>
-          </a:p>
-          <a:p>
-            <a:pPr algn="l" eaLnBrk="0" marL="182880" indent="-182880">
+              <a:rPr sz="1350" b="1">
+                <a:solidFill>
+                  <a:srgbClr val="13294B"/>
+                </a:solidFill>
+                <a:latin typeface="맑은 고딕"/>
+                <a:ea typeface="맑은 고딕"/>
+                <a:cs typeface="맑은 고딕"/>
+              </a:rPr>
+              <a:t>거절</a:t>
+            </a:r>
+          </a:p>
+        </p:txBody>
+      </p:sp>
+      <p:sp>
+        <p:nvSpPr>
+          <p:cNvPr id="16" name="TextBox 15"/>
+          <p:cNvSpPr txBox="1"/>
+          <p:nvPr/>
+        </p:nvSpPr>
+        <p:spPr>
+          <a:xfrm>
+            <a:off x="10405098" y="5598688"/>
+            <a:ext cx="1090949" cy="337185"/>
+          </a:xfrm>
+          <a:prstGeom prst="rect">
+            <a:avLst/>
+          </a:prstGeom>
+          <a:noFill/>
+        </p:spPr>
+        <p:txBody>
+          <a:bodyPr wrap="square" anchor="t"/>
+          <a:lstStyle/>
+          <a:p>
+            <a:pPr algn="ctr" eaLnBrk="0">
               <a:lnSpc>
                 <a:spcPct val="110000"/>
               </a:lnSpc>
               <a:spcAft>
-                <a:spcPts val="400"/>
+                <a:spcPts val="100"/>
               </a:spcAft>
             </a:pPr>
             <a:r>
-              <a:rPr sz="1600" b="0">
-                <a:solidFill>
-                  <a:srgbClr val="1F2A3A"/>
-                </a:solidFill>
-                <a:latin typeface="맑은 고딕"/>
-                <a:ea typeface="맑은 고딕"/>
-                <a:cs typeface="맑은 고딕"/>
-              </a:rPr>
-              <a:t>• 재관측과 유온 정상? 게이트웨이를 지난다</a:t>
-            </a:r>
-          </a:p>
-          <a:p>
-            <a:pPr algn="l" eaLnBrk="0" marL="182880" indent="-182880">
+              <a:rPr sz="1350" b="1">
+                <a:solidFill>
+                  <a:srgbClr val="13294B"/>
+                </a:solidFill>
+                <a:latin typeface="맑은 고딕"/>
+                <a:ea typeface="맑은 고딕"/>
+                <a:cs typeface="맑은 고딕"/>
+              </a:rPr>
+              <a:t>거절 종결</a:t>
+            </a:r>
+          </a:p>
+        </p:txBody>
+      </p:sp>
+      <p:sp>
+        <p:nvSpPr>
+          <p:cNvPr id="17" name="TextBox 16"/>
+          <p:cNvSpPr txBox="1"/>
+          <p:nvPr/>
+        </p:nvSpPr>
+        <p:spPr>
+          <a:xfrm>
+            <a:off x="935656" y="5598688"/>
+            <a:ext cx="872759" cy="337185"/>
+          </a:xfrm>
+          <a:prstGeom prst="rect">
+            <a:avLst/>
+          </a:prstGeom>
+          <a:noFill/>
+        </p:spPr>
+        <p:txBody>
+          <a:bodyPr wrap="square" anchor="t"/>
+          <a:lstStyle/>
+          <a:p>
+            <a:pPr algn="ctr" eaLnBrk="0">
               <a:lnSpc>
                 <a:spcPct val="110000"/>
               </a:lnSpc>
               <a:spcAft>
-                <a:spcPts val="400"/>
+                <a:spcPts val="100"/>
               </a:spcAft>
             </a:pPr>
             <a:r>
-              <a:rPr sz="1600" b="0">
-                <a:solidFill>
-                  <a:srgbClr val="1F2A3A"/>
-                </a:solidFill>
-                <a:latin typeface="맑은 고딕"/>
-                <a:ea typeface="맑은 고딕"/>
-                <a:cs typeface="맑은 고딕"/>
-              </a:rPr>
-              <a:t>• 작업지시 등록, 결과 보고: 정상을 거친다</a:t>
-            </a:r>
-          </a:p>
-        </p:txBody>
-      </p:sp>
-      <p:sp>
-        <p:nvSpPr>
-          <p:cNvPr id="10" name="Rounded Rectangle 9"/>
-          <p:cNvSpPr/>
-          <p:nvPr/>
-        </p:nvSpPr>
-        <p:spPr>
-          <a:xfrm>
-            <a:off x="777240" y="5429504"/>
-            <a:ext cx="822960" cy="292608"/>
-          </a:xfrm>
-          <a:prstGeom prst="roundRect">
-            <a:avLst>
-              <a:gd name="adj" fmla="val 50000"/>
-            </a:avLst>
-          </a:prstGeom>
-          <a:solidFill>
-            <a:srgbClr val="D3D9E1"/>
-          </a:solidFill>
-          <a:ln>
-            <a:noFill/>
-          </a:ln>
-        </p:spPr>
-        <p:txBody>
-          <a:bodyPr rtlCol="0" anchor="ctr"/>
-          <a:lstStyle/>
-          <a:p>
-            <a:pPr algn="ctr"/>
-          </a:p>
-        </p:txBody>
-      </p:sp>
-      <p:sp>
-        <p:nvSpPr>
-          <p:cNvPr id="11" name="TextBox 10"/>
-          <p:cNvSpPr txBox="1"/>
-          <p:nvPr/>
-        </p:nvSpPr>
-        <p:spPr>
-          <a:xfrm>
-            <a:off x="777240" y="5429504"/>
-            <a:ext cx="822960" cy="292608"/>
-          </a:xfrm>
-          <a:prstGeom prst="rect">
-            <a:avLst/>
-          </a:prstGeom>
-          <a:noFill/>
-        </p:spPr>
-        <p:txBody>
-          <a:bodyPr wrap="square" anchor="ctr"/>
-          <a:lstStyle/>
-          <a:p>
-            <a:pPr algn="ctr" eaLnBrk="0">
-              <a:lnSpc>
-                <a:spcPct val="110000"/>
-              </a:lnSpc>
-            </a:pPr>
-            <a:r>
-              <a:rPr sz="1200" b="1">
-                <a:solidFill>
-                  <a:srgbClr val="13294B"/>
-                </a:solidFill>
-                <a:latin typeface="맑은 고딕"/>
-                <a:ea typeface="맑은 고딕"/>
-                <a:cs typeface="맑은 고딕"/>
-              </a:rPr>
-              <a:t>끝</a:t>
-            </a:r>
-          </a:p>
-        </p:txBody>
-      </p:sp>
-      <p:sp>
-        <p:nvSpPr>
-          <p:cNvPr id="12" name="Rounded Rectangle 11"/>
-          <p:cNvSpPr/>
-          <p:nvPr/>
-        </p:nvSpPr>
-        <p:spPr>
-          <a:xfrm>
-            <a:off x="4338218" y="2123439"/>
-            <a:ext cx="3515258" cy="3735832"/>
-          </a:xfrm>
-          <a:prstGeom prst="roundRect">
-            <a:avLst>
-              <a:gd name="adj" fmla="val 4000"/>
-            </a:avLst>
-          </a:prstGeom>
-          <a:solidFill>
-            <a:srgbClr val="FFFFFF"/>
-          </a:solidFill>
-          <a:ln w="15875">
-            <a:solidFill>
-              <a:srgbClr val="D3D9E1"/>
-            </a:solidFill>
-          </a:ln>
-        </p:spPr>
-        <p:txBody>
-          <a:bodyPr rtlCol="0" anchor="ctr"/>
-          <a:lstStyle/>
-          <a:p>
-            <a:pPr algn="ctr"/>
-          </a:p>
-        </p:txBody>
-      </p:sp>
-      <p:sp>
-        <p:nvSpPr>
-          <p:cNvPr id="13" name="Oval 12"/>
-          <p:cNvSpPr/>
-          <p:nvPr/>
-        </p:nvSpPr>
-        <p:spPr>
-          <a:xfrm>
-            <a:off x="4566818" y="2324608"/>
-            <a:ext cx="731520" cy="731520"/>
-          </a:xfrm>
-          <a:prstGeom prst="ellipse">
-            <a:avLst/>
-          </a:prstGeom>
-          <a:solidFill>
-            <a:srgbClr val="E7F3FD"/>
-          </a:solidFill>
-          <a:ln>
-            <a:noFill/>
-          </a:ln>
-        </p:spPr>
-        <p:txBody>
-          <a:bodyPr rtlCol="0" anchor="ctr"/>
-          <a:lstStyle/>
-          <a:p>
-            <a:pPr algn="ctr"/>
-          </a:p>
-        </p:txBody>
-      </p:sp>
-      <p:pic>
-        <p:nvPicPr>
-          <p:cNvPr id="14" name="아이콘:ban" descr="ban_13294B_1.6.png"/>
-          <p:cNvPicPr>
-            <a:picLocks noChangeAspect="1"/>
-          </p:cNvPicPr>
-          <p:nvPr/>
-        </p:nvPicPr>
-        <p:blipFill>
-          <a:blip r:embed="rId4"/>
-          <a:stretch>
-            <a:fillRect/>
-          </a:stretch>
-        </p:blipFill>
-        <p:spPr>
-          <a:xfrm>
-            <a:off x="4720437" y="2478227"/>
-            <a:ext cx="424281" cy="424281"/>
-          </a:xfrm>
-          <a:prstGeom prst="rect">
-            <a:avLst/>
-          </a:prstGeom>
-        </p:spPr>
-      </p:pic>
-      <p:sp>
-        <p:nvSpPr>
-          <p:cNvPr id="15" name="TextBox 14"/>
-          <p:cNvSpPr txBox="1"/>
-          <p:nvPr/>
-        </p:nvSpPr>
-        <p:spPr>
-          <a:xfrm>
-            <a:off x="4502810" y="3147568"/>
-            <a:ext cx="3186074" cy="2208784"/>
-          </a:xfrm>
-          <a:prstGeom prst="rect">
-            <a:avLst/>
-          </a:prstGeom>
-          <a:noFill/>
-        </p:spPr>
-        <p:txBody>
-          <a:bodyPr wrap="square" anchor="t"/>
-          <a:lstStyle/>
-          <a:p>
-            <a:pPr algn="l" eaLnBrk="0">
-              <a:lnSpc>
-                <a:spcPct val="110000"/>
-              </a:lnSpc>
-              <a:spcAft>
-                <a:spcPts val="400"/>
-              </a:spcAft>
-            </a:pPr>
-            <a:r>
-              <a:rPr sz="2000" b="1">
-                <a:solidFill>
-                  <a:srgbClr val="13294B"/>
-                </a:solidFill>
-                <a:latin typeface="맑은 고딕"/>
-                <a:ea typeface="맑은 고딕"/>
-                <a:cs typeface="맑은 고딕"/>
-              </a:rPr>
-              <a:t>거절</a:t>
-            </a:r>
-          </a:p>
-          <a:p>
-            <a:pPr algn="l" eaLnBrk="0" marL="182880" indent="-182880">
-              <a:lnSpc>
-                <a:spcPct val="110000"/>
-              </a:lnSpc>
-              <a:spcAft>
-                <a:spcPts val="400"/>
-              </a:spcAft>
-            </a:pPr>
-            <a:r>
-              <a:rPr sz="1600" b="0">
-                <a:solidFill>
-                  <a:srgbClr val="1F2A3A"/>
-                </a:solidFill>
-                <a:latin typeface="맑은 고딕"/>
-                <a:ea typeface="맑은 고딕"/>
-                <a:cs typeface="맑은 고딕"/>
-              </a:rPr>
-              <a:t>• 승인? 게이트웨이에서 결과 보고: 거절로 간다</a:t>
-            </a:r>
-          </a:p>
-          <a:p>
-            <a:pPr algn="l" eaLnBrk="0" marL="182880" indent="-182880">
-              <a:lnSpc>
-                <a:spcPct val="110000"/>
-              </a:lnSpc>
-              <a:spcAft>
-                <a:spcPts val="400"/>
-              </a:spcAft>
-            </a:pPr>
-            <a:r>
-              <a:rPr sz="1600" b="0">
-                <a:solidFill>
-                  <a:srgbClr val="1F2A3A"/>
-                </a:solidFill>
-                <a:latin typeface="맑은 고딕"/>
-                <a:ea typeface="맑은 고딕"/>
-                <a:cs typeface="맑은 고딕"/>
-              </a:rPr>
-              <a:t>• 냉각 명령으로 가는 선은 지나지 않는다</a:t>
-            </a:r>
-          </a:p>
-        </p:txBody>
-      </p:sp>
-      <p:sp>
-        <p:nvSpPr>
-          <p:cNvPr id="16" name="Rounded Rectangle 15"/>
-          <p:cNvSpPr/>
-          <p:nvPr/>
-        </p:nvSpPr>
-        <p:spPr>
-          <a:xfrm>
-            <a:off x="4566818" y="5429504"/>
-            <a:ext cx="1021080" cy="292608"/>
-          </a:xfrm>
-          <a:prstGeom prst="roundRect">
-            <a:avLst>
-              <a:gd name="adj" fmla="val 50000"/>
-            </a:avLst>
-          </a:prstGeom>
-          <a:solidFill>
-            <a:srgbClr val="D3D9E1"/>
-          </a:solidFill>
-          <a:ln>
-            <a:noFill/>
-          </a:ln>
-        </p:spPr>
-        <p:txBody>
-          <a:bodyPr rtlCol="0" anchor="ctr"/>
-          <a:lstStyle/>
-          <a:p>
-            <a:pPr algn="ctr"/>
-          </a:p>
-        </p:txBody>
-      </p:sp>
-      <p:sp>
-        <p:nvSpPr>
-          <p:cNvPr id="17" name="TextBox 16"/>
-          <p:cNvSpPr txBox="1"/>
-          <p:nvPr/>
-        </p:nvSpPr>
-        <p:spPr>
-          <a:xfrm>
-            <a:off x="4566818" y="5429504"/>
-            <a:ext cx="1021080" cy="292608"/>
-          </a:xfrm>
-          <a:prstGeom prst="rect">
-            <a:avLst/>
-          </a:prstGeom>
-          <a:noFill/>
-        </p:spPr>
-        <p:txBody>
-          <a:bodyPr wrap="square" anchor="ctr"/>
-          <a:lstStyle/>
-          <a:p>
-            <a:pPr algn="ctr" eaLnBrk="0">
-              <a:lnSpc>
-                <a:spcPct val="110000"/>
-              </a:lnSpc>
-            </a:pPr>
-            <a:r>
-              <a:rPr sz="1200" b="1">
-                <a:solidFill>
-                  <a:srgbClr val="13294B"/>
-                </a:solidFill>
-                <a:latin typeface="맑은 고딕"/>
-                <a:ea typeface="맑은 고딕"/>
-                <a:cs typeface="맑은 고딕"/>
-              </a:rPr>
-              <a:t>거절 종결</a:t>
-            </a:r>
-          </a:p>
-        </p:txBody>
-      </p:sp>
-      <p:sp>
-        <p:nvSpPr>
-          <p:cNvPr id="18" name="Rounded Rectangle 17"/>
-          <p:cNvSpPr/>
-          <p:nvPr/>
-        </p:nvSpPr>
-        <p:spPr>
-          <a:xfrm>
-            <a:off x="8127796" y="2123439"/>
-            <a:ext cx="3515258" cy="3735832"/>
-          </a:xfrm>
-          <a:prstGeom prst="roundRect">
-            <a:avLst>
-              <a:gd name="adj" fmla="val 4000"/>
-            </a:avLst>
-          </a:prstGeom>
-          <a:solidFill>
-            <a:srgbClr val="FFFFFF"/>
-          </a:solidFill>
-          <a:ln w="28575">
-            <a:solidFill>
-              <a:srgbClr val="5CB8F2"/>
-            </a:solidFill>
-          </a:ln>
-        </p:spPr>
-        <p:txBody>
-          <a:bodyPr rtlCol="0" anchor="ctr"/>
-          <a:lstStyle/>
-          <a:p>
-            <a:pPr algn="ctr"/>
-          </a:p>
-        </p:txBody>
-      </p:sp>
-      <p:sp>
-        <p:nvSpPr>
-          <p:cNvPr id="19" name="Oval 18"/>
-          <p:cNvSpPr/>
-          <p:nvPr/>
-        </p:nvSpPr>
-        <p:spPr>
-          <a:xfrm>
-            <a:off x="8356396" y="2324608"/>
-            <a:ext cx="731520" cy="731520"/>
-          </a:xfrm>
-          <a:prstGeom prst="ellipse">
-            <a:avLst/>
-          </a:prstGeom>
-          <a:solidFill>
-            <a:srgbClr val="5CB8F2"/>
-          </a:solidFill>
-          <a:ln>
-            <a:noFill/>
-          </a:ln>
-        </p:spPr>
-        <p:txBody>
-          <a:bodyPr rtlCol="0" anchor="ctr"/>
-          <a:lstStyle/>
-          <a:p>
-            <a:pPr algn="ctr"/>
-          </a:p>
-        </p:txBody>
-      </p:sp>
-      <p:pic>
-        <p:nvPicPr>
-          <p:cNvPr id="20" name="아이콘:hourglass" descr="hourglass_13294B_1.6.png"/>
-          <p:cNvPicPr>
-            <a:picLocks noChangeAspect="1"/>
-          </p:cNvPicPr>
-          <p:nvPr/>
-        </p:nvPicPr>
-        <p:blipFill>
-          <a:blip r:embed="rId5"/>
-          <a:stretch>
-            <a:fillRect/>
-          </a:stretch>
-        </p:blipFill>
-        <p:spPr>
-          <a:xfrm>
-            <a:off x="8510016" y="2478227"/>
-            <a:ext cx="424281" cy="424281"/>
-          </a:xfrm>
-          <a:prstGeom prst="rect">
-            <a:avLst/>
-          </a:prstGeom>
-        </p:spPr>
-      </p:pic>
-      <p:sp>
-        <p:nvSpPr>
-          <p:cNvPr id="21" name="TextBox 20"/>
-          <p:cNvSpPr txBox="1"/>
-          <p:nvPr/>
-        </p:nvSpPr>
-        <p:spPr>
-          <a:xfrm>
-            <a:off x="8292388" y="3147568"/>
-            <a:ext cx="3186074" cy="2208784"/>
-          </a:xfrm>
-          <a:prstGeom prst="rect">
-            <a:avLst/>
-          </a:prstGeom>
-          <a:noFill/>
-        </p:spPr>
-        <p:txBody>
-          <a:bodyPr wrap="square" anchor="t"/>
-          <a:lstStyle/>
-          <a:p>
-            <a:pPr algn="l" eaLnBrk="0">
-              <a:lnSpc>
-                <a:spcPct val="110000"/>
-              </a:lnSpc>
-              <a:spcAft>
-                <a:spcPts val="400"/>
-              </a:spcAft>
-            </a:pPr>
-            <a:r>
-              <a:rPr sz="2000" b="1">
-                <a:solidFill>
-                  <a:srgbClr val="13294B"/>
-                </a:solidFill>
-                <a:latin typeface="맑은 고딕"/>
-                <a:ea typeface="맑은 고딕"/>
-                <a:cs typeface="맑은 고딕"/>
-              </a:rPr>
-              <a:t>응답 없음</a:t>
-            </a:r>
-          </a:p>
-          <a:p>
-            <a:pPr algn="l" eaLnBrk="0" marL="182880" indent="-182880">
-              <a:lnSpc>
-                <a:spcPct val="110000"/>
-              </a:lnSpc>
-              <a:spcAft>
-                <a:spcPts val="400"/>
-              </a:spcAft>
-            </a:pPr>
-            <a:r>
-              <a:rPr sz="1600" b="0">
-                <a:solidFill>
-                  <a:srgbClr val="1F2A3A"/>
-                </a:solidFill>
-                <a:latin typeface="맑은 고딕"/>
-                <a:ea typeface="맑은 고딕"/>
-                <a:cs typeface="맑은 고딕"/>
-              </a:rPr>
-              <a:t>• 승인 지연 타이머가 승인 지연 알림을 연다</a:t>
-            </a:r>
-          </a:p>
-          <a:p>
-            <a:pPr algn="l" eaLnBrk="0" marL="182880" indent="-182880">
-              <a:lnSpc>
-                <a:spcPct val="110000"/>
-              </a:lnSpc>
-              <a:spcAft>
-                <a:spcPts val="400"/>
-              </a:spcAft>
-            </a:pPr>
-            <a:r>
-              <a:rPr sz="1600" b="0">
-                <a:solidFill>
-                  <a:srgbClr val="1F2A3A"/>
-                </a:solidFill>
-                <a:latin typeface="맑은 고딕"/>
-                <a:ea typeface="맑은 고딕"/>
-                <a:cs typeface="맑은 고딕"/>
-              </a:rPr>
-              <a:t>• 운전원 승인은 열린 채로 남는다</a:t>
-            </a:r>
-          </a:p>
-        </p:txBody>
-      </p:sp>
-      <p:sp>
-        <p:nvSpPr>
-          <p:cNvPr id="22" name="Rounded Rectangle 21"/>
-          <p:cNvSpPr/>
-          <p:nvPr/>
-        </p:nvSpPr>
-        <p:spPr>
-          <a:xfrm>
-            <a:off x="8356396" y="5429504"/>
-            <a:ext cx="822960" cy="292608"/>
-          </a:xfrm>
-          <a:prstGeom prst="roundRect">
-            <a:avLst>
-              <a:gd name="adj" fmla="val 50000"/>
-            </a:avLst>
-          </a:prstGeom>
-          <a:solidFill>
-            <a:srgbClr val="5CB8F2"/>
-          </a:solidFill>
-          <a:ln>
-            <a:noFill/>
-          </a:ln>
-        </p:spPr>
-        <p:txBody>
-          <a:bodyPr rtlCol="0" anchor="ctr"/>
-          <a:lstStyle/>
-          <a:p>
-            <a:pPr algn="ctr"/>
-          </a:p>
-        </p:txBody>
-      </p:sp>
-      <p:sp>
-        <p:nvSpPr>
-          <p:cNvPr id="23" name="TextBox 22"/>
-          <p:cNvSpPr txBox="1"/>
-          <p:nvPr/>
-        </p:nvSpPr>
-        <p:spPr>
-          <a:xfrm>
-            <a:off x="8356396" y="5429504"/>
-            <a:ext cx="822960" cy="292608"/>
-          </a:xfrm>
-          <a:prstGeom prst="rect">
-            <a:avLst/>
-          </a:prstGeom>
-          <a:noFill/>
-        </p:spPr>
-        <p:txBody>
-          <a:bodyPr wrap="square" anchor="ctr"/>
-          <a:lstStyle/>
-          <a:p>
-            <a:pPr algn="ctr" eaLnBrk="0">
-              <a:lnSpc>
-                <a:spcPct val="110000"/>
-              </a:lnSpc>
-            </a:pPr>
-            <a:r>
-              <a:rPr sz="1200" b="1">
+              <a:rPr sz="1350" b="1">
                 <a:solidFill>
                   <a:srgbClr val="13294B"/>
                 </a:solidFill>
@@ -33533,7 +33983,7 @@
                 <a:ea typeface="맑은 고딕"/>
                 <a:cs typeface="맑은 고딕"/>
               </a:rPr>
-              <a:t>사람, 에이전트, 시스템의 책임 배치</a:t>
+              <a:t>같은 그림 위의 세 가지 경로</a:t>
             </a:r>
           </a:p>
         </p:txBody>
@@ -33572,7 +34022,7 @@
                 <a:ea typeface="맑은 고딕"/>
                 <a:cs typeface="맑은 고딕"/>
               </a:rPr>
-              <a:t>판단은 에이전트 레인에, 결정은 담당자 레인에, 실행과 기록은 시스템 레인에 놓여 설비 명령 앞에 사람의 승인이 온다.</a:t>
+              <a:t>같은 그림에서 승인하면 끝에, 거절하면 거절 종결에 닿고, 응답이 없으면 알림 가지만 먼저 끝난다.</a:t>
             </a:r>
           </a:p>
         </p:txBody>
@@ -33653,19 +34103,21 @@
         </p:nvSpPr>
         <p:spPr>
           <a:xfrm>
-            <a:off x="548640" y="1627632"/>
-            <a:ext cx="11094415" cy="347472"/>
+            <a:off x="548640" y="2123439"/>
+            <a:ext cx="3515258" cy="3735832"/>
           </a:xfrm>
           <a:prstGeom prst="roundRect">
             <a:avLst>
-              <a:gd name="adj" fmla="val 12000"/>
+              <a:gd name="adj" fmla="val 4000"/>
             </a:avLst>
           </a:prstGeom>
           <a:solidFill>
-            <a:srgbClr val="13294B"/>
+            <a:srgbClr val="FFFFFF"/>
           </a:solidFill>
-          <a:ln>
-            <a:noFill/>
+          <a:ln w="15875">
+            <a:solidFill>
+              <a:srgbClr val="D3D9E1"/>
+            </a:solidFill>
           </a:ln>
         </p:spPr>
         <p:txBody>
@@ -33678,284 +34130,17 @@
       </p:sp>
       <p:sp>
         <p:nvSpPr>
-          <p:cNvPr id="7" name="TextBox 6"/>
-          <p:cNvSpPr txBox="1"/>
-          <p:nvPr/>
-        </p:nvSpPr>
-        <p:spPr>
-          <a:xfrm>
-            <a:off x="685800" y="1627632"/>
-            <a:ext cx="2514600" cy="347472"/>
-          </a:xfrm>
-          <a:prstGeom prst="rect">
-            <a:avLst/>
-          </a:prstGeom>
-          <a:noFill/>
-        </p:spPr>
-        <p:txBody>
-          <a:bodyPr wrap="square" anchor="ctr"/>
-          <a:lstStyle/>
-          <a:p>
-            <a:pPr algn="l" eaLnBrk="0">
-              <a:lnSpc>
-                <a:spcPct val="110000"/>
-              </a:lnSpc>
-            </a:pPr>
-            <a:r>
-              <a:rPr sz="1300" b="1">
-                <a:solidFill>
-                  <a:srgbClr val="FFFFFF"/>
-                </a:solidFill>
-                <a:latin typeface="맑은 고딕"/>
-                <a:ea typeface="맑은 고딕"/>
-                <a:cs typeface="맑은 고딕"/>
-              </a:rPr>
-              <a:t>작업</a:t>
-            </a:r>
-          </a:p>
-        </p:txBody>
-      </p:sp>
-      <p:sp>
-        <p:nvSpPr>
-          <p:cNvPr id="8" name="TextBox 7"/>
-          <p:cNvSpPr txBox="1"/>
-          <p:nvPr/>
-        </p:nvSpPr>
-        <p:spPr>
-          <a:xfrm>
-            <a:off x="3200400" y="1627632"/>
-            <a:ext cx="6248095" cy="347472"/>
-          </a:xfrm>
-          <a:prstGeom prst="rect">
-            <a:avLst/>
-          </a:prstGeom>
-          <a:noFill/>
-        </p:spPr>
-        <p:txBody>
-          <a:bodyPr wrap="square" anchor="ctr"/>
-          <a:lstStyle/>
-          <a:p>
-            <a:pPr algn="l" eaLnBrk="0">
-              <a:lnSpc>
-                <a:spcPct val="110000"/>
-              </a:lnSpc>
-            </a:pPr>
-            <a:r>
-              <a:rPr sz="1300" b="1">
-                <a:solidFill>
-                  <a:srgbClr val="FFFFFF"/>
-                </a:solidFill>
-                <a:latin typeface="맑은 고딕"/>
-                <a:ea typeface="맑은 고딕"/>
-                <a:cs typeface="맑은 고딕"/>
-              </a:rPr>
-              <a:t>맡는 쪽</a:t>
-            </a:r>
-          </a:p>
-        </p:txBody>
-      </p:sp>
-      <p:sp>
-        <p:nvSpPr>
-          <p:cNvPr id="9" name="TextBox 8"/>
-          <p:cNvSpPr txBox="1"/>
-          <p:nvPr/>
-        </p:nvSpPr>
-        <p:spPr>
-          <a:xfrm>
-            <a:off x="9448495" y="1627632"/>
-            <a:ext cx="2194560" cy="347472"/>
-          </a:xfrm>
-          <a:prstGeom prst="rect">
-            <a:avLst/>
-          </a:prstGeom>
-          <a:noFill/>
-        </p:spPr>
-        <p:txBody>
-          <a:bodyPr wrap="square" anchor="ctr"/>
-          <a:lstStyle/>
-          <a:p>
-            <a:pPr algn="l" eaLnBrk="0">
-              <a:lnSpc>
-                <a:spcPct val="110000"/>
-              </a:lnSpc>
-            </a:pPr>
-            <a:r>
-              <a:rPr sz="1300" b="1">
-                <a:solidFill>
-                  <a:srgbClr val="FFFFFF"/>
-                </a:solidFill>
-                <a:latin typeface="맑은 고딕"/>
-                <a:ea typeface="맑은 고딕"/>
-                <a:cs typeface="맑은 고딕"/>
-              </a:rPr>
-              <a:t>레인</a:t>
-            </a:r>
-          </a:p>
-        </p:txBody>
-      </p:sp>
-      <p:sp>
-        <p:nvSpPr>
-          <p:cNvPr id="10" name="Rounded Rectangle 9"/>
+          <p:cNvPr id="7" name="Oval 6"/>
           <p:cNvSpPr/>
           <p:nvPr/>
         </p:nvSpPr>
         <p:spPr>
           <a:xfrm>
-            <a:off x="548640" y="2061972"/>
-            <a:ext cx="11094415" cy="656843"/>
-          </a:xfrm>
-          <a:prstGeom prst="roundRect">
-            <a:avLst>
-              <a:gd name="adj" fmla="val 8000"/>
-            </a:avLst>
-          </a:prstGeom>
-          <a:solidFill>
-            <a:srgbClr val="F3F6F9"/>
-          </a:solidFill>
-          <a:ln>
-            <a:noFill/>
-          </a:ln>
-        </p:spPr>
-        <p:txBody>
-          <a:bodyPr rtlCol="0" anchor="ctr"/>
-          <a:lstStyle/>
-          <a:p>
-            <a:pPr algn="ctr"/>
-          </a:p>
-        </p:txBody>
-      </p:sp>
-      <p:sp>
-        <p:nvSpPr>
-          <p:cNvPr id="11" name="TextBox 10"/>
-          <p:cNvSpPr txBox="1"/>
-          <p:nvPr/>
-        </p:nvSpPr>
-        <p:spPr>
-          <a:xfrm>
-            <a:off x="685800" y="2029968"/>
-            <a:ext cx="2514600" cy="720851"/>
-          </a:xfrm>
-          <a:prstGeom prst="rect">
-            <a:avLst/>
-          </a:prstGeom>
-          <a:noFill/>
-        </p:spPr>
-        <p:txBody>
-          <a:bodyPr wrap="square" anchor="ctr"/>
-          <a:lstStyle/>
-          <a:p>
-            <a:pPr algn="l" eaLnBrk="0">
-              <a:lnSpc>
-                <a:spcPct val="110000"/>
-              </a:lnSpc>
-            </a:pPr>
-            <a:r>
-              <a:rPr sz="1600" b="1">
-                <a:solidFill>
-                  <a:srgbClr val="13294B"/>
-                </a:solidFill>
-                <a:latin typeface="맑은 고딕"/>
-                <a:ea typeface="맑은 고딕"/>
-                <a:cs typeface="맑은 고딕"/>
-              </a:rPr>
-              <a:t>원인 진단 · 냉각 조치 제안</a:t>
-            </a:r>
-          </a:p>
-        </p:txBody>
-      </p:sp>
-      <p:sp>
-        <p:nvSpPr>
-          <p:cNvPr id="12" name="TextBox 11"/>
-          <p:cNvSpPr txBox="1"/>
-          <p:nvPr/>
-        </p:nvSpPr>
-        <p:spPr>
-          <a:xfrm>
-            <a:off x="3200400" y="2029968"/>
-            <a:ext cx="6156655" cy="720851"/>
-          </a:xfrm>
-          <a:prstGeom prst="rect">
-            <a:avLst/>
-          </a:prstGeom>
-          <a:noFill/>
-        </p:spPr>
-        <p:txBody>
-          <a:bodyPr wrap="square" anchor="ctr"/>
-          <a:lstStyle/>
-          <a:p>
-            <a:pPr algn="l" eaLnBrk="0">
-              <a:lnSpc>
-                <a:spcPct val="110000"/>
-              </a:lnSpc>
-            </a:pPr>
-            <a:r>
-              <a:rPr sz="1400" b="0">
-                <a:solidFill>
-                  <a:srgbClr val="1F2A3A"/>
-                </a:solidFill>
-                <a:latin typeface="맑은 고딕"/>
-                <a:ea typeface="맑은 고딕"/>
-                <a:cs typeface="맑은 고딕"/>
-              </a:rPr>
-              <a:t>냉각 긴급 대응 에이전트 · agent:cooling</a:t>
-            </a:r>
-          </a:p>
-        </p:txBody>
-      </p:sp>
-      <p:sp>
-        <p:nvSpPr>
-          <p:cNvPr id="13" name="TextBox 12"/>
-          <p:cNvSpPr txBox="1"/>
-          <p:nvPr/>
-        </p:nvSpPr>
-        <p:spPr>
-          <a:xfrm>
-            <a:off x="9448495" y="2029968"/>
-            <a:ext cx="2103120" cy="720851"/>
-          </a:xfrm>
-          <a:prstGeom prst="rect">
-            <a:avLst/>
-          </a:prstGeom>
-          <a:noFill/>
-        </p:spPr>
-        <p:txBody>
-          <a:bodyPr wrap="square" anchor="ctr"/>
-          <a:lstStyle/>
-          <a:p>
-            <a:pPr algn="l" eaLnBrk="0">
-              <a:lnSpc>
-                <a:spcPct val="110000"/>
-              </a:lnSpc>
-            </a:pPr>
-            <a:r>
-              <a:rPr sz="1250" b="1">
-                <a:solidFill>
-                  <a:srgbClr val="556175"/>
-                </a:solidFill>
-                <a:latin typeface="맑은 고딕"/>
-                <a:ea typeface="맑은 고딕"/>
-                <a:cs typeface="맑은 고딕"/>
-              </a:rPr>
-              <a:t>에이전트</a:t>
-            </a:r>
-          </a:p>
-        </p:txBody>
-      </p:sp>
-      <p:sp>
-        <p:nvSpPr>
-          <p:cNvPr id="14" name="Rounded Rectangle 13"/>
-          <p:cNvSpPr/>
-          <p:nvPr/>
-        </p:nvSpPr>
-        <p:spPr>
-          <a:xfrm>
-            <a:off x="548640" y="2782824"/>
-            <a:ext cx="11094415" cy="656843"/>
-          </a:xfrm>
-          <a:prstGeom prst="roundRect">
-            <a:avLst>
-              <a:gd name="adj" fmla="val 8000"/>
-            </a:avLst>
+            <a:off x="777240" y="2324608"/>
+            <a:ext cx="731520" cy="731520"/>
+          </a:xfrm>
+          <a:prstGeom prst="ellipse">
+            <a:avLst/>
           </a:prstGeom>
           <a:solidFill>
             <a:srgbClr val="E7F3FD"/>
@@ -33972,33 +34157,60 @@
           </a:p>
         </p:txBody>
       </p:sp>
-      <p:sp>
-        <p:nvSpPr>
-          <p:cNvPr id="15" name="TextBox 14"/>
-          <p:cNvSpPr txBox="1"/>
-          <p:nvPr/>
-        </p:nvSpPr>
-        <p:spPr>
-          <a:xfrm>
-            <a:off x="685800" y="2750820"/>
-            <a:ext cx="2514600" cy="720851"/>
-          </a:xfrm>
-          <a:prstGeom prst="rect">
-            <a:avLst/>
-          </a:prstGeom>
-          <a:noFill/>
-        </p:spPr>
-        <p:txBody>
-          <a:bodyPr wrap="square" anchor="ctr"/>
+      <p:pic>
+        <p:nvPicPr>
+          <p:cNvPr id="8" name="아이콘:circle-check" descr="circle-check_13294B_1.6.png"/>
+          <p:cNvPicPr>
+            <a:picLocks noChangeAspect="1"/>
+          </p:cNvPicPr>
+          <p:nvPr/>
+        </p:nvPicPr>
+        <p:blipFill>
+          <a:blip r:embed="rId3"/>
+          <a:stretch>
+            <a:fillRect/>
+          </a:stretch>
+        </p:blipFill>
+        <p:spPr>
+          <a:xfrm>
+            <a:off x="930859" y="2478227"/>
+            <a:ext cx="424281" cy="424281"/>
+          </a:xfrm>
+          <a:prstGeom prst="rect">
+            <a:avLst/>
+          </a:prstGeom>
+        </p:spPr>
+      </p:pic>
+      <p:sp>
+        <p:nvSpPr>
+          <p:cNvPr id="9" name="TextBox 8"/>
+          <p:cNvSpPr txBox="1"/>
+          <p:nvPr/>
+        </p:nvSpPr>
+        <p:spPr>
+          <a:xfrm>
+            <a:off x="713232" y="3147568"/>
+            <a:ext cx="3186074" cy="2208784"/>
+          </a:xfrm>
+          <a:prstGeom prst="rect">
+            <a:avLst/>
+          </a:prstGeom>
+          <a:noFill/>
+        </p:spPr>
+        <p:txBody>
+          <a:bodyPr wrap="square" anchor="t"/>
           <a:lstStyle/>
           <a:p>
             <a:pPr algn="l" eaLnBrk="0">
               <a:lnSpc>
                 <a:spcPct val="110000"/>
               </a:lnSpc>
-            </a:pPr>
-            <a:r>
-              <a:rPr sz="1600" b="1">
+              <a:spcAft>
+                <a:spcPts val="400"/>
+              </a:spcAft>
+            </a:pPr>
+            <a:r>
+              <a:rPr sz="2000" b="1">
                 <a:solidFill>
                   <a:srgbClr val="13294B"/>
                 </a:solidFill>
@@ -34006,38 +34218,20 @@
                 <a:ea typeface="맑은 고딕"/>
                 <a:cs typeface="맑은 고딕"/>
               </a:rPr>
-              <a:t>운전원 승인</a:t>
-            </a:r>
-          </a:p>
-        </p:txBody>
-      </p:sp>
-      <p:sp>
-        <p:nvSpPr>
-          <p:cNvPr id="16" name="TextBox 15"/>
-          <p:cNvSpPr txBox="1"/>
-          <p:nvPr/>
-        </p:nvSpPr>
-        <p:spPr>
-          <a:xfrm>
-            <a:off x="3200400" y="2750820"/>
-            <a:ext cx="6156655" cy="720851"/>
-          </a:xfrm>
-          <a:prstGeom prst="rect">
-            <a:avLst/>
-          </a:prstGeom>
-          <a:noFill/>
-        </p:spPr>
-        <p:txBody>
-          <a:bodyPr wrap="square" anchor="ctr"/>
-          <a:lstStyle/>
-          <a:p>
-            <a:pPr algn="l" eaLnBrk="0">
-              <a:lnSpc>
-                <a:spcPct val="110000"/>
-              </a:lnSpc>
-            </a:pPr>
-            <a:r>
-              <a:rPr sz="1400" b="0">
+              <a:t>승인</a:t>
+            </a:r>
+          </a:p>
+          <a:p>
+            <a:pPr algn="l" eaLnBrk="0" marL="182880" indent="-182880">
+              <a:lnSpc>
+                <a:spcPct val="110000"/>
+              </a:lnSpc>
+              <a:spcAft>
+                <a:spcPts val="400"/>
+              </a:spcAft>
+            </a:pPr>
+            <a:r>
+              <a:rPr sz="1600" b="0">
                 <a:solidFill>
                   <a:srgbClr val="1F2A3A"/>
                 </a:solidFill>
@@ -34045,68 +34239,71 @@
                 <a:ea typeface="맑은 고딕"/>
                 <a:cs typeface="맑은 고딕"/>
               </a:rPr>
-              <a:t>운전원 역할 · role:operator</a:t>
-            </a:r>
-          </a:p>
-        </p:txBody>
-      </p:sp>
-      <p:sp>
-        <p:nvSpPr>
-          <p:cNvPr id="17" name="TextBox 16"/>
-          <p:cNvSpPr txBox="1"/>
-          <p:nvPr/>
-        </p:nvSpPr>
-        <p:spPr>
-          <a:xfrm>
-            <a:off x="9448495" y="2750820"/>
-            <a:ext cx="2103120" cy="720851"/>
-          </a:xfrm>
-          <a:prstGeom prst="rect">
-            <a:avLst/>
-          </a:prstGeom>
-          <a:noFill/>
-        </p:spPr>
-        <p:txBody>
-          <a:bodyPr wrap="square" anchor="ctr"/>
-          <a:lstStyle/>
-          <a:p>
-            <a:pPr algn="l" eaLnBrk="0">
-              <a:lnSpc>
-                <a:spcPct val="110000"/>
-              </a:lnSpc>
-            </a:pPr>
-            <a:r>
-              <a:rPr sz="1250" b="1">
-                <a:solidFill>
-                  <a:srgbClr val="1A6FC4"/>
-                </a:solidFill>
-                <a:latin typeface="맑은 고딕"/>
-                <a:ea typeface="맑은 고딕"/>
-                <a:cs typeface="맑은 고딕"/>
-              </a:rPr>
-              <a:t>담당자</a:t>
-            </a:r>
-          </a:p>
-        </p:txBody>
-      </p:sp>
-      <p:sp>
-        <p:nvSpPr>
-          <p:cNvPr id="18" name="Rounded Rectangle 17"/>
+              <a:t>• 승인? 게이트웨이에서 냉각 명령으로 간다</a:t>
+            </a:r>
+          </a:p>
+          <a:p>
+            <a:pPr algn="l" eaLnBrk="0" marL="182880" indent="-182880">
+              <a:lnSpc>
+                <a:spcPct val="110000"/>
+              </a:lnSpc>
+              <a:spcAft>
+                <a:spcPts val="400"/>
+              </a:spcAft>
+            </a:pPr>
+            <a:r>
+              <a:rPr sz="1600" b="0">
+                <a:solidFill>
+                  <a:srgbClr val="1F2A3A"/>
+                </a:solidFill>
+                <a:latin typeface="맑은 고딕"/>
+                <a:ea typeface="맑은 고딕"/>
+                <a:cs typeface="맑은 고딕"/>
+              </a:rPr>
+              <a:t>• 재관측과 유온 정상? 게이트웨이를 지난다</a:t>
+            </a:r>
+          </a:p>
+          <a:p>
+            <a:pPr algn="l" eaLnBrk="0" marL="182880" indent="-182880">
+              <a:lnSpc>
+                <a:spcPct val="110000"/>
+              </a:lnSpc>
+              <a:spcAft>
+                <a:spcPts val="400"/>
+              </a:spcAft>
+            </a:pPr>
+            <a:r>
+              <a:rPr sz="1600" b="0">
+                <a:solidFill>
+                  <a:srgbClr val="1F2A3A"/>
+                </a:solidFill>
+                <a:latin typeface="맑은 고딕"/>
+                <a:ea typeface="맑은 고딕"/>
+                <a:cs typeface="맑은 고딕"/>
+              </a:rPr>
+              <a:t>• 작업지시 등록, 결과 보고: 정상을 거친다</a:t>
+            </a:r>
+          </a:p>
+        </p:txBody>
+      </p:sp>
+      <p:sp>
+        <p:nvSpPr>
+          <p:cNvPr id="10" name="Rounded Rectangle 9"/>
           <p:cNvSpPr/>
           <p:nvPr/>
         </p:nvSpPr>
         <p:spPr>
           <a:xfrm>
-            <a:off x="548640" y="3503676"/>
-            <a:ext cx="11094415" cy="656843"/>
+            <a:off x="777240" y="5429504"/>
+            <a:ext cx="822960" cy="292608"/>
           </a:xfrm>
           <a:prstGeom prst="roundRect">
             <a:avLst>
-              <a:gd name="adj" fmla="val 8000"/>
+              <a:gd name="adj" fmla="val 50000"/>
             </a:avLst>
           </a:prstGeom>
           <a:solidFill>
-            <a:srgbClr val="F3F6F9"/>
+            <a:srgbClr val="D3D9E1"/>
           </a:solidFill>
           <a:ln>
             <a:noFill/>
@@ -34122,14 +34319,14 @@
       </p:sp>
       <p:sp>
         <p:nvSpPr>
-          <p:cNvPr id="19" name="TextBox 18"/>
-          <p:cNvSpPr txBox="1"/>
-          <p:nvPr/>
-        </p:nvSpPr>
-        <p:spPr>
-          <a:xfrm>
-            <a:off x="685800" y="3471672"/>
-            <a:ext cx="2514600" cy="720851"/>
+          <p:cNvPr id="11" name="TextBox 10"/>
+          <p:cNvSpPr txBox="1"/>
+          <p:nvPr/>
+        </p:nvSpPr>
+        <p:spPr>
+          <a:xfrm>
+            <a:off x="777240" y="5429504"/>
+            <a:ext cx="822960" cy="292608"/>
           </a:xfrm>
           <a:prstGeom prst="rect">
             <a:avLst/>
@@ -34140,13 +34337,13 @@
           <a:bodyPr wrap="square" anchor="ctr"/>
           <a:lstStyle/>
           <a:p>
-            <a:pPr algn="l" eaLnBrk="0">
-              <a:lnSpc>
-                <a:spcPct val="110000"/>
-              </a:lnSpc>
-            </a:pPr>
-            <a:r>
-              <a:rPr sz="1600" b="1">
+            <a:pPr algn="ctr" eaLnBrk="0">
+              <a:lnSpc>
+                <a:spcPct val="110000"/>
+              </a:lnSpc>
+            </a:pPr>
+            <a:r>
+              <a:rPr sz="1200" b="1">
                 <a:solidFill>
                   <a:srgbClr val="13294B"/>
                 </a:solidFill>
@@ -34154,107 +34351,60 @@
                 <a:ea typeface="맑은 고딕"/>
                 <a:cs typeface="맑은 고딕"/>
               </a:rPr>
-              <a:t>냉각 명령</a:t>
-            </a:r>
-          </a:p>
-        </p:txBody>
-      </p:sp>
-      <p:sp>
-        <p:nvSpPr>
-          <p:cNvPr id="20" name="TextBox 19"/>
-          <p:cNvSpPr txBox="1"/>
-          <p:nvPr/>
-        </p:nvSpPr>
-        <p:spPr>
-          <a:xfrm>
-            <a:off x="3200400" y="3471672"/>
-            <a:ext cx="6156655" cy="720851"/>
-          </a:xfrm>
-          <a:prstGeom prst="rect">
-            <a:avLst/>
-          </a:prstGeom>
-          <a:noFill/>
-        </p:spPr>
-        <p:txBody>
-          <a:bodyPr wrap="square" anchor="ctr"/>
-          <a:lstStyle/>
-          <a:p>
-            <a:pPr algn="l" eaLnBrk="0">
-              <a:lnSpc>
-                <a:spcPct val="110000"/>
-              </a:lnSpc>
-            </a:pPr>
-            <a:r>
-              <a:rPr sz="1400" b="0">
-                <a:solidFill>
-                  <a:srgbClr val="1F2A3A"/>
-                </a:solidFill>
-                <a:latin typeface="맑은 고딕"/>
-                <a:ea typeface="맑은 고딕"/>
-                <a:cs typeface="맑은 고딕"/>
-              </a:rPr>
-              <a:t>SCADA · sys:scada</a:t>
-            </a:r>
-          </a:p>
-        </p:txBody>
-      </p:sp>
-      <p:sp>
-        <p:nvSpPr>
-          <p:cNvPr id="21" name="TextBox 20"/>
-          <p:cNvSpPr txBox="1"/>
-          <p:nvPr/>
-        </p:nvSpPr>
-        <p:spPr>
-          <a:xfrm>
-            <a:off x="9448495" y="3471672"/>
-            <a:ext cx="2103120" cy="720851"/>
-          </a:xfrm>
-          <a:prstGeom prst="rect">
-            <a:avLst/>
-          </a:prstGeom>
-          <a:noFill/>
-        </p:spPr>
-        <p:txBody>
-          <a:bodyPr wrap="square" anchor="ctr"/>
-          <a:lstStyle/>
-          <a:p>
-            <a:pPr algn="l" eaLnBrk="0">
-              <a:lnSpc>
-                <a:spcPct val="110000"/>
-              </a:lnSpc>
-            </a:pPr>
-            <a:r>
-              <a:rPr sz="1250" b="1">
-                <a:solidFill>
-                  <a:srgbClr val="556175"/>
-                </a:solidFill>
-                <a:latin typeface="맑은 고딕"/>
-                <a:ea typeface="맑은 고딕"/>
-                <a:cs typeface="맑은 고딕"/>
-              </a:rPr>
-              <a:t>시스템</a:t>
-            </a:r>
-          </a:p>
-        </p:txBody>
-      </p:sp>
-      <p:sp>
-        <p:nvSpPr>
-          <p:cNvPr id="22" name="Rounded Rectangle 21"/>
+              <a:t>끝</a:t>
+            </a:r>
+          </a:p>
+        </p:txBody>
+      </p:sp>
+      <p:sp>
+        <p:nvSpPr>
+          <p:cNvPr id="12" name="Rounded Rectangle 11"/>
           <p:cNvSpPr/>
           <p:nvPr/>
         </p:nvSpPr>
         <p:spPr>
           <a:xfrm>
-            <a:off x="548640" y="4224528"/>
-            <a:ext cx="11094415" cy="656843"/>
+            <a:off x="4338218" y="2123439"/>
+            <a:ext cx="3515258" cy="3735832"/>
           </a:xfrm>
           <a:prstGeom prst="roundRect">
             <a:avLst>
-              <a:gd name="adj" fmla="val 8000"/>
+              <a:gd name="adj" fmla="val 4000"/>
             </a:avLst>
           </a:prstGeom>
           <a:solidFill>
-            <a:srgbClr val="F3F6F9"/>
+            <a:srgbClr val="FFFFFF"/>
+          </a:solidFill>
+          <a:ln w="15875">
+            <a:solidFill>
+              <a:srgbClr val="D3D9E1"/>
+            </a:solidFill>
+          </a:ln>
+        </p:spPr>
+        <p:txBody>
+          <a:bodyPr rtlCol="0" anchor="ctr"/>
+          <a:lstStyle/>
+          <a:p>
+            <a:pPr algn="ctr"/>
+          </a:p>
+        </p:txBody>
+      </p:sp>
+      <p:sp>
+        <p:nvSpPr>
+          <p:cNvPr id="13" name="Oval 12"/>
+          <p:cNvSpPr/>
+          <p:nvPr/>
+        </p:nvSpPr>
+        <p:spPr>
+          <a:xfrm>
+            <a:off x="4566818" y="2324608"/>
+            <a:ext cx="731520" cy="731520"/>
+          </a:xfrm>
+          <a:prstGeom prst="ellipse">
+            <a:avLst/>
+          </a:prstGeom>
+          <a:solidFill>
+            <a:srgbClr val="E7F3FD"/>
           </a:solidFill>
           <a:ln>
             <a:noFill/>
@@ -34268,33 +34418,60 @@
           </a:p>
         </p:txBody>
       </p:sp>
-      <p:sp>
-        <p:nvSpPr>
-          <p:cNvPr id="23" name="TextBox 22"/>
-          <p:cNvSpPr txBox="1"/>
-          <p:nvPr/>
-        </p:nvSpPr>
-        <p:spPr>
-          <a:xfrm>
-            <a:off x="685800" y="4192524"/>
-            <a:ext cx="2514600" cy="720851"/>
-          </a:xfrm>
-          <a:prstGeom prst="rect">
-            <a:avLst/>
-          </a:prstGeom>
-          <a:noFill/>
-        </p:spPr>
-        <p:txBody>
-          <a:bodyPr wrap="square" anchor="ctr"/>
+      <p:pic>
+        <p:nvPicPr>
+          <p:cNvPr id="14" name="아이콘:ban" descr="ban_13294B_1.6.png"/>
+          <p:cNvPicPr>
+            <a:picLocks noChangeAspect="1"/>
+          </p:cNvPicPr>
+          <p:nvPr/>
+        </p:nvPicPr>
+        <p:blipFill>
+          <a:blip r:embed="rId4"/>
+          <a:stretch>
+            <a:fillRect/>
+          </a:stretch>
+        </p:blipFill>
+        <p:spPr>
+          <a:xfrm>
+            <a:off x="4720437" y="2478227"/>
+            <a:ext cx="424281" cy="424281"/>
+          </a:xfrm>
+          <a:prstGeom prst="rect">
+            <a:avLst/>
+          </a:prstGeom>
+        </p:spPr>
+      </p:pic>
+      <p:sp>
+        <p:nvSpPr>
+          <p:cNvPr id="15" name="TextBox 14"/>
+          <p:cNvSpPr txBox="1"/>
+          <p:nvPr/>
+        </p:nvSpPr>
+        <p:spPr>
+          <a:xfrm>
+            <a:off x="4502810" y="3147568"/>
+            <a:ext cx="3186074" cy="2208784"/>
+          </a:xfrm>
+          <a:prstGeom prst="rect">
+            <a:avLst/>
+          </a:prstGeom>
+          <a:noFill/>
+        </p:spPr>
+        <p:txBody>
+          <a:bodyPr wrap="square" anchor="t"/>
           <a:lstStyle/>
           <a:p>
             <a:pPr algn="l" eaLnBrk="0">
               <a:lnSpc>
                 <a:spcPct val="110000"/>
               </a:lnSpc>
-            </a:pPr>
-            <a:r>
-              <a:rPr sz="1600" b="1">
+              <a:spcAft>
+                <a:spcPts val="400"/>
+              </a:spcAft>
+            </a:pPr>
+            <a:r>
+              <a:rPr sz="2000" b="1">
                 <a:solidFill>
                   <a:srgbClr val="13294B"/>
                 </a:solidFill>
@@ -34302,38 +34479,20 @@
                 <a:ea typeface="맑은 고딕"/>
                 <a:cs typeface="맑은 고딕"/>
               </a:rPr>
-              <a:t>재관측</a:t>
-            </a:r>
-          </a:p>
-        </p:txBody>
-      </p:sp>
-      <p:sp>
-        <p:nvSpPr>
-          <p:cNvPr id="24" name="TextBox 23"/>
-          <p:cNvSpPr txBox="1"/>
-          <p:nvPr/>
-        </p:nvSpPr>
-        <p:spPr>
-          <a:xfrm>
-            <a:off x="3200400" y="4192524"/>
-            <a:ext cx="6156655" cy="720851"/>
-          </a:xfrm>
-          <a:prstGeom prst="rect">
-            <a:avLst/>
-          </a:prstGeom>
-          <a:noFill/>
-        </p:spPr>
-        <p:txBody>
-          <a:bodyPr wrap="square" anchor="ctr"/>
-          <a:lstStyle/>
-          <a:p>
-            <a:pPr algn="l" eaLnBrk="0">
-              <a:lnSpc>
-                <a:spcPct val="110000"/>
-              </a:lnSpc>
-            </a:pPr>
-            <a:r>
-              <a:rPr sz="1400" b="0">
+              <a:t>거절</a:t>
+            </a:r>
+          </a:p>
+          <a:p>
+            <a:pPr algn="l" eaLnBrk="0" marL="182880" indent="-182880">
+              <a:lnSpc>
+                <a:spcPct val="110000"/>
+              </a:lnSpc>
+              <a:spcAft>
+                <a:spcPts val="400"/>
+              </a:spcAft>
+            </a:pPr>
+            <a:r>
+              <a:rPr sz="1600" b="0">
                 <a:solidFill>
                   <a:srgbClr val="1F2A3A"/>
                 </a:solidFill>
@@ -34341,68 +34500,50 @@
                 <a:ea typeface="맑은 고딕"/>
                 <a:cs typeface="맑은 고딕"/>
               </a:rPr>
-              <a:t>프로세스 · sys:process</a:t>
-            </a:r>
-          </a:p>
-        </p:txBody>
-      </p:sp>
-      <p:sp>
-        <p:nvSpPr>
-          <p:cNvPr id="25" name="TextBox 24"/>
-          <p:cNvSpPr txBox="1"/>
-          <p:nvPr/>
-        </p:nvSpPr>
-        <p:spPr>
-          <a:xfrm>
-            <a:off x="9448495" y="4192524"/>
-            <a:ext cx="2103120" cy="720851"/>
-          </a:xfrm>
-          <a:prstGeom prst="rect">
-            <a:avLst/>
-          </a:prstGeom>
-          <a:noFill/>
-        </p:spPr>
-        <p:txBody>
-          <a:bodyPr wrap="square" anchor="ctr"/>
-          <a:lstStyle/>
-          <a:p>
-            <a:pPr algn="l" eaLnBrk="0">
-              <a:lnSpc>
-                <a:spcPct val="110000"/>
-              </a:lnSpc>
-            </a:pPr>
-            <a:r>
-              <a:rPr sz="1250" b="1">
-                <a:solidFill>
-                  <a:srgbClr val="556175"/>
-                </a:solidFill>
-                <a:latin typeface="맑은 고딕"/>
-                <a:ea typeface="맑은 고딕"/>
-                <a:cs typeface="맑은 고딕"/>
-              </a:rPr>
-              <a:t>시스템</a:t>
-            </a:r>
-          </a:p>
-        </p:txBody>
-      </p:sp>
-      <p:sp>
-        <p:nvSpPr>
-          <p:cNvPr id="26" name="Rounded Rectangle 25"/>
+              <a:t>• 승인? 게이트웨이에서 결과 보고: 거절로 간다</a:t>
+            </a:r>
+          </a:p>
+          <a:p>
+            <a:pPr algn="l" eaLnBrk="0" marL="182880" indent="-182880">
+              <a:lnSpc>
+                <a:spcPct val="110000"/>
+              </a:lnSpc>
+              <a:spcAft>
+                <a:spcPts val="400"/>
+              </a:spcAft>
+            </a:pPr>
+            <a:r>
+              <a:rPr sz="1600" b="0">
+                <a:solidFill>
+                  <a:srgbClr val="1F2A3A"/>
+                </a:solidFill>
+                <a:latin typeface="맑은 고딕"/>
+                <a:ea typeface="맑은 고딕"/>
+                <a:cs typeface="맑은 고딕"/>
+              </a:rPr>
+              <a:t>• 냉각 명령으로 가는 선은 지나지 않는다</a:t>
+            </a:r>
+          </a:p>
+        </p:txBody>
+      </p:sp>
+      <p:sp>
+        <p:nvSpPr>
+          <p:cNvPr id="16" name="Rounded Rectangle 15"/>
           <p:cNvSpPr/>
           <p:nvPr/>
         </p:nvSpPr>
         <p:spPr>
           <a:xfrm>
-            <a:off x="548640" y="4945380"/>
-            <a:ext cx="11094415" cy="656843"/>
+            <a:off x="4566818" y="5429504"/>
+            <a:ext cx="1021080" cy="292608"/>
           </a:xfrm>
           <a:prstGeom prst="roundRect">
             <a:avLst>
-              <a:gd name="adj" fmla="val 8000"/>
+              <a:gd name="adj" fmla="val 50000"/>
             </a:avLst>
           </a:prstGeom>
           <a:solidFill>
-            <a:srgbClr val="F3F6F9"/>
+            <a:srgbClr val="D3D9E1"/>
           </a:solidFill>
           <a:ln>
             <a:noFill/>
@@ -34418,14 +34559,14 @@
       </p:sp>
       <p:sp>
         <p:nvSpPr>
-          <p:cNvPr id="27" name="TextBox 26"/>
-          <p:cNvSpPr txBox="1"/>
-          <p:nvPr/>
-        </p:nvSpPr>
-        <p:spPr>
-          <a:xfrm>
-            <a:off x="685800" y="4913376"/>
-            <a:ext cx="2514600" cy="720851"/>
+          <p:cNvPr id="17" name="TextBox 16"/>
+          <p:cNvSpPr txBox="1"/>
+          <p:nvPr/>
+        </p:nvSpPr>
+        <p:spPr>
+          <a:xfrm>
+            <a:off x="4566818" y="5429504"/>
+            <a:ext cx="1021080" cy="292608"/>
           </a:xfrm>
           <a:prstGeom prst="rect">
             <a:avLst/>
@@ -34436,13 +34577,13 @@
           <a:bodyPr wrap="square" anchor="ctr"/>
           <a:lstStyle/>
           <a:p>
-            <a:pPr algn="l" eaLnBrk="0">
-              <a:lnSpc>
-                <a:spcPct val="110000"/>
-              </a:lnSpc>
-            </a:pPr>
-            <a:r>
-              <a:rPr sz="1600" b="1">
+            <a:pPr algn="ctr" eaLnBrk="0">
+              <a:lnSpc>
+                <a:spcPct val="110000"/>
+              </a:lnSpc>
+            </a:pPr>
+            <a:r>
+              <a:rPr sz="1200" b="1">
                 <a:solidFill>
                   <a:srgbClr val="13294B"/>
                 </a:solidFill>
@@ -34450,107 +34591,60 @@
                 <a:ea typeface="맑은 고딕"/>
                 <a:cs typeface="맑은 고딕"/>
               </a:rPr>
-              <a:t>작업지시 등록</a:t>
-            </a:r>
-          </a:p>
-        </p:txBody>
-      </p:sp>
-      <p:sp>
-        <p:nvSpPr>
-          <p:cNvPr id="28" name="TextBox 27"/>
-          <p:cNvSpPr txBox="1"/>
-          <p:nvPr/>
-        </p:nvSpPr>
-        <p:spPr>
-          <a:xfrm>
-            <a:off x="3200400" y="4913376"/>
-            <a:ext cx="6156655" cy="720851"/>
-          </a:xfrm>
-          <a:prstGeom prst="rect">
-            <a:avLst/>
-          </a:prstGeom>
-          <a:noFill/>
-        </p:spPr>
-        <p:txBody>
-          <a:bodyPr wrap="square" anchor="ctr"/>
-          <a:lstStyle/>
-          <a:p>
-            <a:pPr algn="l" eaLnBrk="0">
-              <a:lnSpc>
-                <a:spcPct val="110000"/>
-              </a:lnSpc>
-            </a:pPr>
-            <a:r>
-              <a:rPr sz="1400" b="0">
-                <a:solidFill>
-                  <a:srgbClr val="1F2A3A"/>
-                </a:solidFill>
-                <a:latin typeface="맑은 고딕"/>
-                <a:ea typeface="맑은 고딕"/>
-                <a:cs typeface="맑은 고딕"/>
-              </a:rPr>
-              <a:t>CMMS · sys:cmms</a:t>
-            </a:r>
-          </a:p>
-        </p:txBody>
-      </p:sp>
-      <p:sp>
-        <p:nvSpPr>
-          <p:cNvPr id="29" name="TextBox 28"/>
-          <p:cNvSpPr txBox="1"/>
-          <p:nvPr/>
-        </p:nvSpPr>
-        <p:spPr>
-          <a:xfrm>
-            <a:off x="9448495" y="4913376"/>
-            <a:ext cx="2103120" cy="720851"/>
-          </a:xfrm>
-          <a:prstGeom prst="rect">
-            <a:avLst/>
-          </a:prstGeom>
-          <a:noFill/>
-        </p:spPr>
-        <p:txBody>
-          <a:bodyPr wrap="square" anchor="ctr"/>
-          <a:lstStyle/>
-          <a:p>
-            <a:pPr algn="l" eaLnBrk="0">
-              <a:lnSpc>
-                <a:spcPct val="110000"/>
-              </a:lnSpc>
-            </a:pPr>
-            <a:r>
-              <a:rPr sz="1250" b="1">
-                <a:solidFill>
-                  <a:srgbClr val="556175"/>
-                </a:solidFill>
-                <a:latin typeface="맑은 고딕"/>
-                <a:ea typeface="맑은 고딕"/>
-                <a:cs typeface="맑은 고딕"/>
-              </a:rPr>
-              <a:t>시스템</a:t>
-            </a:r>
-          </a:p>
-        </p:txBody>
-      </p:sp>
-      <p:sp>
-        <p:nvSpPr>
-          <p:cNvPr id="30" name="Rounded Rectangle 29"/>
+              <a:t>거절 종결</a:t>
+            </a:r>
+          </a:p>
+        </p:txBody>
+      </p:sp>
+      <p:sp>
+        <p:nvSpPr>
+          <p:cNvPr id="18" name="Rounded Rectangle 17"/>
           <p:cNvSpPr/>
           <p:nvPr/>
         </p:nvSpPr>
         <p:spPr>
           <a:xfrm>
-            <a:off x="548640" y="5666232"/>
-            <a:ext cx="11094415" cy="656843"/>
+            <a:off x="8127796" y="2123439"/>
+            <a:ext cx="3515258" cy="3735832"/>
           </a:xfrm>
           <a:prstGeom prst="roundRect">
             <a:avLst>
-              <a:gd name="adj" fmla="val 8000"/>
+              <a:gd name="adj" fmla="val 4000"/>
             </a:avLst>
           </a:prstGeom>
           <a:solidFill>
-            <a:srgbClr val="F3F6F9"/>
+            <a:srgbClr val="FFFFFF"/>
+          </a:solidFill>
+          <a:ln w="28575">
+            <a:solidFill>
+              <a:srgbClr val="5CB8F2"/>
+            </a:solidFill>
+          </a:ln>
+        </p:spPr>
+        <p:txBody>
+          <a:bodyPr rtlCol="0" anchor="ctr"/>
+          <a:lstStyle/>
+          <a:p>
+            <a:pPr algn="ctr"/>
+          </a:p>
+        </p:txBody>
+      </p:sp>
+      <p:sp>
+        <p:nvSpPr>
+          <p:cNvPr id="19" name="Oval 18"/>
+          <p:cNvSpPr/>
+          <p:nvPr/>
+        </p:nvSpPr>
+        <p:spPr>
+          <a:xfrm>
+            <a:off x="8356396" y="2324608"/>
+            <a:ext cx="731520" cy="731520"/>
+          </a:xfrm>
+          <a:prstGeom prst="ellipse">
+            <a:avLst/>
+          </a:prstGeom>
+          <a:solidFill>
+            <a:srgbClr val="5CB8F2"/>
           </a:solidFill>
           <a:ln>
             <a:noFill/>
@@ -34564,16 +34658,155 @@
           </a:p>
         </p:txBody>
       </p:sp>
-      <p:sp>
-        <p:nvSpPr>
-          <p:cNvPr id="31" name="TextBox 30"/>
-          <p:cNvSpPr txBox="1"/>
-          <p:nvPr/>
-        </p:nvSpPr>
-        <p:spPr>
-          <a:xfrm>
-            <a:off x="685800" y="5634228"/>
-            <a:ext cx="2514600" cy="720851"/>
+      <p:pic>
+        <p:nvPicPr>
+          <p:cNvPr id="20" name="아이콘:hourglass" descr="hourglass_13294B_1.6.png"/>
+          <p:cNvPicPr>
+            <a:picLocks noChangeAspect="1"/>
+          </p:cNvPicPr>
+          <p:nvPr/>
+        </p:nvPicPr>
+        <p:blipFill>
+          <a:blip r:embed="rId5"/>
+          <a:stretch>
+            <a:fillRect/>
+          </a:stretch>
+        </p:blipFill>
+        <p:spPr>
+          <a:xfrm>
+            <a:off x="8510016" y="2478227"/>
+            <a:ext cx="424281" cy="424281"/>
+          </a:xfrm>
+          <a:prstGeom prst="rect">
+            <a:avLst/>
+          </a:prstGeom>
+        </p:spPr>
+      </p:pic>
+      <p:sp>
+        <p:nvSpPr>
+          <p:cNvPr id="21" name="TextBox 20"/>
+          <p:cNvSpPr txBox="1"/>
+          <p:nvPr/>
+        </p:nvSpPr>
+        <p:spPr>
+          <a:xfrm>
+            <a:off x="8292388" y="3147568"/>
+            <a:ext cx="3186074" cy="2208784"/>
+          </a:xfrm>
+          <a:prstGeom prst="rect">
+            <a:avLst/>
+          </a:prstGeom>
+          <a:noFill/>
+        </p:spPr>
+        <p:txBody>
+          <a:bodyPr wrap="square" anchor="t"/>
+          <a:lstStyle/>
+          <a:p>
+            <a:pPr algn="l" eaLnBrk="0">
+              <a:lnSpc>
+                <a:spcPct val="110000"/>
+              </a:lnSpc>
+              <a:spcAft>
+                <a:spcPts val="400"/>
+              </a:spcAft>
+            </a:pPr>
+            <a:r>
+              <a:rPr sz="2000" b="1">
+                <a:solidFill>
+                  <a:srgbClr val="13294B"/>
+                </a:solidFill>
+                <a:latin typeface="맑은 고딕"/>
+                <a:ea typeface="맑은 고딕"/>
+                <a:cs typeface="맑은 고딕"/>
+              </a:rPr>
+              <a:t>응답 없음</a:t>
+            </a:r>
+          </a:p>
+          <a:p>
+            <a:pPr algn="l" eaLnBrk="0" marL="182880" indent="-182880">
+              <a:lnSpc>
+                <a:spcPct val="110000"/>
+              </a:lnSpc>
+              <a:spcAft>
+                <a:spcPts val="400"/>
+              </a:spcAft>
+            </a:pPr>
+            <a:r>
+              <a:rPr sz="1600" b="0">
+                <a:solidFill>
+                  <a:srgbClr val="1F2A3A"/>
+                </a:solidFill>
+                <a:latin typeface="맑은 고딕"/>
+                <a:ea typeface="맑은 고딕"/>
+                <a:cs typeface="맑은 고딕"/>
+              </a:rPr>
+              <a:t>• 승인 지연 타이머가 승인 지연 알림을 연다</a:t>
+            </a:r>
+          </a:p>
+          <a:p>
+            <a:pPr algn="l" eaLnBrk="0" marL="182880" indent="-182880">
+              <a:lnSpc>
+                <a:spcPct val="110000"/>
+              </a:lnSpc>
+              <a:spcAft>
+                <a:spcPts val="400"/>
+              </a:spcAft>
+            </a:pPr>
+            <a:r>
+              <a:rPr sz="1600" b="0">
+                <a:solidFill>
+                  <a:srgbClr val="1F2A3A"/>
+                </a:solidFill>
+                <a:latin typeface="맑은 고딕"/>
+                <a:ea typeface="맑은 고딕"/>
+                <a:cs typeface="맑은 고딕"/>
+              </a:rPr>
+              <a:t>• 운전원 승인은 열린 채로 남는다</a:t>
+            </a:r>
+          </a:p>
+        </p:txBody>
+      </p:sp>
+      <p:sp>
+        <p:nvSpPr>
+          <p:cNvPr id="22" name="Rounded Rectangle 21"/>
+          <p:cNvSpPr/>
+          <p:nvPr/>
+        </p:nvSpPr>
+        <p:spPr>
+          <a:xfrm>
+            <a:off x="8356396" y="5429504"/>
+            <a:ext cx="822960" cy="292608"/>
+          </a:xfrm>
+          <a:prstGeom prst="roundRect">
+            <a:avLst>
+              <a:gd name="adj" fmla="val 50000"/>
+            </a:avLst>
+          </a:prstGeom>
+          <a:solidFill>
+            <a:srgbClr val="5CB8F2"/>
+          </a:solidFill>
+          <a:ln>
+            <a:noFill/>
+          </a:ln>
+        </p:spPr>
+        <p:txBody>
+          <a:bodyPr rtlCol="0" anchor="ctr"/>
+          <a:lstStyle/>
+          <a:p>
+            <a:pPr algn="ctr"/>
+          </a:p>
+        </p:txBody>
+      </p:sp>
+      <p:sp>
+        <p:nvSpPr>
+          <p:cNvPr id="23" name="TextBox 22"/>
+          <p:cNvSpPr txBox="1"/>
+          <p:nvPr/>
+        </p:nvSpPr>
+        <p:spPr>
+          <a:xfrm>
+            <a:off x="8356396" y="5429504"/>
+            <a:ext cx="822960" cy="292608"/>
           </a:xfrm>
           <a:prstGeom prst="rect">
             <a:avLst/>
@@ -34584,13 +34817,13 @@
           <a:bodyPr wrap="square" anchor="ctr"/>
           <a:lstStyle/>
           <a:p>
-            <a:pPr algn="l" eaLnBrk="0">
-              <a:lnSpc>
-                <a:spcPct val="110000"/>
-              </a:lnSpc>
-            </a:pPr>
-            <a:r>
-              <a:rPr sz="1600" b="1">
+            <a:pPr algn="ctr" eaLnBrk="0">
+              <a:lnSpc>
+                <a:spcPct val="110000"/>
+              </a:lnSpc>
+            </a:pPr>
+            <a:r>
+              <a:rPr sz="1200" b="1">
                 <a:solidFill>
                   <a:srgbClr val="13294B"/>
                 </a:solidFill>
@@ -34598,85 +34831,7 @@
                 <a:ea typeface="맑은 고딕"/>
                 <a:cs typeface="맑은 고딕"/>
               </a:rPr>
-              <a:t>결과 보고</a:t>
-            </a:r>
-          </a:p>
-        </p:txBody>
-      </p:sp>
-      <p:sp>
-        <p:nvSpPr>
-          <p:cNvPr id="32" name="TextBox 31"/>
-          <p:cNvSpPr txBox="1"/>
-          <p:nvPr/>
-        </p:nvSpPr>
-        <p:spPr>
-          <a:xfrm>
-            <a:off x="3200400" y="5634228"/>
-            <a:ext cx="6156655" cy="720851"/>
-          </a:xfrm>
-          <a:prstGeom prst="rect">
-            <a:avLst/>
-          </a:prstGeom>
-          <a:noFill/>
-        </p:spPr>
-        <p:txBody>
-          <a:bodyPr wrap="square" anchor="ctr"/>
-          <a:lstStyle/>
-          <a:p>
-            <a:pPr algn="l" eaLnBrk="0">
-              <a:lnSpc>
-                <a:spcPct val="110000"/>
-              </a:lnSpc>
-            </a:pPr>
-            <a:r>
-              <a:rPr sz="1400" b="0">
-                <a:solidFill>
-                  <a:srgbClr val="1F2A3A"/>
-                </a:solidFill>
-                <a:latin typeface="맑은 고딕"/>
-                <a:ea typeface="맑은 고딕"/>
-                <a:cs typeface="맑은 고딕"/>
-              </a:rPr>
-              <a:t>프로세스 · sys:process</a:t>
-            </a:r>
-          </a:p>
-        </p:txBody>
-      </p:sp>
-      <p:sp>
-        <p:nvSpPr>
-          <p:cNvPr id="33" name="TextBox 32"/>
-          <p:cNvSpPr txBox="1"/>
-          <p:nvPr/>
-        </p:nvSpPr>
-        <p:spPr>
-          <a:xfrm>
-            <a:off x="9448495" y="5634228"/>
-            <a:ext cx="2103120" cy="720851"/>
-          </a:xfrm>
-          <a:prstGeom prst="rect">
-            <a:avLst/>
-          </a:prstGeom>
-          <a:noFill/>
-        </p:spPr>
-        <p:txBody>
-          <a:bodyPr wrap="square" anchor="ctr"/>
-          <a:lstStyle/>
-          <a:p>
-            <a:pPr algn="l" eaLnBrk="0">
-              <a:lnSpc>
-                <a:spcPct val="110000"/>
-              </a:lnSpc>
-            </a:pPr>
-            <a:r>
-              <a:rPr sz="1250" b="1">
-                <a:solidFill>
-                  <a:srgbClr val="556175"/>
-                </a:solidFill>
-                <a:latin typeface="맑은 고딕"/>
-                <a:ea typeface="맑은 고딕"/>
-                <a:cs typeface="맑은 고딕"/>
-              </a:rPr>
-              <a:t>시스템</a:t>
+              <a:t>알림</a:t>
             </a:r>
           </a:p>
         </p:txBody>
@@ -34855,7 +35010,7 @@
       </p:sp>
       <p:pic>
         <p:nvPicPr>
-          <p:cNvPr id="6" name="삽화:병렬과하위.svg" descr="illust_4207579571774422024_1792123197.png"/>
+          <p:cNvPr id="6" name="삽화:병렬과하위.svg" descr="illust_1469183878306156749_1792123197.png"/>
           <p:cNvPicPr>
             <a:picLocks noChangeAspect="1"/>
           </p:cNvPicPr>
@@ -34935,7 +35090,7 @@
                 <a:ea typeface="맑은 고딕"/>
                 <a:cs typeface="맑은 고딕"/>
               </a:rPr>
-              <a:t>Parallel Gateway · 모든 갈래로 함께 보낸다</a:t>
+              <a:t>Parallel Gateway</a:t>
             </a:r>
           </a:p>
         </p:txBody>
@@ -34998,7 +35153,7 @@
                 <a:ea typeface="맑은 고딕"/>
                 <a:cs typeface="맑은 고딕"/>
               </a:rPr>
-              <a:t>Sub-Process · 흐름을 작업 하나로 접는다</a:t>
+              <a:t>Sub-Process</a:t>
             </a:r>
           </a:p>
         </p:txBody>
@@ -37101,7 +37256,7 @@
       </p:sp>
       <p:pic>
         <p:nvPicPr>
-          <p:cNvPr id="6" name="삽화:정의와인스턴스.svg" descr="illust_1235372176551722797_1792123197.png"/>
+          <p:cNvPr id="6" name="삽화:정의와인스턴스.svg" descr="illust_3459176815364840362_1792123197.png"/>
           <p:cNvPicPr>
             <a:picLocks noChangeAspect="1"/>
           </p:cNvPicPr>
@@ -37404,8 +37559,8 @@
         </p:nvSpPr>
         <p:spPr>
           <a:xfrm>
-            <a:off x="6968607" y="5173218"/>
-            <a:ext cx="3709228" cy="375920"/>
+            <a:off x="6750417" y="5173218"/>
+            <a:ext cx="4145608" cy="375920"/>
           </a:xfrm>
           <a:prstGeom prst="rect">
             <a:avLst/>
@@ -37433,7 +37588,7 @@
                 <a:ea typeface="맑은 고딕"/>
                 <a:cs typeface="맑은 고딕"/>
               </a:rPr>
-              <a:t>처리 건 bede0d2e… 승인 대기</a:t>
+              <a:t>처리 건 bede0d2e… 승인 대기 중</a:t>
             </a:r>
           </a:p>
         </p:txBody>
@@ -37612,7 +37767,7 @@
       </p:sp>
       <p:pic>
         <p:nvPicPr>
-          <p:cNvPr id="6" name="삽화:흐름_토큰_승인대기.svg" descr="illust_549259644078371170_1792123197.png"/>
+          <p:cNvPr id="6" name="삽화:흐름_토큰_승인대기.svg" descr="illust_2002367658766606530_1792123197.png"/>
           <p:cNvPicPr>
             <a:picLocks noChangeAspect="1"/>
           </p:cNvPicPr>
@@ -38745,7 +38900,7 @@
                 <a:ea typeface="맑은 고딕"/>
                 <a:cs typeface="맑은 고딕"/>
               </a:rPr>
-              <a:t>단계의 상태</a:t>
+              <a:t>단계</a:t>
             </a:r>
           </a:p>
           <a:p>
@@ -38766,7 +38921,7 @@
                 <a:ea typeface="맑은 고딕"/>
                 <a:cs typeface="맑은 고딕"/>
               </a:rPr>
-              <a:t>끝난 것은 DONE,</a:t>
+              <a:t>그림의 작업 하나가</a:t>
             </a:r>
           </a:p>
           <a:p>
@@ -38787,7 +38942,7 @@
                 <a:ea typeface="맑은 고딕"/>
                 <a:cs typeface="맑은 고딕"/>
               </a:rPr>
-              <a:t>닿지 않은 것은 TODO이다.</a:t>
+              <a:t>처리 건마다 단계 하나가 된다.</a:t>
             </a:r>
           </a:p>
         </p:txBody>
@@ -38966,7 +39121,7 @@
       </p:sp>
       <p:pic>
         <p:nvPicPr>
-          <p:cNvPr id="6" name="삽화:흐름_토큰_둘.svg" descr="illust_8123528274753896098_1792123197.png"/>
+          <p:cNvPr id="6" name="삽화:흐름_토큰_둘.svg" descr="illust_3809221575621479823_1792123197.png"/>
           <p:cNvPicPr>
             <a:picLocks noChangeAspect="1"/>
           </p:cNvPicPr>
@@ -39123,7 +39278,7 @@
         <p:spPr>
           <a:xfrm>
             <a:off x="6750417" y="1769455"/>
-            <a:ext cx="4145608" cy="507618"/>
+            <a:ext cx="4145608" cy="337185"/>
           </a:xfrm>
           <a:prstGeom prst="rect">
             <a:avLst/>
@@ -39154,6 +39309,27 @@
               <a:t>처음의 토큰</a:t>
             </a:r>
           </a:p>
+        </p:txBody>
+      </p:sp>
+      <p:sp>
+        <p:nvSpPr>
+          <p:cNvPr id="11" name="TextBox 10"/>
+          <p:cNvSpPr txBox="1"/>
+          <p:nvPr/>
+        </p:nvSpPr>
+        <p:spPr>
+          <a:xfrm>
+            <a:off x="1677502" y="4842296"/>
+            <a:ext cx="1854614" cy="337185"/>
+          </a:xfrm>
+          <a:prstGeom prst="rect">
+            <a:avLst/>
+          </a:prstGeom>
+          <a:noFill/>
+        </p:spPr>
+        <p:txBody>
+          <a:bodyPr wrap="square" anchor="t"/>
+          <a:lstStyle/>
           <a:p>
             <a:pPr algn="ctr" eaLnBrk="0">
               <a:lnSpc>
@@ -39164,48 +39340,6 @@
               </a:spcAft>
             </a:pPr>
             <a:r>
-              <a:rPr sz="1100" b="0">
-                <a:solidFill>
-                  <a:srgbClr val="556175"/>
-                </a:solidFill>
-                <a:latin typeface="맑은 고딕"/>
-                <a:ea typeface="맑은 고딕"/>
-                <a:cs typeface="맑은 고딕"/>
-              </a:rPr>
-              <a:t>운전원 승인에서 승인을 기다린다</a:t>
-            </a:r>
-          </a:p>
-        </p:txBody>
-      </p:sp>
-      <p:sp>
-        <p:nvSpPr>
-          <p:cNvPr id="11" name="TextBox 10"/>
-          <p:cNvSpPr txBox="1"/>
-          <p:nvPr/>
-        </p:nvSpPr>
-        <p:spPr>
-          <a:xfrm>
-            <a:off x="1677502" y="4842296"/>
-            <a:ext cx="1854614" cy="507618"/>
-          </a:xfrm>
-          <a:prstGeom prst="rect">
-            <a:avLst/>
-          </a:prstGeom>
-          <a:noFill/>
-        </p:spPr>
-        <p:txBody>
-          <a:bodyPr wrap="square" anchor="t"/>
-          <a:lstStyle/>
-          <a:p>
-            <a:pPr algn="ctr" eaLnBrk="0">
-              <a:lnSpc>
-                <a:spcPct val="110000"/>
-              </a:lnSpc>
-              <a:spcAft>
-                <a:spcPts val="100"/>
-              </a:spcAft>
-            </a:pPr>
-            <a:r>
               <a:rPr sz="1350" b="1">
                 <a:solidFill>
                   <a:srgbClr val="1A6FC4"/>
@@ -39215,27 +39349,6 @@
                 <a:cs typeface="맑은 고딕"/>
               </a:rPr>
               <a:t>둘째 토큰</a:t>
-            </a:r>
-          </a:p>
-          <a:p>
-            <a:pPr algn="ctr" eaLnBrk="0">
-              <a:lnSpc>
-                <a:spcPct val="110000"/>
-              </a:lnSpc>
-              <a:spcAft>
-                <a:spcPts val="100"/>
-              </a:spcAft>
-            </a:pPr>
-            <a:r>
-              <a:rPr sz="1100" b="0">
-                <a:solidFill>
-                  <a:srgbClr val="556175"/>
-                </a:solidFill>
-                <a:latin typeface="맑은 고딕"/>
-                <a:ea typeface="맑은 고딕"/>
-                <a:cs typeface="맑은 고딕"/>
-              </a:rPr>
-              <a:t>알림 가지를 지난다</a:t>
             </a:r>
           </a:p>
         </p:txBody>
@@ -39708,7 +39821,7 @@
       </p:sp>
       <p:pic>
         <p:nvPicPr>
-          <p:cNvPr id="6" name="삽화:남은일_추천뒤.svg" descr="illust_3934530216904112692_1792123197.png"/>
+          <p:cNvPr id="6" name="삽화:남은일_추천뒤.svg" descr="illust_7771078657915796210_1792123197.png"/>
           <p:cNvPicPr>
             <a:picLocks noChangeAspect="1"/>
           </p:cNvPicPr>
@@ -43221,7 +43334,7 @@
                 <a:ea typeface="맑은 고딕"/>
                 <a:cs typeface="맑은 고딕"/>
               </a:rPr>
-              <a:t>납기 오더와</a:t>
+              <a:t>(필요하면) 납기 오더와</a:t>
             </a:r>
           </a:p>
           <a:p>
@@ -51920,8 +52033,8 @@
         </p:nvSpPr>
         <p:spPr>
           <a:xfrm>
-            <a:off x="548640" y="2177668"/>
-            <a:ext cx="2567863" cy="3627374"/>
+            <a:off x="548640" y="2123439"/>
+            <a:ext cx="2567863" cy="3735832"/>
           </a:xfrm>
           <a:prstGeom prst="roundRect">
             <a:avLst>
@@ -51953,7 +52066,7 @@
         </p:nvSpPr>
         <p:spPr>
           <a:xfrm>
-            <a:off x="777240" y="2378837"/>
+            <a:off x="777240" y="2324608"/>
             <a:ext cx="731520" cy="731520"/>
           </a:xfrm>
           <a:prstGeom prst="ellipse">
@@ -51976,7 +52089,7 @@
       </p:sp>
       <p:pic>
         <p:nvPicPr>
-          <p:cNvPr id="8" name="아이콘:users" descr="users_13294B_1.6.png"/>
+          <p:cNvPr id="8" name="아이콘:pencil" descr="pencil_13294B_1.6.png"/>
           <p:cNvPicPr>
             <a:picLocks noChangeAspect="1"/>
           </p:cNvPicPr>
@@ -51990,7 +52103,7 @@
         </p:blipFill>
         <p:spPr>
           <a:xfrm>
-            <a:off x="930859" y="2532456"/>
+            <a:off x="930859" y="2478227"/>
             <a:ext cx="424281" cy="424281"/>
           </a:xfrm>
           <a:prstGeom prst="rect">
@@ -52006,8 +52119,8 @@
         </p:nvSpPr>
         <p:spPr>
           <a:xfrm>
-            <a:off x="713232" y="3201797"/>
-            <a:ext cx="2238679" cy="2100326"/>
+            <a:off x="713232" y="3147568"/>
+            <a:ext cx="2238679" cy="2208784"/>
           </a:xfrm>
           <a:prstGeom prst="rect">
             <a:avLst/>
@@ -52027,7 +52140,7 @@
               </a:spcAft>
             </a:pPr>
             <a:r>
-              <a:rPr sz="2150" b="1">
+              <a:rPr sz="1800" b="1">
                 <a:solidFill>
                   <a:srgbClr val="13294B"/>
                 </a:solidFill>
@@ -52035,11 +52148,11 @@
                 <a:ea typeface="맑은 고딕"/>
                 <a:cs typeface="맑은 고딕"/>
               </a:rPr>
-              <a:t>레인</a:t>
-            </a:r>
-          </a:p>
-          <a:p>
-            <a:pPr algn="l" eaLnBrk="0">
+              <a:t>입력</a:t>
+            </a:r>
+          </a:p>
+          <a:p>
+            <a:pPr algn="l" eaLnBrk="0" marL="160020" indent="-160020">
               <a:lnSpc>
                 <a:spcPct val="110000"/>
               </a:lnSpc>
@@ -52048,7 +52161,7 @@
               </a:spcAft>
             </a:pPr>
             <a:r>
-              <a:rPr sz="1750" b="0">
+              <a:rPr sz="1400" b="0">
                 <a:solidFill>
                   <a:srgbClr val="1F2A3A"/>
                 </a:solidFill>
@@ -52056,7 +52169,28 @@
                 <a:ea typeface="맑은 고딕"/>
                 <a:cs typeface="맑은 고딕"/>
               </a:rPr>
-              <a:t>담당자, 에이전트, 시스템의 세 칸에 작업을 나누어 놓는다</a:t>
+              <a:t>• 앞 실습에서 익힌 편집기 조작</a:t>
+            </a:r>
+          </a:p>
+          <a:p>
+            <a:pPr algn="l" eaLnBrk="0" marL="160020" indent="-160020">
+              <a:lnSpc>
+                <a:spcPct val="110000"/>
+              </a:lnSpc>
+              <a:spcAft>
+                <a:spcPts val="400"/>
+              </a:spcAft>
+            </a:pPr>
+            <a:r>
+              <a:rPr sz="1400" b="0">
+                <a:solidFill>
+                  <a:srgbClr val="1F2A3A"/>
+                </a:solidFill>
+                <a:latin typeface="맑은 고딕"/>
+                <a:ea typeface="맑은 고딕"/>
+                <a:cs typeface="맑은 고딕"/>
+              </a:rPr>
+              <a:t>• 이번 회차에 읽은 긴급 대응 프로세스의 그림</a:t>
             </a:r>
           </a:p>
         </p:txBody>
@@ -52069,7 +52203,7 @@
         </p:nvSpPr>
         <p:spPr>
           <a:xfrm>
-            <a:off x="777240" y="5375275"/>
+            <a:off x="777240" y="5429504"/>
             <a:ext cx="822960" cy="292608"/>
           </a:xfrm>
           <a:prstGeom prst="roundRect">
@@ -52100,7 +52234,7 @@
         </p:nvSpPr>
         <p:spPr>
           <a:xfrm>
-            <a:off x="777240" y="5375275"/>
+            <a:off x="777240" y="5429504"/>
             <a:ext cx="822960" cy="292608"/>
           </a:xfrm>
           <a:prstGeom prst="rect">
@@ -52126,7 +52260,7 @@
                 <a:ea typeface="맑은 고딕"/>
                 <a:cs typeface="맑은 고딕"/>
               </a:rPr>
-              <a:t>책임</a:t>
+              <a:t>입력</a:t>
             </a:r>
           </a:p>
         </p:txBody>
@@ -52139,8 +52273,8 @@
         </p:nvSpPr>
         <p:spPr>
           <a:xfrm>
-            <a:off x="3390823" y="2177668"/>
-            <a:ext cx="2567863" cy="3627374"/>
+            <a:off x="3390823" y="2123439"/>
+            <a:ext cx="2567863" cy="3735832"/>
           </a:xfrm>
           <a:prstGeom prst="roundRect">
             <a:avLst>
@@ -52172,7 +52306,7 @@
         </p:nvSpPr>
         <p:spPr>
           <a:xfrm>
-            <a:off x="3619423" y="2378837"/>
+            <a:off x="3619423" y="2324608"/>
             <a:ext cx="731520" cy="731520"/>
           </a:xfrm>
           <a:prstGeom prst="ellipse">
@@ -52209,7 +52343,7 @@
         </p:blipFill>
         <p:spPr>
           <a:xfrm>
-            <a:off x="3773043" y="2532456"/>
+            <a:off x="3773043" y="2478227"/>
             <a:ext cx="424281" cy="424281"/>
           </a:xfrm>
           <a:prstGeom prst="rect">
@@ -52225,8 +52359,8 @@
         </p:nvSpPr>
         <p:spPr>
           <a:xfrm>
-            <a:off x="3555415" y="3201797"/>
-            <a:ext cx="2238679" cy="2100326"/>
+            <a:off x="3555415" y="3147568"/>
+            <a:ext cx="2238679" cy="2208784"/>
           </a:xfrm>
           <a:prstGeom prst="rect">
             <a:avLst/>
@@ -52246,7 +52380,7 @@
               </a:spcAft>
             </a:pPr>
             <a:r>
-              <a:rPr sz="2150" b="1">
+              <a:rPr sz="1800" b="1">
                 <a:solidFill>
                   <a:srgbClr val="13294B"/>
                 </a:solidFill>
@@ -52254,11 +52388,11 @@
                 <a:ea typeface="맑은 고딕"/>
                 <a:cs typeface="맑은 고딕"/>
               </a:rPr>
-              <a:t>작업의 순서</a:t>
-            </a:r>
-          </a:p>
-          <a:p>
-            <a:pPr algn="l" eaLnBrk="0">
+              <a:t>그릴 범위</a:t>
+            </a:r>
+          </a:p>
+          <a:p>
+            <a:pPr algn="l" eaLnBrk="0" marL="160020" indent="-160020">
               <a:lnSpc>
                 <a:spcPct val="110000"/>
               </a:lnSpc>
@@ -52267,7 +52401,7 @@
               </a:spcAft>
             </a:pPr>
             <a:r>
-              <a:rPr sz="1750" b="0">
+              <a:rPr sz="1400" b="0">
                 <a:solidFill>
                   <a:srgbClr val="1F2A3A"/>
                 </a:solidFill>
@@ -52275,7 +52409,49 @@
                 <a:ea typeface="맑은 고딕"/>
                 <a:cs typeface="맑은 고딕"/>
               </a:rPr>
-              <a:t>경보 → 진단과 제안 → 운전원 승인 → 냉각 명령 → 재관측 → 결과 보고</a:t>
+              <a:t>• 담당자 · 에이전트 · 시스템의 세 레인에 경보에서 결과 보고까지</a:t>
+            </a:r>
+          </a:p>
+          <a:p>
+            <a:pPr algn="l" eaLnBrk="0" marL="160020" indent="-160020">
+              <a:lnSpc>
+                <a:spcPct val="110000"/>
+              </a:lnSpc>
+              <a:spcAft>
+                <a:spcPts val="400"/>
+              </a:spcAft>
+            </a:pPr>
+            <a:r>
+              <a:rPr sz="1400" b="0">
+                <a:solidFill>
+                  <a:srgbClr val="1F2A3A"/>
+                </a:solidFill>
+                <a:latin typeface="맑은 고딕"/>
+                <a:ea typeface="맑은 고딕"/>
+                <a:cs typeface="맑은 고딕"/>
+              </a:rPr>
+              <a:t>• 승인 · 거절의 갈림, 정상 종료와 거절 종결</a:t>
+            </a:r>
+          </a:p>
+          <a:p>
+            <a:pPr algn="l" eaLnBrk="0" marL="160020" indent="-160020">
+              <a:lnSpc>
+                <a:spcPct val="110000"/>
+              </a:lnSpc>
+              <a:spcAft>
+                <a:spcPts val="400"/>
+              </a:spcAft>
+            </a:pPr>
+            <a:r>
+              <a:rPr sz="1400" b="0">
+                <a:solidFill>
+                  <a:srgbClr val="1F2A3A"/>
+                </a:solidFill>
+                <a:latin typeface="맑은 고딕"/>
+                <a:ea typeface="맑은 고딕"/>
+                <a:cs typeface="맑은 고딕"/>
+              </a:rPr>
+              <a:t>• 승인 작업에 비중단형 지연 알림 타이머</a:t>
             </a:r>
           </a:p>
         </p:txBody>
@@ -52288,7 +52464,7 @@
         </p:nvSpPr>
         <p:spPr>
           <a:xfrm>
-            <a:off x="3619423" y="5375275"/>
+            <a:off x="3619423" y="5429504"/>
             <a:ext cx="822960" cy="292608"/>
           </a:xfrm>
           <a:prstGeom prst="roundRect">
@@ -52319,7 +52495,7 @@
         </p:nvSpPr>
         <p:spPr>
           <a:xfrm>
-            <a:off x="3619423" y="5375275"/>
+            <a:off x="3619423" y="5429504"/>
             <a:ext cx="822960" cy="292608"/>
           </a:xfrm>
           <a:prstGeom prst="rect">
@@ -52345,7 +52521,7 @@
                 <a:ea typeface="맑은 고딕"/>
                 <a:cs typeface="맑은 고딕"/>
               </a:rPr>
-              <a:t>흐름</a:t>
+              <a:t>범위</a:t>
             </a:r>
           </a:p>
         </p:txBody>
@@ -52358,8 +52534,8 @@
         </p:nvSpPr>
         <p:spPr>
           <a:xfrm>
-            <a:off x="6233007" y="2177668"/>
-            <a:ext cx="2567863" cy="3627374"/>
+            <a:off x="6233007" y="2123439"/>
+            <a:ext cx="2567863" cy="3735832"/>
           </a:xfrm>
           <a:prstGeom prst="roundRect">
             <a:avLst>
@@ -52391,7 +52567,7 @@
         </p:nvSpPr>
         <p:spPr>
           <a:xfrm>
-            <a:off x="6461607" y="2378837"/>
+            <a:off x="6461607" y="2324608"/>
             <a:ext cx="731520" cy="731520"/>
           </a:xfrm>
           <a:prstGeom prst="ellipse">
@@ -52414,7 +52590,7 @@
       </p:sp>
       <p:pic>
         <p:nvPicPr>
-          <p:cNvPr id="20" name="아이콘:arrows-split-2" descr="arrows-split-2_13294B_1.6.png"/>
+          <p:cNvPr id="20" name="아이콘:file-check" descr="file-check_13294B_1.6.png"/>
           <p:cNvPicPr>
             <a:picLocks noChangeAspect="1"/>
           </p:cNvPicPr>
@@ -52428,7 +52604,7 @@
         </p:blipFill>
         <p:spPr>
           <a:xfrm>
-            <a:off x="6615226" y="2532456"/>
+            <a:off x="6615226" y="2478227"/>
             <a:ext cx="424281" cy="424281"/>
           </a:xfrm>
           <a:prstGeom prst="rect">
@@ -52444,8 +52620,8 @@
         </p:nvSpPr>
         <p:spPr>
           <a:xfrm>
-            <a:off x="6397599" y="3201797"/>
-            <a:ext cx="2238679" cy="2100326"/>
+            <a:off x="6397599" y="3147568"/>
+            <a:ext cx="2238679" cy="2208784"/>
           </a:xfrm>
           <a:prstGeom prst="rect">
             <a:avLst/>
@@ -52465,7 +52641,7 @@
               </a:spcAft>
             </a:pPr>
             <a:r>
-              <a:rPr sz="2150" b="1">
+              <a:rPr sz="1800" b="1">
                 <a:solidFill>
                   <a:srgbClr val="13294B"/>
                 </a:solidFill>
@@ -52473,11 +52649,11 @@
                 <a:ea typeface="맑은 고딕"/>
                 <a:cs typeface="맑은 고딕"/>
               </a:rPr>
-              <a:t>갈림과 끝</a:t>
-            </a:r>
-          </a:p>
-          <a:p>
-            <a:pPr algn="l" eaLnBrk="0">
+              <a:t>산출물</a:t>
+            </a:r>
+          </a:p>
+          <a:p>
+            <a:pPr algn="l" eaLnBrk="0" marL="160020" indent="-160020">
               <a:lnSpc>
                 <a:spcPct val="110000"/>
               </a:lnSpc>
@@ -52486,7 +52662,7 @@
               </a:spcAft>
             </a:pPr>
             <a:r>
-              <a:rPr sz="1650" b="0">
+              <a:rPr sz="1400" b="0">
                 <a:solidFill>
                   <a:srgbClr val="1F2A3A"/>
                 </a:solidFill>
@@ -52494,7 +52670,28 @@
                 <a:ea typeface="맑은 고딕"/>
                 <a:cs typeface="맑은 고딕"/>
               </a:rPr>
-              <a:t>승인과 거절을 가르고 정상 종료와 거절 종결을 따로 둔다</a:t>
+              <a:t>• 긴급 대응 프로세스의 .bpmn 파일</a:t>
+            </a:r>
+          </a:p>
+          <a:p>
+            <a:pPr algn="l" eaLnBrk="0" marL="160020" indent="-160020">
+              <a:lnSpc>
+                <a:spcPct val="110000"/>
+              </a:lnSpc>
+              <a:spcAft>
+                <a:spcPts val="400"/>
+              </a:spcAft>
+            </a:pPr>
+            <a:r>
+              <a:rPr sz="1400" b="0">
+                <a:solidFill>
+                  <a:srgbClr val="1F2A3A"/>
+                </a:solidFill>
+                <a:latin typeface="맑은 고딕"/>
+                <a:ea typeface="맑은 고딕"/>
+                <a:cs typeface="맑은 고딕"/>
+              </a:rPr>
+              <a:t>• 다음 실습에서 그대로 쓴다</a:t>
             </a:r>
           </a:p>
         </p:txBody>
@@ -52507,8 +52704,8 @@
         </p:nvSpPr>
         <p:spPr>
           <a:xfrm>
-            <a:off x="6461607" y="5375275"/>
-            <a:ext cx="1127760" cy="292608"/>
+            <a:off x="6461607" y="5429504"/>
+            <a:ext cx="822960" cy="292608"/>
           </a:xfrm>
           <a:prstGeom prst="roundRect">
             <a:avLst>
@@ -52538,8 +52735,8 @@
         </p:nvSpPr>
         <p:spPr>
           <a:xfrm>
-            <a:off x="6461607" y="5375275"/>
-            <a:ext cx="1127760" cy="292608"/>
+            <a:off x="6461607" y="5429504"/>
+            <a:ext cx="822960" cy="292608"/>
           </a:xfrm>
           <a:prstGeom prst="rect">
             <a:avLst/>
@@ -52564,7 +52761,7 @@
                 <a:ea typeface="맑은 고딕"/>
                 <a:cs typeface="맑은 고딕"/>
               </a:rPr>
-              <a:t>게이트웨이</a:t>
+              <a:t>결과물</a:t>
             </a:r>
           </a:p>
         </p:txBody>
@@ -52577,8 +52774,8 @@
         </p:nvSpPr>
         <p:spPr>
           <a:xfrm>
-            <a:off x="9075191" y="2177668"/>
-            <a:ext cx="2567863" cy="3627374"/>
+            <a:off x="9075191" y="2123439"/>
+            <a:ext cx="2567863" cy="3735832"/>
           </a:xfrm>
           <a:prstGeom prst="roundRect">
             <a:avLst>
@@ -52610,7 +52807,7 @@
         </p:nvSpPr>
         <p:spPr>
           <a:xfrm>
-            <a:off x="9303791" y="2378837"/>
+            <a:off x="9303791" y="2324608"/>
             <a:ext cx="731520" cy="731520"/>
           </a:xfrm>
           <a:prstGeom prst="ellipse">
@@ -52633,7 +52830,7 @@
       </p:sp>
       <p:pic>
         <p:nvPicPr>
-          <p:cNvPr id="26" name="아이콘:clock" descr="clock_13294B_1.6.png"/>
+          <p:cNvPr id="26" name="아이콘:circle-check" descr="circle-check_13294B_1.6.png"/>
           <p:cNvPicPr>
             <a:picLocks noChangeAspect="1"/>
           </p:cNvPicPr>
@@ -52647,7 +52844,7 @@
         </p:blipFill>
         <p:spPr>
           <a:xfrm>
-            <a:off x="9457410" y="2532456"/>
+            <a:off x="9457410" y="2478227"/>
             <a:ext cx="424281" cy="424281"/>
           </a:xfrm>
           <a:prstGeom prst="rect">
@@ -52663,8 +52860,8 @@
         </p:nvSpPr>
         <p:spPr>
           <a:xfrm>
-            <a:off x="9239783" y="3201797"/>
-            <a:ext cx="2238679" cy="2100326"/>
+            <a:off x="9239783" y="3147568"/>
+            <a:ext cx="2238679" cy="2208784"/>
           </a:xfrm>
           <a:prstGeom prst="rect">
             <a:avLst/>
@@ -52684,7 +52881,7 @@
               </a:spcAft>
             </a:pPr>
             <a:r>
-              <a:rPr sz="2150" b="1">
+              <a:rPr sz="1800" b="1">
                 <a:solidFill>
                   <a:srgbClr val="13294B"/>
                 </a:solidFill>
@@ -52692,11 +52889,11 @@
                 <a:ea typeface="맑은 고딕"/>
                 <a:cs typeface="맑은 고딕"/>
               </a:rPr>
-              <a:t>지연 알림</a:t>
-            </a:r>
-          </a:p>
-          <a:p>
-            <a:pPr algn="l" eaLnBrk="0" marL="200025" indent="-200025">
+              <a:t>성공 기준</a:t>
+            </a:r>
+          </a:p>
+          <a:p>
+            <a:pPr algn="l" eaLnBrk="0" marL="160020" indent="-160020">
               <a:lnSpc>
                 <a:spcPct val="110000"/>
               </a:lnSpc>
@@ -52705,7 +52902,7 @@
               </a:spcAft>
             </a:pPr>
             <a:r>
-              <a:rPr sz="1750" b="0">
+              <a:rPr sz="1400" b="0">
                 <a:solidFill>
                   <a:srgbClr val="1F2A3A"/>
                 </a:solidFill>
@@ -52713,11 +52910,11 @@
                 <a:ea typeface="맑은 고딕"/>
                 <a:cs typeface="맑은 고딕"/>
               </a:rPr>
-              <a:t>• 승인 작업에 비중단형 타이머를 붙인다</a:t>
-            </a:r>
-          </a:p>
-          <a:p>
-            <a:pPr algn="l" eaLnBrk="0" marL="200025" indent="-200025">
+              <a:t>• 완성 그림과 요소 · 갈림 · 타이머의 종류가 같다</a:t>
+            </a:r>
+          </a:p>
+          <a:p>
+            <a:pPr algn="l" eaLnBrk="0" marL="160020" indent="-160020">
               <a:lnSpc>
                 <a:spcPct val="110000"/>
               </a:lnSpc>
@@ -52726,7 +52923,7 @@
               </a:spcAft>
             </a:pPr>
             <a:r>
-              <a:rPr sz="1750" b="0">
+              <a:rPr sz="1400" b="0">
                 <a:solidFill>
                   <a:srgbClr val="1F2A3A"/>
                 </a:solidFill>
@@ -52734,7 +52931,7 @@
                 <a:ea typeface="맑은 고딕"/>
                 <a:cs typeface="맑은 고딕"/>
               </a:rPr>
-              <a:t>• 완성 그림과 요소 · 갈림을 대조한다</a:t>
+              <a:t>• 모든 갈래가 끝 이벤트에 닿는다</a:t>
             </a:r>
           </a:p>
         </p:txBody>
@@ -52747,8 +52944,8 @@
         </p:nvSpPr>
         <p:spPr>
           <a:xfrm>
-            <a:off x="9303791" y="5375275"/>
-            <a:ext cx="1371600" cy="292608"/>
+            <a:off x="9303791" y="5429504"/>
+            <a:ext cx="822960" cy="292608"/>
           </a:xfrm>
           <a:prstGeom prst="roundRect">
             <a:avLst>
@@ -52778,8 +52975,8 @@
         </p:nvSpPr>
         <p:spPr>
           <a:xfrm>
-            <a:off x="9303791" y="5375275"/>
-            <a:ext cx="1371600" cy="292608"/>
+            <a:off x="9303791" y="5429504"/>
+            <a:ext cx="822960" cy="292608"/>
           </a:xfrm>
           <a:prstGeom prst="rect">
             <a:avLst/>
@@ -52804,7 +53001,7 @@
                 <a:ea typeface="맑은 고딕"/>
                 <a:cs typeface="맑은 고딕"/>
               </a:rPr>
-              <a:t>타이머 · 대조</a:t>
+              <a:t>판정</a:t>
             </a:r>
           </a:p>
         </p:txBody>
@@ -53210,8 +53407,8 @@
         </p:nvSpPr>
         <p:spPr>
           <a:xfrm>
-            <a:off x="548640" y="2224150"/>
-            <a:ext cx="2567863" cy="3534410"/>
+            <a:off x="548640" y="2123439"/>
+            <a:ext cx="2567863" cy="3735832"/>
           </a:xfrm>
           <a:prstGeom prst="roundRect">
             <a:avLst>
@@ -53243,7 +53440,7 @@
         </p:nvSpPr>
         <p:spPr>
           <a:xfrm>
-            <a:off x="777240" y="2425319"/>
+            <a:off x="777240" y="2324608"/>
             <a:ext cx="731520" cy="731520"/>
           </a:xfrm>
           <a:prstGeom prst="ellipse">
@@ -53280,7 +53477,7 @@
         </p:blipFill>
         <p:spPr>
           <a:xfrm>
-            <a:off x="930859" y="2578938"/>
+            <a:off x="930859" y="2478227"/>
             <a:ext cx="424281" cy="424281"/>
           </a:xfrm>
           <a:prstGeom prst="rect">
@@ -53296,8 +53493,8 @@
         </p:nvSpPr>
         <p:spPr>
           <a:xfrm>
-            <a:off x="713232" y="3248279"/>
-            <a:ext cx="2238679" cy="2007362"/>
+            <a:off x="713232" y="3147568"/>
+            <a:ext cx="2238679" cy="2208784"/>
           </a:xfrm>
           <a:prstGeom prst="rect">
             <a:avLst/>
@@ -53317,7 +53514,7 @@
               </a:spcAft>
             </a:pPr>
             <a:r>
-              <a:rPr sz="2050" b="1">
+              <a:rPr sz="2000" b="1">
                 <a:solidFill>
                   <a:srgbClr val="13294B"/>
                 </a:solidFill>
@@ -53329,7 +53526,7 @@
             </a:r>
           </a:p>
           <a:p>
-            <a:pPr algn="l" eaLnBrk="0" marL="188595" indent="-188595">
+            <a:pPr algn="l" eaLnBrk="0" marL="182880" indent="-182880">
               <a:lnSpc>
                 <a:spcPct val="110000"/>
               </a:lnSpc>
@@ -53338,7 +53535,7 @@
               </a:spcAft>
             </a:pPr>
             <a:r>
-              <a:rPr sz="1650" b="0">
+              <a:rPr sz="1600" b="0">
                 <a:solidFill>
                   <a:srgbClr val="1F2A3A"/>
                 </a:solidFill>
@@ -53350,7 +53547,7 @@
             </a:r>
           </a:p>
           <a:p>
-            <a:pPr algn="l" eaLnBrk="0" marL="188595" indent="-188595">
+            <a:pPr algn="l" eaLnBrk="0" marL="182880" indent="-182880">
               <a:lnSpc>
                 <a:spcPct val="110000"/>
               </a:lnSpc>
@@ -53359,7 +53556,7 @@
               </a:spcAft>
             </a:pPr>
             <a:r>
-              <a:rPr sz="1650" b="0">
+              <a:rPr sz="1600" b="0">
                 <a:solidFill>
                   <a:srgbClr val="1F2A3A"/>
                 </a:solidFill>
@@ -53368,6 +53565,27 @@
                 <a:cs typeface="맑은 고딕"/>
               </a:rPr>
               <a:t>• 이미 있는 냉각 긴급 대응 에이전트와 운전원 역할</a:t>
+            </a:r>
+          </a:p>
+          <a:p>
+            <a:pPr algn="l" eaLnBrk="0" marL="182880" indent="-182880">
+              <a:lnSpc>
+                <a:spcPct val="110000"/>
+              </a:lnSpc>
+              <a:spcAft>
+                <a:spcPts val="400"/>
+              </a:spcAft>
+            </a:pPr>
+            <a:r>
+              <a:rPr sz="1600" b="0">
+                <a:solidFill>
+                  <a:srgbClr val="1F2A3A"/>
+                </a:solidFill>
+                <a:latin typeface="맑은 고딕"/>
+                <a:ea typeface="맑은 고딕"/>
+                <a:cs typeface="맑은 고딕"/>
+              </a:rPr>
+              <a:t>• 준비된 연결 파일</a:t>
             </a:r>
           </a:p>
         </p:txBody>
@@ -53380,7 +53598,7 @@
         </p:nvSpPr>
         <p:spPr>
           <a:xfrm>
-            <a:off x="777240" y="5328793"/>
+            <a:off x="777240" y="5429504"/>
             <a:ext cx="822960" cy="292608"/>
           </a:xfrm>
           <a:prstGeom prst="roundRect">
@@ -53411,7 +53629,7 @@
         </p:nvSpPr>
         <p:spPr>
           <a:xfrm>
-            <a:off x="777240" y="5328793"/>
+            <a:off x="777240" y="5429504"/>
             <a:ext cx="822960" cy="292608"/>
           </a:xfrm>
           <a:prstGeom prst="rect">
@@ -53450,8 +53668,8 @@
         </p:nvSpPr>
         <p:spPr>
           <a:xfrm>
-            <a:off x="3390823" y="2224150"/>
-            <a:ext cx="2567863" cy="3534410"/>
+            <a:off x="3390823" y="2123439"/>
+            <a:ext cx="2567863" cy="3735832"/>
           </a:xfrm>
           <a:prstGeom prst="roundRect">
             <a:avLst>
@@ -53483,7 +53701,7 @@
         </p:nvSpPr>
         <p:spPr>
           <a:xfrm>
-            <a:off x="3619423" y="2425319"/>
+            <a:off x="3619423" y="2324608"/>
             <a:ext cx="731520" cy="731520"/>
           </a:xfrm>
           <a:prstGeom prst="ellipse">
@@ -53520,7 +53738,7 @@
         </p:blipFill>
         <p:spPr>
           <a:xfrm>
-            <a:off x="3773043" y="2578938"/>
+            <a:off x="3773043" y="2478227"/>
             <a:ext cx="424281" cy="424281"/>
           </a:xfrm>
           <a:prstGeom prst="rect">
@@ -53536,8 +53754,8 @@
         </p:nvSpPr>
         <p:spPr>
           <a:xfrm>
-            <a:off x="3555415" y="3248279"/>
-            <a:ext cx="2238679" cy="2007362"/>
+            <a:off x="3555415" y="3147568"/>
+            <a:ext cx="2238679" cy="2208784"/>
           </a:xfrm>
           <a:prstGeom prst="rect">
             <a:avLst/>
@@ -53557,7 +53775,7 @@
               </a:spcAft>
             </a:pPr>
             <a:r>
-              <a:rPr sz="2050" b="1">
+              <a:rPr sz="2000" b="1">
                 <a:solidFill>
                   <a:srgbClr val="13294B"/>
                 </a:solidFill>
@@ -53569,7 +53787,7 @@
             </a:r>
           </a:p>
           <a:p>
-            <a:pPr algn="l" eaLnBrk="0" marL="188595" indent="-188595">
+            <a:pPr algn="l" eaLnBrk="0" marL="182880" indent="-182880">
               <a:lnSpc>
                 <a:spcPct val="110000"/>
               </a:lnSpc>
@@ -53578,7 +53796,7 @@
               </a:spcAft>
             </a:pPr>
             <a:r>
-              <a:rPr sz="1650" b="0">
+              <a:rPr sz="1600" b="0">
                 <a:solidFill>
                   <a:srgbClr val="1F2A3A"/>
                 </a:solidFill>
@@ -53590,7 +53808,7 @@
             </a:r>
           </a:p>
           <a:p>
-            <a:pPr algn="l" eaLnBrk="0" marL="188595" indent="-188595">
+            <a:pPr algn="l" eaLnBrk="0" marL="182880" indent="-182880">
               <a:lnSpc>
                 <a:spcPct val="110000"/>
               </a:lnSpc>
@@ -53599,7 +53817,7 @@
               </a:spcAft>
             </a:pPr>
             <a:r>
-              <a:rPr sz="1650" b="0">
+              <a:rPr sz="1600" b="0">
                 <a:solidFill>
                   <a:srgbClr val="1F2A3A"/>
                 </a:solidFill>
@@ -53620,7 +53838,7 @@
         </p:nvSpPr>
         <p:spPr>
           <a:xfrm>
-            <a:off x="3619423" y="5328793"/>
+            <a:off x="3619423" y="5429504"/>
             <a:ext cx="822960" cy="292608"/>
           </a:xfrm>
           <a:prstGeom prst="roundRect">
@@ -53651,7 +53869,7 @@
         </p:nvSpPr>
         <p:spPr>
           <a:xfrm>
-            <a:off x="3619423" y="5328793"/>
+            <a:off x="3619423" y="5429504"/>
             <a:ext cx="822960" cy="292608"/>
           </a:xfrm>
           <a:prstGeom prst="rect">
@@ -53690,8 +53908,8 @@
         </p:nvSpPr>
         <p:spPr>
           <a:xfrm>
-            <a:off x="6233007" y="2224150"/>
-            <a:ext cx="2567863" cy="3534410"/>
+            <a:off x="6233007" y="2123439"/>
+            <a:ext cx="2567863" cy="3735832"/>
           </a:xfrm>
           <a:prstGeom prst="roundRect">
             <a:avLst>
@@ -53723,7 +53941,7 @@
         </p:nvSpPr>
         <p:spPr>
           <a:xfrm>
-            <a:off x="6461607" y="2425319"/>
+            <a:off x="6461607" y="2324608"/>
             <a:ext cx="731520" cy="731520"/>
           </a:xfrm>
           <a:prstGeom prst="ellipse">
@@ -53760,7 +53978,7 @@
         </p:blipFill>
         <p:spPr>
           <a:xfrm>
-            <a:off x="6615226" y="2578938"/>
+            <a:off x="6615226" y="2478227"/>
             <a:ext cx="424281" cy="424281"/>
           </a:xfrm>
           <a:prstGeom prst="rect">
@@ -53776,8 +53994,8 @@
         </p:nvSpPr>
         <p:spPr>
           <a:xfrm>
-            <a:off x="6397599" y="3248279"/>
-            <a:ext cx="2238679" cy="2007362"/>
+            <a:off x="6397599" y="3147568"/>
+            <a:ext cx="2238679" cy="2208784"/>
           </a:xfrm>
           <a:prstGeom prst="rect">
             <a:avLst/>
@@ -53797,7 +54015,7 @@
               </a:spcAft>
             </a:pPr>
             <a:r>
-              <a:rPr sz="2050" b="1">
+              <a:rPr sz="2000" b="1">
                 <a:solidFill>
                   <a:srgbClr val="13294B"/>
                 </a:solidFill>
@@ -53809,7 +54027,7 @@
             </a:r>
           </a:p>
           <a:p>
-            <a:pPr algn="l" eaLnBrk="0" marL="188595" indent="-188595">
+            <a:pPr algn="l" eaLnBrk="0" marL="182880" indent="-182880">
               <a:lnSpc>
                 <a:spcPct val="110000"/>
               </a:lnSpc>
@@ -53818,7 +54036,7 @@
               </a:spcAft>
             </a:pPr>
             <a:r>
-              <a:rPr sz="1650" b="0">
+              <a:rPr sz="1600" b="0">
                 <a:solidFill>
                   <a:srgbClr val="1F2A3A"/>
                 </a:solidFill>
@@ -53830,7 +54048,7 @@
             </a:r>
           </a:p>
           <a:p>
-            <a:pPr algn="l" eaLnBrk="0" marL="188595" indent="-188595">
+            <a:pPr algn="l" eaLnBrk="0" marL="182880" indent="-182880">
               <a:lnSpc>
                 <a:spcPct val="110000"/>
               </a:lnSpc>
@@ -53839,7 +54057,7 @@
               </a:spcAft>
             </a:pPr>
             <a:r>
-              <a:rPr sz="1650" b="0">
+              <a:rPr sz="1600" b="0">
                 <a:solidFill>
                   <a:srgbClr val="1F2A3A"/>
                 </a:solidFill>
@@ -53860,7 +54078,7 @@
         </p:nvSpPr>
         <p:spPr>
           <a:xfrm>
-            <a:off x="6461607" y="5328793"/>
+            <a:off x="6461607" y="5429504"/>
             <a:ext cx="1219199" cy="292608"/>
           </a:xfrm>
           <a:prstGeom prst="roundRect">
@@ -53891,7 +54109,7 @@
         </p:nvSpPr>
         <p:spPr>
           <a:xfrm>
-            <a:off x="6461607" y="5328793"/>
+            <a:off x="6461607" y="5429504"/>
             <a:ext cx="1219199" cy="292608"/>
           </a:xfrm>
           <a:prstGeom prst="rect">
@@ -53930,8 +54148,8 @@
         </p:nvSpPr>
         <p:spPr>
           <a:xfrm>
-            <a:off x="9075191" y="2224150"/>
-            <a:ext cx="2567863" cy="3534410"/>
+            <a:off x="9075191" y="2123439"/>
+            <a:ext cx="2567863" cy="3735832"/>
           </a:xfrm>
           <a:prstGeom prst="roundRect">
             <a:avLst>
@@ -53963,7 +54181,7 @@
         </p:nvSpPr>
         <p:spPr>
           <a:xfrm>
-            <a:off x="9303791" y="2425319"/>
+            <a:off x="9303791" y="2324608"/>
             <a:ext cx="731520" cy="731520"/>
           </a:xfrm>
           <a:prstGeom prst="ellipse">
@@ -54000,7 +54218,7 @@
         </p:blipFill>
         <p:spPr>
           <a:xfrm>
-            <a:off x="9457410" y="2578938"/>
+            <a:off x="9457410" y="2478227"/>
             <a:ext cx="424281" cy="424281"/>
           </a:xfrm>
           <a:prstGeom prst="rect">
@@ -54016,8 +54234,8 @@
         </p:nvSpPr>
         <p:spPr>
           <a:xfrm>
-            <a:off x="9239783" y="3248279"/>
-            <a:ext cx="2238679" cy="2007362"/>
+            <a:off x="9239783" y="3147568"/>
+            <a:ext cx="2238679" cy="2208784"/>
           </a:xfrm>
           <a:prstGeom prst="rect">
             <a:avLst/>
@@ -54037,7 +54255,7 @@
               </a:spcAft>
             </a:pPr>
             <a:r>
-              <a:rPr sz="2050" b="1">
+              <a:rPr sz="2000" b="1">
                 <a:solidFill>
                   <a:srgbClr val="13294B"/>
                 </a:solidFill>
@@ -54049,7 +54267,7 @@
             </a:r>
           </a:p>
           <a:p>
-            <a:pPr algn="l" eaLnBrk="0" marL="188595" indent="-188595">
+            <a:pPr algn="l" eaLnBrk="0" marL="182880" indent="-182880">
               <a:lnSpc>
                 <a:spcPct val="110000"/>
               </a:lnSpc>
@@ -54058,7 +54276,7 @@
               </a:spcAft>
             </a:pPr>
             <a:r>
-              <a:rPr sz="1650" b="0">
+              <a:rPr sz="1600" b="0">
                 <a:solidFill>
                   <a:srgbClr val="1F2A3A"/>
                 </a:solidFill>
@@ -54070,7 +54288,7 @@
             </a:r>
           </a:p>
           <a:p>
-            <a:pPr algn="l" eaLnBrk="0" marL="188595" indent="-188595">
+            <a:pPr algn="l" eaLnBrk="0" marL="182880" indent="-182880">
               <a:lnSpc>
                 <a:spcPct val="110000"/>
               </a:lnSpc>
@@ -54079,7 +54297,7 @@
               </a:spcAft>
             </a:pPr>
             <a:r>
-              <a:rPr sz="1650" b="0">
+              <a:rPr sz="1600" b="0">
                 <a:solidFill>
                   <a:srgbClr val="1F2A3A"/>
                 </a:solidFill>
@@ -54100,7 +54318,7 @@
         </p:nvSpPr>
         <p:spPr>
           <a:xfrm>
-            <a:off x="9303791" y="5328793"/>
+            <a:off x="9303791" y="5429504"/>
             <a:ext cx="822960" cy="292608"/>
           </a:xfrm>
           <a:prstGeom prst="roundRect">
@@ -54131,7 +54349,7 @@
         </p:nvSpPr>
         <p:spPr>
           <a:xfrm>
-            <a:off x="9303791" y="5328793"/>
+            <a:off x="9303791" y="5429504"/>
             <a:ext cx="822960" cy="292608"/>
           </a:xfrm>
           <a:prstGeom prst="rect">
@@ -54670,7 +54888,7 @@
               </a:spcAft>
             </a:pPr>
             <a:r>
-              <a:rPr sz="2000" b="1">
+              <a:rPr sz="1800" b="1">
                 <a:solidFill>
                   <a:srgbClr val="13294B"/>
                 </a:solidFill>
@@ -54678,11 +54896,11 @@
                 <a:ea typeface="맑은 고딕"/>
                 <a:cs typeface="맑은 고딕"/>
               </a:rPr>
-              <a:t>처리 건의 생성</a:t>
-            </a:r>
-          </a:p>
-          <a:p>
-            <a:pPr algn="l" eaLnBrk="0" marL="182880" indent="-182880">
+              <a:t>입력</a:t>
+            </a:r>
+          </a:p>
+          <a:p>
+            <a:pPr algn="l" eaLnBrk="0" marL="160020" indent="-160020">
               <a:lnSpc>
                 <a:spcPct val="110000"/>
               </a:lnSpc>
@@ -54691,7 +54909,7 @@
               </a:spcAft>
             </a:pPr>
             <a:r>
-              <a:rPr sz="1600" b="0">
+              <a:rPr sz="1400" b="0">
                 <a:solidFill>
                   <a:srgbClr val="1F2A3A"/>
                 </a:solidFill>
@@ -54699,11 +54917,11 @@
                 <a:ea typeface="맑은 고딕"/>
                 <a:cs typeface="맑은 고딕"/>
               </a:rPr>
-              <a:t>• 쿨러 열화가 경보를 내고</a:t>
-            </a:r>
-          </a:p>
-          <a:p>
-            <a:pPr algn="l" eaLnBrk="0" marL="182880" indent="-182880">
+              <a:t>• 앞 실습에서 배포한 내 흐름</a:t>
+            </a:r>
+          </a:p>
+          <a:p>
+            <a:pPr algn="l" eaLnBrk="0" marL="160020" indent="-160020">
               <a:lnSpc>
                 <a:spcPct val="110000"/>
               </a:lnSpc>
@@ -54712,7 +54930,7 @@
               </a:spcAft>
             </a:pPr>
             <a:r>
-              <a:rPr sz="1600" b="0">
+              <a:rPr sz="1400" b="0">
                 <a:solidFill>
                   <a:srgbClr val="1F2A3A"/>
                 </a:solidFill>
@@ -54720,7 +54938,7 @@
                 <a:ea typeface="맑은 고딕"/>
                 <a:cs typeface="맑은 고딕"/>
               </a:rPr>
-              <a:t>• 경보가 내 흐름의 처리 건을 연다</a:t>
+              <a:t>• 포털의 쿨러 열화 버튼</a:t>
             </a:r>
           </a:p>
         </p:txBody>
@@ -54790,7 +55008,7 @@
                 <a:ea typeface="맑은 고딕"/>
                 <a:cs typeface="맑은 고딕"/>
               </a:rPr>
-              <a:t>시작</a:t>
+              <a:t>입력</a:t>
             </a:r>
           </a:p>
         </p:txBody>
@@ -54859,7 +55077,7 @@
       </p:sp>
       <p:pic>
         <p:nvPicPr>
-          <p:cNvPr id="14" name="아이콘:hourglass" descr="hourglass_13294B_1.6.png"/>
+          <p:cNvPr id="14" name="아이콘:list-check" descr="list-check_13294B_1.6.png"/>
           <p:cNvPicPr>
             <a:picLocks noChangeAspect="1"/>
           </p:cNvPicPr>
@@ -54910,7 +55128,7 @@
               </a:spcAft>
             </a:pPr>
             <a:r>
-              <a:rPr sz="2000" b="1">
+              <a:rPr sz="1800" b="1">
                 <a:solidFill>
                   <a:srgbClr val="13294B"/>
                 </a:solidFill>
@@ -54918,11 +55136,11 @@
                 <a:ea typeface="맑은 고딕"/>
                 <a:cs typeface="맑은 고딕"/>
               </a:rPr>
-              <a:t>승인 대기의 확인</a:t>
-            </a:r>
-          </a:p>
-          <a:p>
-            <a:pPr algn="l" eaLnBrk="0" marL="182880" indent="-182880">
+              <a:t>확인할 범위</a:t>
+            </a:r>
+          </a:p>
+          <a:p>
+            <a:pPr algn="l" eaLnBrk="0" marL="160020" indent="-160020">
               <a:lnSpc>
                 <a:spcPct val="110000"/>
               </a:lnSpc>
@@ -54931,7 +55149,7 @@
               </a:spcAft>
             </a:pPr>
             <a:r>
-              <a:rPr sz="1600" b="0">
+              <a:rPr sz="1400" b="0">
                 <a:solidFill>
                   <a:srgbClr val="1F2A3A"/>
                 </a:solidFill>
@@ -54939,11 +55157,11 @@
                 <a:ea typeface="맑은 고딕"/>
                 <a:cs typeface="맑은 고딕"/>
               </a:rPr>
-              <a:t>• 추천안이 나온 뒤 운전원 승인에서</a:t>
-            </a:r>
-          </a:p>
-          <a:p>
-            <a:pPr algn="l" eaLnBrk="0" marL="182880" indent="-182880">
+              <a:t>• 처리 건의 생성과 운전원 승인에서의 대기</a:t>
+            </a:r>
+          </a:p>
+          <a:p>
+            <a:pPr algn="l" eaLnBrk="0" marL="160020" indent="-160020">
               <a:lnSpc>
                 <a:spcPct val="110000"/>
               </a:lnSpc>
@@ -54952,7 +55170,7 @@
               </a:spcAft>
             </a:pPr>
             <a:r>
-              <a:rPr sz="1600" b="0">
+              <a:rPr sz="1400" b="0">
                 <a:solidFill>
                   <a:srgbClr val="1F2A3A"/>
                 </a:solidFill>
@@ -54960,7 +55178,28 @@
                 <a:ea typeface="맑은 고딕"/>
                 <a:cs typeface="맑은 고딕"/>
               </a:rPr>
-              <a:t>• 기다리는 상태를 단계의 상태로 읽는다</a:t>
+              <a:t>• 승인 뒤 명령 · 재관측, 닿은 끝 이벤트</a:t>
+            </a:r>
+          </a:p>
+          <a:p>
+            <a:pPr algn="l" eaLnBrk="0" marL="160020" indent="-160020">
+              <a:lnSpc>
+                <a:spcPct val="110000"/>
+              </a:lnSpc>
+              <a:spcAft>
+                <a:spcPts val="400"/>
+              </a:spcAft>
+            </a:pPr>
+            <a:r>
+              <a:rPr sz="1400" b="0">
+                <a:solidFill>
+                  <a:srgbClr val="1F2A3A"/>
+                </a:solidFill>
+                <a:latin typeface="맑은 고딕"/>
+                <a:ea typeface="맑은 고딕"/>
+                <a:cs typeface="맑은 고딕"/>
+              </a:rPr>
+              <a:t>• 기준 흐름(에이전트 단계 넷, 끊는 타이머)과의 차이</a:t>
             </a:r>
           </a:p>
         </p:txBody>
@@ -55030,7 +55269,7 @@
                 <a:ea typeface="맑은 고딕"/>
                 <a:cs typeface="맑은 고딕"/>
               </a:rPr>
-              <a:t>대기</a:t>
+              <a:t>범위</a:t>
             </a:r>
           </a:p>
         </p:txBody>
@@ -55099,7 +55338,7 @@
       </p:sp>
       <p:pic>
         <p:nvPicPr>
-          <p:cNvPr id="20" name="아이콘:list-check" descr="list-check_13294B_1.6.png"/>
+          <p:cNvPr id="20" name="아이콘:file-text" descr="file-text_13294B_1.6.png"/>
           <p:cNvPicPr>
             <a:picLocks noChangeAspect="1"/>
           </p:cNvPicPr>
@@ -55150,7 +55389,7 @@
               </a:spcAft>
             </a:pPr>
             <a:r>
-              <a:rPr sz="2000" b="1">
+              <a:rPr sz="1800" b="1">
                 <a:solidFill>
                   <a:srgbClr val="13294B"/>
                 </a:solidFill>
@@ -55158,11 +55397,11 @@
                 <a:ea typeface="맑은 고딕"/>
                 <a:cs typeface="맑은 고딕"/>
               </a:rPr>
-              <a:t>완료의 확인</a:t>
-            </a:r>
-          </a:p>
-          <a:p>
-            <a:pPr algn="l" eaLnBrk="0" marL="182880" indent="-182880">
+              <a:t>산출물</a:t>
+            </a:r>
+          </a:p>
+          <a:p>
+            <a:pPr algn="l" eaLnBrk="0" marL="154305" indent="-154305">
               <a:lnSpc>
                 <a:spcPct val="110000"/>
               </a:lnSpc>
@@ -55171,7 +55410,7 @@
               </a:spcAft>
             </a:pPr>
             <a:r>
-              <a:rPr sz="1600" b="0">
+              <a:rPr sz="1350" b="0">
                 <a:solidFill>
                   <a:srgbClr val="1F2A3A"/>
                 </a:solidFill>
@@ -55179,11 +55418,11 @@
                 <a:ea typeface="맑은 고딕"/>
                 <a:cs typeface="맑은 고딕"/>
               </a:rPr>
-              <a:t>• 승인 뒤 명령과 재관측을 거쳐</a:t>
-            </a:r>
-          </a:p>
-          <a:p>
-            <a:pPr algn="l" eaLnBrk="0" marL="182880" indent="-182880">
+              <a:t>• 내 흐름의 처리 건 한 건</a:t>
+            </a:r>
+          </a:p>
+          <a:p>
+            <a:pPr algn="l" eaLnBrk="0" marL="154305" indent="-154305">
               <a:lnSpc>
                 <a:spcPct val="110000"/>
               </a:lnSpc>
@@ -55192,7 +55431,7 @@
               </a:spcAft>
             </a:pPr>
             <a:r>
-              <a:rPr sz="1600" b="0">
+              <a:rPr sz="1350" b="0">
                 <a:solidFill>
                   <a:srgbClr val="1F2A3A"/>
                 </a:solidFill>
@@ -55200,7 +55439,7 @@
                 <a:ea typeface="맑은 고딕"/>
                 <a:cs typeface="맑은 고딕"/>
               </a:rPr>
-              <a:t>• 닿은 끝 이벤트와 결과 보고를 읽는다</a:t>
+              <a:t>• 그 처리 건의 처리 기록</a:t>
             </a:r>
           </a:p>
         </p:txBody>
@@ -55270,7 +55509,7 @@
                 <a:ea typeface="맑은 고딕"/>
                 <a:cs typeface="맑은 고딕"/>
               </a:rPr>
-              <a:t>완료</a:t>
+              <a:t>결과물</a:t>
             </a:r>
           </a:p>
         </p:txBody>
@@ -55339,7 +55578,7 @@
       </p:sp>
       <p:pic>
         <p:nvPicPr>
-          <p:cNvPr id="26" name="아이콘:arrows-right-left" descr="arrows-right-left_13294B_1.6.png"/>
+          <p:cNvPr id="26" name="아이콘:circle-check" descr="circle-check_13294B_1.6.png"/>
           <p:cNvPicPr>
             <a:picLocks noChangeAspect="1"/>
           </p:cNvPicPr>
@@ -55390,7 +55629,7 @@
               </a:spcAft>
             </a:pPr>
             <a:r>
-              <a:rPr sz="2000" b="1">
+              <a:rPr sz="1800" b="1">
                 <a:solidFill>
                   <a:srgbClr val="13294B"/>
                 </a:solidFill>
@@ -55398,11 +55637,11 @@
                 <a:ea typeface="맑은 고딕"/>
                 <a:cs typeface="맑은 고딕"/>
               </a:rPr>
-              <a:t>흐름의 비교</a:t>
-            </a:r>
-          </a:p>
-          <a:p>
-            <a:pPr algn="l" eaLnBrk="0" marL="182880" indent="-182880">
+              <a:t>성공 기준</a:t>
+            </a:r>
+          </a:p>
+          <a:p>
+            <a:pPr algn="l" eaLnBrk="0" marL="160020" indent="-160020">
               <a:lnSpc>
                 <a:spcPct val="110000"/>
               </a:lnSpc>
@@ -55411,7 +55650,7 @@
               </a:spcAft>
             </a:pPr>
             <a:r>
-              <a:rPr sz="1600" b="0">
+              <a:rPr sz="1400" b="0">
                 <a:solidFill>
                   <a:srgbClr val="1F2A3A"/>
                 </a:solidFill>
@@ -55419,11 +55658,11 @@
                 <a:ea typeface="맑은 고딕"/>
                 <a:cs typeface="맑은 고딕"/>
               </a:rPr>
-              <a:t>• 기준 흐름: 에이전트 단계 넷, 끊는 타이머</a:t>
-            </a:r>
-          </a:p>
-          <a:p>
-            <a:pPr algn="l" eaLnBrk="0" marL="182880" indent="-182880">
+              <a:t>• 승인 대기와 끝남을 단계의 상태로 구별해 말한다</a:t>
+            </a:r>
+          </a:p>
+          <a:p>
+            <a:pPr algn="l" eaLnBrk="0" marL="160020" indent="-160020">
               <a:lnSpc>
                 <a:spcPct val="110000"/>
               </a:lnSpc>
@@ -55432,7 +55671,7 @@
               </a:spcAft>
             </a:pPr>
             <a:r>
-              <a:rPr sz="1600" b="0">
+              <a:rPr sz="1400" b="0">
                 <a:solidFill>
                   <a:srgbClr val="1F2A3A"/>
                 </a:solidFill>
@@ -55440,7 +55679,7 @@
                 <a:ea typeface="맑은 고딕"/>
                 <a:cs typeface="맑은 고딕"/>
               </a:rPr>
-              <a:t>• 내 흐름: 에이전트 단계 하나, 끊지 않는 타이머</a:t>
+              <a:t>• 닿은 끝 이벤트와 결과 보고를 읽는다</a:t>
             </a:r>
           </a:p>
         </p:txBody>
@@ -55510,7 +55749,7 @@
                 <a:ea typeface="맑은 고딕"/>
                 <a:cs typeface="맑은 고딕"/>
               </a:rPr>
-              <a:t>비교</a:t>
+              <a:t>판정</a:t>
             </a:r>
           </a:p>
         </p:txBody>
@@ -55900,7 +56139,7 @@
                 <a:ea typeface="맑은 고딕"/>
                 <a:cs typeface="맑은 고딕"/>
               </a:rPr>
-              <a:t>추천안이 나왔지만 팬은 그대로다</a:t>
+              <a:t>경보가 도착해 처리 건이 열렸다</a:t>
             </a:r>
           </a:p>
         </p:txBody>
@@ -55939,7 +56178,25 @@
                 <a:ea typeface="맑은 고딕"/>
                 <a:cs typeface="맑은 고딕"/>
               </a:rPr>
-              <a:t>Task 하나가 끝났다</a:t>
+              <a:t>메시지 시작 이벤트</a:t>
+            </a:r>
+          </a:p>
+          <a:p>
+            <a:pPr algn="l" eaLnBrk="0">
+              <a:lnSpc>
+                <a:spcPct val="110000"/>
+              </a:lnSpc>
+            </a:pPr>
+            <a:r>
+              <a:rPr sz="1400" b="0">
+                <a:solidFill>
+                  <a:srgbClr val="1F2A3A"/>
+                </a:solidFill>
+                <a:latin typeface="맑은 고딕"/>
+                <a:ea typeface="맑은 고딕"/>
+                <a:cs typeface="맑은 고딕"/>
+              </a:rPr>
+              <a:t>정의에서 인스턴스 하나</a:t>
             </a:r>
           </a:p>
         </p:txBody>
@@ -55978,7 +56235,7 @@
                 <a:ea typeface="맑은 고딕"/>
                 <a:cs typeface="맑은 고딕"/>
               </a:rPr>
-              <a:t>Task와 End-to-End</a:t>
+              <a:t>정의와 인스턴스</a:t>
             </a:r>
           </a:p>
         </p:txBody>
@@ -56048,7 +56305,7 @@
                 <a:ea typeface="맑은 고딕"/>
                 <a:cs typeface="맑은 고딕"/>
               </a:rPr>
-              <a:t>경보가 도착해 처리 건이 열렸다</a:t>
+              <a:t>추천안이 나왔지만 팬은 그대로다</a:t>
             </a:r>
           </a:p>
         </p:txBody>
@@ -56087,25 +56344,7 @@
                 <a:ea typeface="맑은 고딕"/>
                 <a:cs typeface="맑은 고딕"/>
               </a:rPr>
-              <a:t>메시지 시작 이벤트</a:t>
-            </a:r>
-          </a:p>
-          <a:p>
-            <a:pPr algn="l" eaLnBrk="0">
-              <a:lnSpc>
-                <a:spcPct val="110000"/>
-              </a:lnSpc>
-            </a:pPr>
-            <a:r>
-              <a:rPr sz="1400" b="0">
-                <a:solidFill>
-                  <a:srgbClr val="1F2A3A"/>
-                </a:solidFill>
-                <a:latin typeface="맑은 고딕"/>
-                <a:ea typeface="맑은 고딕"/>
-                <a:cs typeface="맑은 고딕"/>
-              </a:rPr>
-              <a:t>정의에서 인스턴스 하나</a:t>
+              <a:t>Task 하나가 끝났다</a:t>
             </a:r>
           </a:p>
         </p:txBody>
@@ -56144,7 +56383,7 @@
                 <a:ea typeface="맑은 고딕"/>
                 <a:cs typeface="맑은 고딕"/>
               </a:rPr>
-              <a:t>정의와 인스턴스</a:t>
+              <a:t>Task와 End-to-End</a:t>
             </a:r>
           </a:p>
         </p:txBody>
@@ -56510,7 +56749,7 @@
                 <a:ea typeface="맑은 고딕"/>
                 <a:cs typeface="맑은 고딕"/>
               </a:rPr>
-              <a:t>10분이 지나 알림이 나갔다</a:t>
+              <a:t>운전원이 기한 안에 승인했다</a:t>
             </a:r>
           </a:p>
         </p:txBody>
@@ -56549,7 +56788,7 @@
                 <a:ea typeface="맑은 고딕"/>
                 <a:cs typeface="맑은 고딕"/>
               </a:rPr>
-              <a:t>비중단형 경계 타이머</a:t>
+              <a:t>비중단형 경계 타이머가 함께 거둬짐</a:t>
             </a:r>
           </a:p>
           <a:p>
@@ -56567,7 +56806,7 @@
                 <a:ea typeface="맑은 고딕"/>
                 <a:cs typeface="맑은 고딕"/>
               </a:rPr>
-              <a:t>토큰이 둘이 된다</a:t>
+              <a:t>늦었다면 알림 가지만 열림</a:t>
             </a:r>
           </a:p>
         </p:txBody>
@@ -57486,7 +57725,7 @@
                 <a:ea typeface="맑은 고딕"/>
                 <a:cs typeface="맑은 고딕"/>
               </a:rPr>
-              <a:t>게이트웨이</a:t>
+              <a:t>경계 이벤트</a:t>
             </a:r>
           </a:p>
         </p:txBody>
@@ -57525,7 +57764,7 @@
                 <a:ea typeface="맑은 고딕"/>
                 <a:cs typeface="맑은 고딕"/>
               </a:rPr>
-              <a:t>Gateway</a:t>
+              <a:t>Boundary Event</a:t>
             </a:r>
           </a:p>
           <a:p>
@@ -57543,7 +57782,7 @@
                 <a:ea typeface="맑은 고딕"/>
                 <a:cs typeface="맑은 고딕"/>
               </a:rPr>
-              <a:t>흐름이 조건에 따라 갈라지거나 합쳐지는 지점</a:t>
+              <a:t>작업 테두리에 붙어 그 작업이 진행 중일 때 생기는 일에 반응하는 이벤트</a:t>
             </a:r>
           </a:p>
         </p:txBody>
@@ -57613,7 +57852,7 @@
                 <a:ea typeface="맑은 고딕"/>
                 <a:cs typeface="맑은 고딕"/>
               </a:rPr>
-              <a:t>경계 이벤트</a:t>
+              <a:t>프로세스 엔진</a:t>
             </a:r>
           </a:p>
         </p:txBody>
@@ -57652,7 +57891,7 @@
                 <a:ea typeface="맑은 고딕"/>
                 <a:cs typeface="맑은 고딕"/>
               </a:rPr>
-              <a:t>Boundary Event</a:t>
+              <a:t>Process Engine</a:t>
             </a:r>
           </a:p>
           <a:p>
@@ -57670,7 +57909,7 @@
                 <a:ea typeface="맑은 고딕"/>
                 <a:cs typeface="맑은 고딕"/>
               </a:rPr>
-              <a:t>작업 테두리에 붙어 그 작업이 진행 중일 때 생기는 일에 반응하는 이벤트</a:t>
+              <a:t>프로세스 정의를 읽어 작업을 차례로 열고 결과를 넘기는 소프트웨어</a:t>
             </a:r>
           </a:p>
         </p:txBody>
@@ -57740,7 +57979,7 @@
                 <a:ea typeface="맑은 고딕"/>
                 <a:cs typeface="맑은 고딕"/>
               </a:rPr>
-              <a:t>프로세스 엔진</a:t>
+              <a:t>오케스트레이션</a:t>
             </a:r>
           </a:p>
         </p:txBody>
@@ -57779,7 +58018,7 @@
                 <a:ea typeface="맑은 고딕"/>
                 <a:cs typeface="맑은 고딕"/>
               </a:rPr>
-              <a:t>Process Engine</a:t>
+              <a:t>Orchestration</a:t>
             </a:r>
           </a:p>
           <a:p>
@@ -57797,7 +58036,7 @@
                 <a:ea typeface="맑은 고딕"/>
                 <a:cs typeface="맑은 고딕"/>
               </a:rPr>
-              <a:t>프로세스 정의를 읽어 작업을 차례로 열고 결과를 넘기는 소프트웨어</a:t>
+              <a:t>중앙의 조정자가 작업의 순서와 호출을 이끄는 방식</a:t>
             </a:r>
           </a:p>
         </p:txBody>

--- a/산출물/교재/PPTX/통합반_온라인/통합반_09일차.pptx
+++ b/산출물/교재/PPTX/통합반_온라인/통합반_09일차.pptx
@@ -1555,7 +1555,7 @@
           <a:lstStyle/>
           <a:p>
             <a:r>
-              <a:t>여기서는 BPM의 활동을 분석, 설계, 실행, 모니터링, 개선의 다섯 단계로 묶어 봅니다. 자료마다 단계의 이름과 묶음은 조금 달라도, 실행 결과를 다음 개선에 반영한다는 원리는 같습니다. 위쪽 가운데의 분석에서 시작해서 시계 방향으로 돌아 볼게요. 단계마다 붙은 그림을 보면 하는 일이 짐작되실 거예요. 출발점의 돋보기가 분석입니다. 지금의 업무를 조사하는 단계죠. 오른쪽 위의 흐름 그림은 설계, 바꿀 흐름을 그리는 단계고요. 오른쪽 아래 재생 표시는 실행, 그린 대로 실제로 수행하는 단계입니다. 왼쪽 아래 관측 화면은 모니터링, 그 결과를 지켜보는 단계예요. 그리고 왼쪽 위의 오르는 막대가 개선, 지켜보면서 찾은 문제를 고치는 단계입니다. 화살표를 잘 보시면, 왼쪽 위 개선에서 분석으로 돌아가는 화살표만 파랗게 그려져 있죠. 개선에서 고친 내용이 다시 분석의 대상이 되기 때문입니다. 그래서 직선이 아니라 고리 모양이에요. 끝없이 돈다는 뜻이 아니라, 업무와 환경이 바뀌는 한 계속 돌아간다는 뜻입니다. [출처·낭독 제외] https://www.ibm.com/think/topics/business-process-management</a:t>
+              <a:t>여기서는 BPM의 활동을 분석, 설계, 실행, 모니터링, 개선의 다섯 단계로 묶어 봅니다. 자료마다 단계의 이름과 묶음은 조금 달라도, 실행 결과를 다음 개선에 반영한다는 원리는 같습니다. 위쪽 가운데의 분석에서 시작해서 시계 방향으로 돌아 볼게요. 단계마다 붙은 그림을 보면 하는 일이 짐작되실 거예요. 출발점의 돋보기가 분석입니다. 지금의 업무를 조사하는 단계죠. 오른쪽 위의 흐름 그림은 설계, 바꿀 흐름을 그리는 단계고요. 오른쪽 아래 재생 표시는 실행, 그린 대로 실제로 수행하는 단계입니다. 왼쪽 아래 관측 화면은 모니터링, 그 결과를 지켜보는 단계예요. 그리고 왼쪽 위의 오르는 막대가 개선, 지켜보면서 찾은 문제를 고치는 단계입니다. 화살표를 잘 보시면, 왼쪽 위 개선에서 분석으로 돌아가는 화살표만 파랗게 그려져 있죠. 개선에서 고친 내용이 다시 분석의 대상이 되기 때문입니다. 그래서 직선이 아니라 고리 모양이에요. 끝없이 돈다는 뜻이 아니라, 업무와 환경이 바뀌는 한 계속 돌아간다는 뜻입니다.</a:t>
             </a:r>
           </a:p>
         </p:txBody>
@@ -1975,7 +1975,7 @@
           <a:lstStyle/>
           <a:p>
             <a:r>
-              <a:t>그 공통 약속이 BPMN입니다. 업무 프로세스를 표현하는 표준으로, 도형과 선의 의미를 정해 두었습니다. 앞에서 판단 규칙을 다룬 DMN을 정한 OMG가 BPMN도 관리하고, BPMN 2.0은 국제 표준으로도 정해져 있습니다. 공통 표기가 있으면 현업 담당자는 업무의 순서와 책임을 확인하고, 구현하는 쪽은 실행할 흐름을 같은 모델에서 검토할 수 있어요. 문장만으로 놓치던 갈림과 대기를 함께 확인하기 쉬워지는 겁니다. 다만 BPMN으로 그린 모든 그림이 곧바로 실행되는 것은 아닙니다. 업무 설명용 모델도 있고, 실행에 필요한 조건과 연결까지 갖춘 모델도 있어요. 실행 시스템이 지원하는 요소와 데이터, 담당, 외부 호출을 확인해야 합니다. 같은 표준을 쓴다는 이유만으로 어떤 제품에서든 수정 없이 실행된다고 보장할 수는 없어요. HYD 실습에서는 편집기에서 그린 파일을 가져와 지원 범위를 검사하고, 에이전트와 시스템 연결을 더해 실행 정의를 만듭니다. 우리가 얻으려는 가치는 사람이 합의한 흐름과 실제 실행을 서로 대조할 수 있게 만드는 데 있습니다. [출처·낭독 제외] https://www.omg.org/spec/BPMN/2.0.2/PDF</a:t>
+              <a:t>그 공통 약속이 BPMN입니다. 업무 프로세스를 표현하는 표준으로, 도형과 선의 의미를 정해 두었습니다. 앞에서 판단 규칙을 다룬 DMN을 정한 OMG가 BPMN도 관리하고, BPMN 2.0은 국제 표준으로도 정해져 있습니다. 공통 표기가 있으면 현업 담당자는 업무의 순서와 책임을 확인하고, 구현하는 쪽은 실행할 흐름을 같은 모델에서 검토할 수 있어요. 문장만으로 놓치던 갈림과 대기를 함께 확인하기 쉬워지는 겁니다. 다만 BPMN으로 그린 모든 그림이 곧바로 실행되는 것은 아닙니다. 업무 설명용 모델도 있고, 실행에 필요한 조건과 연결까지 갖춘 모델도 있어요. 실행 시스템이 지원하는 요소와 데이터, 담당, 외부 호출을 확인해야 합니다. 같은 표준을 쓴다는 이유만으로 어떤 제품에서든 수정 없이 실행된다고 보장할 수는 없어요. HYD 실습에서는 편집기에서 그린 파일을 가져와 지원 범위를 검사하고, 에이전트와 시스템 연결을 더해 실행 정의를 만듭니다. 우리가 얻으려는 가치는 사람이 합의한 흐름과 실제 실행을 서로 대조할 수 있게 만드는 데 있습니다.</a:t>
             </a:r>
           </a:p>
         </p:txBody>
@@ -2255,7 +2255,7 @@
           <a:lstStyle/>
           <a:p>
             <a:r>
-              <a:t>먼저 원부터요. 원은 이벤트입니다. 프로세스에서 일어나는 사건을 나타내죠. 화면의 원 세 개, 테두리를 견주어 보세요. 왼쪽, 테두리가 가는 원은 시작 이벤트예요. 프로세스를 여는 사건입니다. 가운데는 안에 봉투가 그려진 시작 이벤트예요. 메시지를 받으면 프로세스를 여는, 메시지 시작 이벤트입니다. 긴급 대응 프로세스의 쿨러 과열 경보가 바로 이 모양이죠. 경보 메시지가 도착하면 열리니까요. 앞에서 정한 시작 조건이 그림에서는 이 원 하나로 표현되는 겁니다. 오른쪽, 테두리가 굵은 원은 끝 이벤트예요. 한 갈래를 닫는 사건입니다. 앞에서 완료 조건을 정할 때, 프로세스에 정해 둔 끝 자리에 닿아야 끝난 것이라고 했죠. 흐름의 끝을 나타내는 것이 이 굵은 원, 끝 이벤트입니다. 긴급 대응 프로세스에는 끝, 거절 종결, 알림, 이렇게 세 개가 있어요. 끝 이벤트가 세 개라는 점, 기억해 두세요. 완료 조건 표에서 본 여러 경우가 각자 자기 끝으로 닫히는 겁니다. 이 그림의 일반 끝 이벤트는 도착한 갈래를 마칩니다. 알림 갈래가 끝나도 승인이 남아 있으면 처리 건 전체는 끝나지 않아요. 또 정상과 미달은 같은 끝으로 모이므로, 어떤 끝에 닿았는지에 더해 결과 보고도 읽어야 합니다. [출처·낭독 제외] https://www.omg.org/spec/BPMN/2.0.2/PDF</a:t>
+              <a:t>먼저 원부터요. 원은 이벤트입니다. 프로세스에서 일어나는 사건을 나타내죠. 화면의 원 세 개, 테두리를 견주어 보세요. 왼쪽, 테두리가 가는 원은 시작 이벤트예요. 프로세스를 여는 사건입니다. 가운데는 안에 봉투가 그려진 시작 이벤트예요. 메시지를 받으면 프로세스를 여는, 메시지 시작 이벤트입니다. 긴급 대응 프로세스의 쿨러 과열 경보가 바로 이 모양이죠. 경보 메시지가 도착하면 열리니까요. 앞에서 정한 시작 조건이 그림에서는 이 원 하나로 표현되는 겁니다. 오른쪽, 테두리가 굵은 원은 끝 이벤트예요. 한 갈래를 닫는 사건입니다. 앞에서 완료 조건을 정할 때, 프로세스에 정해 둔 끝 자리에 닿아야 끝난 것이라고 했죠. 흐름의 끝을 나타내는 것이 이 굵은 원, 끝 이벤트입니다. 긴급 대응 프로세스에는 끝, 거절 종결, 알림, 이렇게 세 개가 있어요. 끝 이벤트가 세 개라는 점, 기억해 두세요. 완료 조건 표에서 본 여러 경우가 각자 자기 끝으로 닫히는 겁니다. 이 그림의 일반 끝 이벤트는 도착한 갈래를 마칩니다. 알림 갈래가 끝나도 승인이 남아 있으면 처리 건 전체는 끝나지 않아요. 또 정상과 미달은 같은 끝으로 모이므로, 어떤 끝에 닿았는지에 더해 결과 보고도 읽어야 합니다.</a:t>
             </a:r>
           </a:p>
         </p:txBody>
@@ -2395,7 +2395,7 @@
           <a:lstStyle/>
           <a:p>
             <a:r>
-              <a:t>이번에는 작업과 작업을 잇는 선, 그리고 흐름이 갈라지는 자리를 볼게요. 화면 왼쪽의 운전원 승인에서 출발하세요. 작업을 잇는 실선 화살표, 이게 시퀀스 흐름입니다. 화살표 방향이 곧 순서예요. 마름모는 게이트웨이입니다. 흐름이 갈라지거나 합쳐지는 지점이죠. 안에 가위표가 그려진 건 배타 게이트웨이라고 해요. 나가는 선 가운데 조건이 참인 하나로만 흐름을 보냅니다. 운전원 승인 뒤의 승인 여부 게이트웨이를 보세요. 앞 장 전체 그림에서 아래로 내려가던 바로 그 갈래가 여기 있어요. 승인이면 위쪽 냉각 명령으로 가고, 거절이면 아래쪽 거절 보고로 갑니다. 둘 중 하나로만 가지, 양쪽으로 동시에 가지는 않아요. 배타라는 말이 바로 그 뜻이에요. 승인과 거절이 함께 일어날 수는 없으니까요. 이 실습에서 갈림을 마름모로 명시하는 이유도 여기에 있어요. 한 작업에서 조건 없는 선을 두 갈래로 뽑으면 두 경로가 함께 진행될 수 있습니다. 표준에는 조건부 시퀀스 흐름도 있으므로 모든 갈림에 마름모가 필수인 것은 아닙니다. 승인과 거절이 동시에 일어나는 그림이 되어 버리는 거죠. 그래서 실습에서 그린 그림을 HYD에 가져올 때도, 마름모 없이 갈라진 흐름은 등록을 받지 않습니다.</a:t>
+              <a:t>이번에는 작업과 작업을 잇는 선, 그리고 흐름이 갈라지는 자리를 볼게요. 화면 왼쪽의 운전원 승인에서 출발하세요. 작업을 잇는 실선 화살표, 이게 시퀀스 흐름입니다. 화살표 방향이 곧 순서예요. 마름모는 게이트웨이입니다. 흐름이 갈라지거나 합쳐지는 지점이죠. 안에 가위표가 그려진 건 배타 게이트웨이라고 해요. 나가는 선 가운데 조건이 참인 하나로만 흐름을 보냅니다. 운전원 승인 뒤의 승인 여부 게이트웨이를 보세요. 앞 장 전체 그림에서 아래로 내려가던 바로 그 갈래가 여기 있어요. 승인이면 위쪽 냉각 명령으로 가고, 거절이면 아래쪽 거절 보고로 갑니다. 둘 중 하나로만 가지, 양쪽으로 동시에 가지는 않아요. 배타라는 말이 바로 그 뜻이에요. 승인과 거절이 함께 일어날 수는 없으니까요. 이 실습에서 갈림을 마름모로 명시하는 이유도 여기에 있어요. 한 작업에서 조건 없는 선을 두 갈래로 뽑으면 두 경로가 함께 진행될 수 있습니다. 승인과 거절이 동시에 일어나는 그림이 되어 버리는 거죠. 다만 표준에는 조건부 시퀀스 흐름도 있으므로 모든 갈림에 마름모가 필수인 것은 아닙니다. 그래서 실습에서 그린 그림을 HYD에 가져올 때도, 마름모 없이 갈라진 흐름은 등록을 받지 않습니다.</a:t>
             </a:r>
           </a:p>
         </p:txBody>
@@ -2605,7 +2605,7 @@
           <a:lstStyle/>
           <a:p>
             <a:r>
-              <a:t>작업을 맡는 쪽을 그림에서 어떻게 읽을까요? 바깥 테두리인 풀과, 그 안을 나눈 레인을 구분해 보세요. 풀은 참여자를 나타내는 영역입니다. 조직이나 시스템을 참여자로 표현할 수 있어요. 레인은 풀 안의 활동을 묶어 구분하는 칸이고, 여기서는 담당 역할을 나타내는 데 썼습니다. 원인 진단은 에이전트 레인, 승인은 담당자 레인, 냉각 명령은 시스템 레인에 놓였죠. 레인의 분류 기준은 모델을 만드는 사람이 정합니다. 언제나 역할이어야 하는 것은 아니에요. 또 그림에서 상자를 옮겼다는 사실만으로 실제 계정 권한이나 담당 시스템이 바뀌는 것도 아닙니다. 이 수업에서는 레인에 표시한 수행 주체와 실행 연결을 맞춰 봅니다. HYD는 칸 이름이 역할 이름과 일치하면 연결을 제안하고 사람이 바꿀 수 있게 합니다. 레인과 단계의 담당이 어긋나는지도 검사하죠. 그림이 나타내는 책임과 실제 배정이 일치하는지를 확인하는 과정입니다. 같은 풀 안에서는 레인이 달라도 시퀀스 흐름으로 이을 수 있습니다. 서로 다른 풀 사이의 주고받음은 다음에 볼 메시지 흐름으로 구별합니다. [출처·낭독 제외] https://www.omg.org/spec/BPMN/2.0.2/PDF</a:t>
+              <a:t>작업을 맡는 쪽을 그림에서 어떻게 읽을까요? 바깥 테두리인 풀과, 그 안을 나눈 레인을 구분해 보세요. 풀은 참여자를 나타내는 영역입니다. 조직이나 시스템을 참여자로 표현할 수 있어요. 레인은 풀 안의 활동을 묶어 구분하는 칸이고, 여기서는 담당 역할을 나타내는 데 썼습니다. 원인 진단은 에이전트 레인, 승인은 담당자 레인, 냉각 명령은 시스템 레인에 놓였죠. 레인의 분류 기준은 모델을 만드는 사람이 정합니다. 언제나 역할이어야 하는 것은 아니에요. 또 그림에서 상자를 옮겼다는 사실만으로 실제 계정 권한이나 담당 시스템이 바뀌는 것도 아닙니다. 이 수업에서는 레인에 표시한 수행 주체와 실행 연결을 맞춰 봅니다. HYD는 칸 이름이 역할 이름과 일치하면 연결을 제안하고 사람이 바꿀 수 있게 합니다. 레인과 단계의 담당이 어긋나는지도 검사하죠. 그림이 나타내는 책임과 실제 배정이 일치하는지를 확인하는 과정입니다. 같은 풀 안에서는 레인이 달라도 시퀀스 흐름으로 이을 수 있습니다. 서로 다른 풀 사이의 주고받음은 다음에 볼 메시지 흐름으로 구별합니다.</a:t>
             </a:r>
           </a:p>
         </p:txBody>
@@ -2815,7 +2815,7 @@
           <a:lstStyle/>
           <a:p>
             <a:r>
-              <a:t>이제 남은 물음으로 넘어갈게요. 운전원이 응답하지 않으면 어떻게 될까요? 작업이 끝나기를 기다리는 사이에 무슨 일이 일어나면, 작업 테두리에 붙인 경계 이벤트로 그립니다. 화면의 두 그림을 보면, 둘 다 작업 아래 테두리에 겹테두리 원이 붙어 있어요. 원 안에 시계가 그려져 있죠. 정한 기간이 지나면 발생하는 타이머입니다. 테두리에 붙인다는 게 중요해요. 이 타이머는 붙은 작업이 진행 중일 때만 살아 있습니다. 작업이 기한 안에 끝나면, 테두리의 타이머도 함께 거둬져요. 운전원이 제때 승인하면 지연 알림은 나가지 않는 거죠. 기한이 지났을 때 무슨 일이 생기는지는 두 그림이 서로 다릅니다. 왼쪽은 실선 겹테두리, 중단형이에요. 타이머가 발생하면 붙어 있던 작업을 끊고 다른 가지로 갑니다. 그래서 위의 작업이 흐려져 있고, 가위표가 붙어 있죠. 오른쪽은 점선 겹테두리, 비중단형입니다. 타이머가 발생해도 작업은 그대로 두고, 가지를 하나 더 열어요. 그래서 위의 작업이 진한 채로 남아 있습니다. 선이 실선이냐 점선이냐, 이것 하나로 결과가 완전히 달라집니다. 끊느냐, 그대로 두느냐죠. 문장으로 적었을 때 알 수 없었던 물음, 기억나세요? 알림 뒤에도 기다리느냐. 그게 바로 이 구분으로 그림에 드러나는 겁니다. BPMN에는 중간 타이머 같은 다른 표현도 있지만, 현재 HYD 가져오기에서 지원하는 기다림은 작업의 경계 타이머입니다. 흐름 중간에 타이머를 따로 세워 둔 그림은 가져올 때 받지 않으니, 실습에서도 타이머는 작업 테두리에 붙여 그려요. [출처·낭독 제외] https://www.omg.org/spec/BPMN/2.0.2/PDF</a:t>
+              <a:t>이제 남은 물음으로 넘어갈게요. 운전원이 응답하지 않으면 어떻게 될까요? 작업이 끝나기를 기다리는 사이에 무슨 일이 일어나면, 작업 테두리에 붙인 경계 이벤트로 그립니다. 화면의 두 그림을 보면, 둘 다 작업 아래 테두리에 겹테두리 원이 붙어 있어요. 원 안에 시계가 그려져 있죠. 정한 기간이 지나면 발생하는 타이머입니다. 테두리에 붙인다는 게 중요해요. 이 타이머는 붙은 작업이 진행 중일 때만 살아 있습니다. 작업이 기한 안에 끝나면, 테두리의 타이머도 함께 거둬져요. 운전원이 제때 승인하면 지연 알림은 나가지 않는 거죠. 기한이 지났을 때 무슨 일이 생기는지는 두 그림이 서로 다릅니다. 왼쪽은 실선 겹테두리, 중단형이에요. 타이머가 발생하면 붙어 있던 작업을 끊고 다른 가지로 갑니다. 그래서 위의 작업이 흐려져 있고, 가위표가 붙어 있죠. 오른쪽은 점선 겹테두리, 비중단형입니다. 타이머가 발생해도 작업은 그대로 두고, 가지를 하나 더 열어요. 그래서 위의 작업이 진한 채로 남아 있습니다. 선이 실선이냐 점선이냐, 이것 하나로 결과가 완전히 달라집니다. 끊느냐, 그대로 두느냐죠. 문장으로 적었을 때 알 수 없었던 물음, 기억나세요? 알림 뒤에도 기다리느냐. 그게 바로 이 구분으로 그림에 드러나는 겁니다. BPMN에는 중간 타이머 같은 다른 표현도 있지만, 현재 HYD 가져오기에서 지원하는 기다림은 작업의 경계 타이머입니다. 흐름 중간에 타이머를 따로 세워 둔 그림은 가져올 때 받지 않으니, 실습에서도 타이머는 작업 테두리에 붙여 그려요.</a:t>
             </a:r>
           </a:p>
         </p:txBody>
@@ -3305,7 +3305,7 @@
           <a:lstStyle/>
           <a:p>
             <a:r>
-              <a:t>그 실행 주체가 프로세스 엔진이에요. 프로세스의 정의를 읽어서 그대로 실행하는 소프트웨어입니다. HYD에서는 경보로 열린 처리 건을 이 엔진이 정의의 조건에 따라 진행을 관리합니다. 앞에서 계속 처리를 이끄는 시스템이라고 불렀던 게 바로 이 엔진입니다. 재관측과 결과 보고를 직접 맡던 그쪽이죠. 둘째 줄은 오케스트레이션이에요. 중앙의 조정자 하나가 작업의 순서와 호출을 이끄는 방식입니다. 사람, 에이전트, 시스템은 각자 자기 작업만 하고, 다음이 누구 차례인지는 엔진이 정해요. 이렇게 한 곳이 순서를 쥐고 있으면, 처리 건이 지금 어디까지 왔는지와 누가 무엇을 했는지를 엔진 한 곳에서 볼 수 있습니다. 사람과 에이전트와 시스템에게 하나하나 물어보러 다닐 필요가 없죠. 셋째 줄은 비유입니다. 오케스트라에서 연주자는 자기 악기만 맡고, 언제 들어올지는 지휘자가 알려 주죠. 여기까지가 닮은 점이고요, 다른 점도 있어요. 지휘자는 차례만 알려 주지만, 엔진은 작업의 결과를 받아서 다음 작업에 넘기고, 그 과정을 기록까지 하거든요. 여기서 중앙이라는 말은 조정 책임이 한곳에 있다는 뜻입니다. 반드시 컴퓨터 한 대에서 모두 실행된다는 뜻은 아니에요. 연결된 시스템이 실패하면 엔진도 그 결과를 받아 멈추거나 정해 둔 대응 경로로 보내야 합니다. 어떤 엔진을 고르더라도 진행 상태와 실패 이유, 다시 처리할 기준이 남는지를 확인해야 해요.</a:t>
+              <a:t>그 실행 주체가 프로세스 엔진이에요. 프로세스의 정의를 읽어서 그대로 실행하는 소프트웨어입니다. HYD에서는 이 엔진이 정의의 조건에 따라 경보로 열린 처리 건의 진행을 관리합니다. 앞에서 계속 처리를 이끄는 시스템이라고 불렀던 게 바로 이 엔진입니다. 재관측과 결과 보고를 직접 맡던 그쪽이죠. 둘째 줄은 오케스트레이션이에요. 중앙의 조정자 하나가 작업의 순서와 호출을 이끄는 방식입니다. 사람, 에이전트, 시스템은 각자 자기 작업만 하고, 다음이 누구 차례인지는 엔진이 정해요. 이렇게 한 곳이 순서를 쥐고 있으면, 처리 건이 지금 어디까지 왔는지와 누가 무엇을 했는지를 엔진 한 곳에서 볼 수 있습니다. 사람과 에이전트와 시스템에게 하나하나 물어보러 다닐 필요가 없죠. 셋째 줄은 비유입니다. 오케스트라에서 연주자는 자기 악기만 맡고, 언제 들어올지는 지휘자가 알려 주죠. 여기까지가 닮은 점이고요, 다른 점도 있어요. 지휘자는 차례만 알려 주지만, 엔진은 작업의 결과를 받아서 다음 작업에 넘기고, 그 과정을 기록까지 하거든요. 여기서 중앙이라는 말은 조정 책임이 한곳에 있다는 뜻입니다. 반드시 컴퓨터 한 대에서 모두 실행된다는 뜻은 아니에요. 연결된 시스템이 실패하면 엔진도 그 결과를 받아 멈추거나 정해 둔 대응 경로로 보내야 합니다. 어떤 엔진을 고르더라도 진행 상태와 실패 이유, 다시 처리할 기준이 남는지를 확인해야 해요.</a:t>
             </a:r>
           </a:p>
         </p:txBody>
@@ -4565,7 +4565,7 @@
           <a:lstStyle/>
           <a:p>
             <a:r>
-              <a:t>두 번째 실습에서는 작은 승인 절차에서 익힐 조작을 바탕으로 긴급 대응 프로세스를 그릴 겁니다. 지금까지 읽은 그림이 기준이고, 레인과 타이머가 더해집니다. 풀 하나를 담당자, 에이전트, 시스템의 세 레인으로 나누고 경보, 진단과 제안, 승인, 냉각 명령, 재관측, 작업지시와 보고를 배치합니다. 승인과 거절뿐 아니라 회복과 미달도 나눠요. 승인 작업에는 대기를 끊지 않고 알림 갈래를 여는 비중단형 타이머를 붙입니다. 결과물은 다음 연결 실습에서 쓸 BPMN 파일입니다. 완성 그림과 요소, 갈림, 타이머의 종류를 비교하고 각 경로를 따라가 보세요. 거절했는데 명령으로 이어지지 않는지, 알림이 끝났다고 승인까지 끝난 것으로 그리지 않았는지가 중요한 확인점입니다.</a:t>
+              <a:t>두 번째 실습에서는 작은 승인 절차에서 익힐 조작을 바탕으로 긴급 대응 프로세스를 그릴 겁니다. 지금까지 읽은 그림이 기준이고, 레인과 타이머가 더해집니다. 풀 하나를 담당자, 에이전트, 시스템의 세 레인으로 나누고 경보, 진단과 제안, 승인, 냉각 명령, 재관측, 작업지시와 보고를 배치합니다. 승인과 거절뿐 아니라 회복과 미달도 나눠요. 승인 작업에는 대기를 끊지 않고 알림 갈래를 여는 비중단형 타이머를 붙입니다. 결과물은 다음 연결 실습에서 쓸 BPMN 파일입니다. 완성 그림과 요소, 갈림, 타이머의 종류를 비교하고 각 경로를 따라가 보겠습니다. 거절했는데 명령으로 이어지지 않는지, 알림이 끝났다고 승인까지 끝난 것으로 그리지 않았는지가 중요한 확인점입니다.</a:t>
             </a:r>
           </a:p>
         </p:txBody>
@@ -4635,7 +4635,7 @@
           <a:lstStyle/>
           <a:p>
             <a:r>
-              <a:t>세 번째 실습에서는 그렇게 만들 파일을 실행 시스템에 연결합니다. BPMN에는 업무의 흐름이 있지만, 실제로 어떤 에이전트를 부르고 어느 계정이 승인하며 어떤 서비스를 실행할지는 더 정해야 하죠. 실습에서는 기존 냉각 긴급 대응 에이전트와 운전원 역할을 연결하고, 시작 경보, 시스템 작업, 분기 조건과 타이머 기한을 설정합니다. HYD 포털과 준비된 연결 자료를 사용하며, 화면에 없는 세부 연결은 제공 자료와 검증된 절차로 보완할 범위입니다. 연결을 마치면 사전 검사를 하고 문제를 고친 뒤 판본으로 등록하고 배포할 겁니다. 결과물은 등록된 정의와 경보를 받을 배포 상태예요. 사전 검사 통과는 정해진 정적 검사를 만족했다는 뜻입니다. 실제 서비스 접속과 실행 결과는 다음 실습에서 확인해야 합니다. 공용 HYD 환경에서는 같은 경보에 대해 마지막으로 배포한 흐름이 선택됩니다. 그래서 학생별 환경을 쓰거나 순서를 정해 진행하고, 실행하기 전에 어떤 흐름이 그 경보를 받는지 확인합니다.</a:t>
+              <a:t>세 번째 실습에서는 그렇게 만들 파일을 실행 시스템에 연결합니다. BPMN에는 업무의 흐름이 있지만, 실제로 어떤 에이전트를 부르고 어느 계정이 승인하며 어떤 서비스를 실행할지는 더 정해야 하죠. 실습에서는 기존 냉각 긴급 대응 에이전트와 운전원 역할을 연결하고, 시작 경보, 시스템 작업, 분기 조건과 타이머 기한을 설정합니다. HYD 포털과 준비된 연결 자료를 사용하며, 화면에 없는 세부 연결은 제공 자료와 검증된 절차로 보완할 범위입니다. 연결을 마치면 사전 검사를 하고 문제를 고친 뒤 판본으로 등록하고 배포할 겁니다. 결과물은 등록된 정의와 경보를 받을 배포 상태예요. 사전 검사 통과는 정해진 정적 검사를 만족했다는 뜻입니다. 실제 서비스 접속과 실행 결과는 다음 실습에서 확인해야 합니다. 공용 HYD 환경에서는 같은 경보에 대해 마지막으로 배포한 흐름이 선택됩니다. 그래서 강사용으로 배정된 교육 환경과 배포 순서를 확인하고, 실행하기 전에 어떤 흐름이 그 경보를 받는지 확인하겠습니다.</a:t>
             </a:r>
           </a:p>
         </p:txBody>
@@ -4775,7 +4775,7 @@
           <a:lstStyle/>
           <a:p>
             <a:r>
-              <a:t>실습에 이어 이번 회차를 정리하겠습니다. 처리 건에서 승인 대기와 끝난 상태를 구별해 보셨죠. 아직 기대한 결과를 얻지 못했다면, 어디까지 확인했고 무엇이 남았는지도 함께 적어 두세요. 그 눈으로 쿨러 사건 한 건을, 이번 회차에 배운 말로 다시 읽어 보겠습니다. 표 왼쪽의 장면마다 프로세스의 어떤 개념인지 먼저 말해 보세요. 그리고 오른쪽 열의 짝이 왜 서로 다른지 판단해 보세요. 첫 줄, 경보가 도착해서 처리 건이 열린 건, 메시지 시작 이벤트가 정의 하나에서 인스턴스 하나를 만든 거예요. 둘째 줄, 추천안이 나왔지만 팬은 그대로인 장면이죠. Task 하나가 끝난 순간입니다. End-to-End는 아직 진행 중이고요. 셋째 줄, 운전원 승인에서 기다리는 건 토큰이 사용자 작업에 머문 정상 상태입니다. 오류가 아니에요. 넷째 줄, 승인 여부 게이트웨이에서 승인 쪽으로 간 건 에이전트가 판단해서가 아닙니다. 운전원 승인이 낸 변수를 읽는 조건이 정한 거죠. 다섯째 줄, 운전원이 기한 안에 승인한 장면이에요. 승인 작업이 끝나면서 테두리의 비중단형 타이머도 함께 거둬졌습니다. 승인이 늦었다면 알림 가지만 열리고, 승인 작업은 그대로 기다렸겠죠. 알림이 나가는 것과 처리 건이 끝나는 것은 다른 일입니다. 마지막 줄, 쿨러 사건이 정상 보고로 끝난 건 끝 이벤트에 닿은 COMPLETED입니다. 그런데 거절로 닫힌 처리 건도 COMPLETED였죠. 성공인지 아닌지는 끝 이벤트와 결과 보고로 판단합니다. 여섯 장면이 전부 같은 그림, 같은 정의 위에서 일어났어요. 그림의 도형 하나하나가 실행에서 어떤 상태와 기록이 되는지 연결할 수 있으면, 처음 보는 처리 건도 읽어 낼 수 있습니다.</a:t>
+              <a:t>실습에 이어 이번 회차를 정리하겠습니다. 실습에서 남긴 기록으로 승인 대기와 끝난 상태를 구별하겠습니다. 아직 기대한 결과를 얻지 못했다면, 어디까지 확인했고 무엇이 남았는지도 함께 적어 두겠습니다. 그 눈으로 쿨러 사건 한 건을, 이번 회차에 배운 말로 다시 읽어 보겠습니다. 표 왼쪽의 장면마다 프로세스의 어떤 개념인지 먼저 말해 보세요. 그리고 오른쪽 열의 짝이 왜 서로 다른지 판단해 보세요. 첫 줄, 경보가 도착해서 처리 건이 열린 건, 메시지 시작 이벤트가 정의 하나에서 인스턴스 하나를 만든 거예요. 둘째 줄, 추천안이 나왔지만 팬은 그대로인 장면이죠. Task 하나가 끝난 순간입니다. End-to-End는 아직 진행 중이고요. 셋째 줄, 운전원 승인에서 기다리는 건 토큰이 사용자 작업에 머문 정상 상태입니다. 오류가 아니에요. 넷째 줄, 승인 여부 게이트웨이에서 승인 쪽으로 간 건 에이전트가 판단해서가 아닙니다. 운전원 승인이 낸 변수를 읽는 조건이 정한 거죠. 다섯째 줄, 운전원이 기한 안에 승인한 장면이에요. 승인 작업이 끝나면서 테두리의 비중단형 타이머도 함께 거둬졌습니다. 승인이 늦었다면 알림 가지만 열리고, 승인 작업은 그대로 기다렸겠죠. 알림이 나가는 것과 처리 건이 끝나는 것은 다른 일입니다. 마지막 줄, 쿨러 사건이 정상 보고로 끝난 건 끝 이벤트에 닿은 COMPLETED입니다. 그런데 거절로 닫힌 처리 건도 COMPLETED였죠. 성공인지 아닌지는 끝 이벤트와 결과 보고로 판단합니다. 여섯 장면이 전부 같은 그림, 같은 정의 위에서 일어났어요. 그림의 도형 하나하나가 실행에서 어떤 상태와 기록이 되는지 연결할 수 있으면, 처음 보는 처리 건도 읽어 낼 수 있습니다.</a:t>
             </a:r>
           </a:p>
         </p:txBody>
@@ -5266,6 +5266,286 @@
           <a:p>
             <a:r>
               <a:t>고른 답을 근거와 함께 맞춰 볼게요. 정답은 첫 문항 3번, 둘째 1번, 셋째 4번입니다. 첫 문항부터 볼게요. 승인 지연 타이머는 점선, 비중단형이었죠. 기한이 지나면 알림 가지만 열려서 그 가지만 끝나고, 승인 작업은 열린 채로 운전원을 기다립니다. 1번과 4번은 알림 가지의 끝을 처리 건 전체의 끝으로 헷갈린 거예요. 2번처럼 기한이 지났다고 자동으로 실행되는 일도 없습니다. 사람의 결정이 필요한 자리는 사람이 결정할 때까지 기다리니까요. 둘째 문항에서 끝남이라는 상태는 실행이 끝났다는 뜻일 뿐이에요. 명령이 나갔는지는 닿은 끝 이벤트와 냉각 명령 단계의 상태로 읽어야 합니다. 거절 종결에 닿았고 냉각 명령이 취소됨이니까, 명령은 나가지 않았어요. 2번은 끝남을 성공으로 읽은 거고, 3번은 추천과 실행을 같은 일로 본 거고, 4번은 이미 남아 있는 기록을 읽지 않은 겁니다. 셋째 문항에서 에이전트는 추천까지, 운전원은 승인까지 해요. SCADA는 열린 명령 작업의 명령을 PLC에 전하는 쪽이고요. 유효한 승인 결과와 필요한 조건을 확인하고 다음 작업인 냉각 명령을 여는 건 프로세스 엔진입니다. 그 작업이 열린 것과 실제 명령 처리가 성공한 것도 구별해야 합니다. 3번은 결정하는 쪽과 다음 작업을 여는 쪽을 헷갈린 거예요. 여기까지가 이번 회차입니다. 다음 회차에서는 같은 설계 원리를 설비 조치 밖으로 넓혀 볼 거예요. 정기 점검이 다가왔을 때, 그리고 예비품 재고가 부족할 때, 에이전트의 제안과 사람의 승인을 거쳐서 작업지시와 구매까지 이어지는 프로세스를 직접 만들고 실행해 보겠습니다. 이번 회차도 수고 많으셨습니다. 감사합니다.</a:t>
+            </a:r>
+          </a:p>
+        </p:txBody>
+      </p:sp>
+      <p:sp>
+        <p:nvSpPr>
+          <p:cNvPr id="4" name="Slide Number Placeholder 3"/>
+          <p:cNvSpPr>
+            <a:spLocks noGrp="1"/>
+          </p:cNvSpPr>
+          <p:nvPr>
+            <p:ph type="sldNum" idx="5" sz="quarter"/>
+          </p:nvPr>
+        </p:nvSpPr>
+        <p:spPr/>
+      </p:sp>
+    </p:spTree>
+  </p:cSld>
+  <p:clrMapOvr>
+    <a:masterClrMapping/>
+  </p:clrMapOvr>
+</p:notes>
+</file>
+
+<file path=ppt/notesSlides/notesSlide71.xml><?xml version="1.0" encoding="utf-8"?>
+<p:notes xmlns:a="http://schemas.openxmlformats.org/drawingml/2006/main" xmlns:p="http://schemas.openxmlformats.org/presentationml/2006/main" xmlns:r="http://schemas.openxmlformats.org/officeDocument/2006/relationships">
+  <p:cSld>
+    <p:spTree>
+      <p:nvGrpSpPr>
+        <p:cNvPr id="1" name=""/>
+        <p:cNvGrpSpPr/>
+        <p:nvPr/>
+      </p:nvGrpSpPr>
+      <p:grpSpPr>
+        <a:xfrm>
+          <a:off x="0" y="0"/>
+          <a:ext cx="0" cy="0"/>
+          <a:chOff x="0" y="0"/>
+          <a:chExt cx="0" cy="0"/>
+        </a:xfrm>
+      </p:grpSpPr>
+      <p:sp>
+        <p:nvSpPr>
+          <p:cNvPr id="2" name="Slide Image Placeholder 1"/>
+          <p:cNvSpPr>
+            <a:spLocks noGrp="1"/>
+          </p:cNvSpPr>
+          <p:nvPr>
+            <p:ph type="sldImg" idx="2"/>
+          </p:nvPr>
+        </p:nvSpPr>
+        <p:spPr/>
+      </p:sp>
+      <p:sp>
+        <p:nvSpPr>
+          <p:cNvPr id="3" name="Notes Placeholder 2"/>
+          <p:cNvSpPr>
+            <a:spLocks noGrp="1"/>
+          </p:cNvSpPr>
+          <p:nvPr>
+            <p:ph type="body" idx="3" sz="quarter"/>
+          </p:nvPr>
+        </p:nvSpPr>
+        <p:spPr/>
+        <p:txBody>
+          <a:bodyPr/>
+          <a:lstStyle/>
+          <a:p>
+            <a:r>
+              <a:t>60~61장 통합 발화는 60장 발표자 노트를 따른다.</a:t>
+            </a:r>
+          </a:p>
+        </p:txBody>
+      </p:sp>
+      <p:sp>
+        <p:nvSpPr>
+          <p:cNvPr id="4" name="Slide Number Placeholder 3"/>
+          <p:cNvSpPr>
+            <a:spLocks noGrp="1"/>
+          </p:cNvSpPr>
+          <p:nvPr>
+            <p:ph type="sldNum" idx="5" sz="quarter"/>
+          </p:nvPr>
+        </p:nvSpPr>
+        <p:spPr/>
+      </p:sp>
+    </p:spTree>
+  </p:cSld>
+  <p:clrMapOvr>
+    <a:masterClrMapping/>
+  </p:clrMapOvr>
+</p:notes>
+</file>
+
+<file path=ppt/notesSlides/notesSlide72.xml><?xml version="1.0" encoding="utf-8"?>
+<p:notes xmlns:a="http://schemas.openxmlformats.org/drawingml/2006/main" xmlns:p="http://schemas.openxmlformats.org/presentationml/2006/main" xmlns:r="http://schemas.openxmlformats.org/officeDocument/2006/relationships">
+  <p:cSld>
+    <p:spTree>
+      <p:nvGrpSpPr>
+        <p:cNvPr id="1" name=""/>
+        <p:cNvGrpSpPr/>
+        <p:nvPr/>
+      </p:nvGrpSpPr>
+      <p:grpSpPr>
+        <a:xfrm>
+          <a:off x="0" y="0"/>
+          <a:ext cx="0" cy="0"/>
+          <a:chOff x="0" y="0"/>
+          <a:chExt cx="0" cy="0"/>
+        </a:xfrm>
+      </p:grpSpPr>
+      <p:sp>
+        <p:nvSpPr>
+          <p:cNvPr id="2" name="Slide Image Placeholder 1"/>
+          <p:cNvSpPr>
+            <a:spLocks noGrp="1"/>
+          </p:cNvSpPr>
+          <p:nvPr>
+            <p:ph type="sldImg" idx="2"/>
+          </p:nvPr>
+        </p:nvSpPr>
+        <p:spPr/>
+      </p:sp>
+      <p:sp>
+        <p:nvSpPr>
+          <p:cNvPr id="3" name="Notes Placeholder 2"/>
+          <p:cNvSpPr>
+            <a:spLocks noGrp="1"/>
+          </p:cNvSpPr>
+          <p:nvPr>
+            <p:ph type="body" idx="3" sz="quarter"/>
+          </p:nvPr>
+        </p:nvSpPr>
+        <p:spPr/>
+        <p:txBody>
+          <a:bodyPr/>
+          <a:lstStyle/>
+          <a:p>
+            <a:r>
+              <a:t>62~63장 통합 발화는 62장 발표자 노트를 따른다.</a:t>
+            </a:r>
+          </a:p>
+        </p:txBody>
+      </p:sp>
+      <p:sp>
+        <p:nvSpPr>
+          <p:cNvPr id="4" name="Slide Number Placeholder 3"/>
+          <p:cNvSpPr>
+            <a:spLocks noGrp="1"/>
+          </p:cNvSpPr>
+          <p:nvPr>
+            <p:ph type="sldNum" idx="5" sz="quarter"/>
+          </p:nvPr>
+        </p:nvSpPr>
+        <p:spPr/>
+      </p:sp>
+    </p:spTree>
+  </p:cSld>
+  <p:clrMapOvr>
+    <a:masterClrMapping/>
+  </p:clrMapOvr>
+</p:notes>
+</file>
+
+<file path=ppt/notesSlides/notesSlide73.xml><?xml version="1.0" encoding="utf-8"?>
+<p:notes xmlns:a="http://schemas.openxmlformats.org/drawingml/2006/main" xmlns:p="http://schemas.openxmlformats.org/presentationml/2006/main" xmlns:r="http://schemas.openxmlformats.org/officeDocument/2006/relationships">
+  <p:cSld>
+    <p:spTree>
+      <p:nvGrpSpPr>
+        <p:cNvPr id="1" name=""/>
+        <p:cNvGrpSpPr/>
+        <p:nvPr/>
+      </p:nvGrpSpPr>
+      <p:grpSpPr>
+        <a:xfrm>
+          <a:off x="0" y="0"/>
+          <a:ext cx="0" cy="0"/>
+          <a:chOff x="0" y="0"/>
+          <a:chExt cx="0" cy="0"/>
+        </a:xfrm>
+      </p:grpSpPr>
+      <p:sp>
+        <p:nvSpPr>
+          <p:cNvPr id="2" name="Slide Image Placeholder 1"/>
+          <p:cNvSpPr>
+            <a:spLocks noGrp="1"/>
+          </p:cNvSpPr>
+          <p:nvPr>
+            <p:ph type="sldImg" idx="2"/>
+          </p:nvPr>
+        </p:nvSpPr>
+        <p:spPr/>
+      </p:sp>
+      <p:sp>
+        <p:nvSpPr>
+          <p:cNvPr id="3" name="Notes Placeholder 2"/>
+          <p:cNvSpPr>
+            <a:spLocks noGrp="1"/>
+          </p:cNvSpPr>
+          <p:nvPr>
+            <p:ph type="body" idx="3" sz="quarter"/>
+          </p:nvPr>
+        </p:nvSpPr>
+        <p:spPr/>
+        <p:txBody>
+          <a:bodyPr/>
+          <a:lstStyle/>
+          <a:p>
+            <a:r>
+              <a:t>64~65장 통합 발화는 64장 발표자 노트를 따른다.</a:t>
+            </a:r>
+          </a:p>
+        </p:txBody>
+      </p:sp>
+      <p:sp>
+        <p:nvSpPr>
+          <p:cNvPr id="4" name="Slide Number Placeholder 3"/>
+          <p:cNvSpPr>
+            <a:spLocks noGrp="1"/>
+          </p:cNvSpPr>
+          <p:nvPr>
+            <p:ph type="sldNum" idx="5" sz="quarter"/>
+          </p:nvPr>
+        </p:nvSpPr>
+        <p:spPr/>
+      </p:sp>
+    </p:spTree>
+  </p:cSld>
+  <p:clrMapOvr>
+    <a:masterClrMapping/>
+  </p:clrMapOvr>
+</p:notes>
+</file>
+
+<file path=ppt/notesSlides/notesSlide74.xml><?xml version="1.0" encoding="utf-8"?>
+<p:notes xmlns:a="http://schemas.openxmlformats.org/drawingml/2006/main" xmlns:p="http://schemas.openxmlformats.org/presentationml/2006/main" xmlns:r="http://schemas.openxmlformats.org/officeDocument/2006/relationships">
+  <p:cSld>
+    <p:spTree>
+      <p:nvGrpSpPr>
+        <p:cNvPr id="1" name=""/>
+        <p:cNvGrpSpPr/>
+        <p:nvPr/>
+      </p:nvGrpSpPr>
+      <p:grpSpPr>
+        <a:xfrm>
+          <a:off x="0" y="0"/>
+          <a:ext cx="0" cy="0"/>
+          <a:chOff x="0" y="0"/>
+          <a:chExt cx="0" cy="0"/>
+        </a:xfrm>
+      </p:grpSpPr>
+      <p:sp>
+        <p:nvSpPr>
+          <p:cNvPr id="2" name="Slide Image Placeholder 1"/>
+          <p:cNvSpPr>
+            <a:spLocks noGrp="1"/>
+          </p:cNvSpPr>
+          <p:nvPr>
+            <p:ph type="sldImg" idx="2"/>
+          </p:nvPr>
+        </p:nvSpPr>
+        <p:spPr/>
+      </p:sp>
+      <p:sp>
+        <p:nvSpPr>
+          <p:cNvPr id="3" name="Notes Placeholder 2"/>
+          <p:cNvSpPr>
+            <a:spLocks noGrp="1"/>
+          </p:cNvSpPr>
+          <p:nvPr>
+            <p:ph type="body" idx="3" sz="quarter"/>
+          </p:nvPr>
+        </p:nvSpPr>
+        <p:spPr/>
+        <p:txBody>
+          <a:bodyPr/>
+          <a:lstStyle/>
+          <a:p>
+            <a:r>
+              <a:t>66~67장 통합 발화는 66장 발표자 노트를 따른다.</a:t>
             </a:r>
           </a:p>
         </p:txBody>
@@ -36946,7 +37226,7 @@
                 <a:ea typeface="맑은 고딕"/>
                 <a:cs typeface="맑은 고딕"/>
               </a:rPr>
-              <a:t>HYD에서는 경보로 열린 처리 건을 이 엔진이 정의의 조건에 따라 진행을 관리한다.</a:t>
+              <a:t>HYD에서는 이 엔진이 정의의 조건에 따라 경보로 열린 처리 건의 진행을 관리한다.</a:t>
             </a:r>
           </a:p>
         </p:txBody>
